--- a/Final/Figures/phasefig.pptx
+++ b/Final/Figures/phasefig.pptx
@@ -2,12 +2,12 @@
 <file path=ppt/presentation.xml><?xml version="1.0" encoding="utf-8"?>
 <p:presentation xmlns:a="http://schemas.openxmlformats.org/drawingml/2006/main" xmlns:r="http://schemas.openxmlformats.org/officeDocument/2006/relationships" xmlns:p="http://schemas.openxmlformats.org/presentationml/2006/main" saveSubsetFonts="1">
   <p:sldMasterIdLst>
-    <p:sldMasterId id="2147483708" r:id="rId1"/>
+    <p:sldMasterId id="2147483768" r:id="rId1"/>
   </p:sldMasterIdLst>
   <p:sldIdLst>
     <p:sldId id="256" r:id="rId2"/>
   </p:sldIdLst>
-  <p:sldSz cx="12239625" cy="4679950"/>
+  <p:sldSz cx="9906000" cy="3779838"/>
   <p:notesSz cx="6858000" cy="9144000"/>
   <p:defaultTextStyle>
     <a:defPPr>
@@ -141,15 +141,15 @@
         </p:nvSpPr>
         <p:spPr>
           <a:xfrm>
-            <a:off x="1529953" y="765909"/>
-            <a:ext cx="9179719" cy="1629316"/>
+            <a:off x="1238250" y="618599"/>
+            <a:ext cx="7429500" cy="1315944"/>
           </a:xfrm>
         </p:spPr>
         <p:txBody>
           <a:bodyPr anchor="b"/>
           <a:lstStyle>
             <a:lvl1pPr algn="ctr">
-              <a:defRPr sz="4094"/>
+              <a:defRPr sz="3307"/>
             </a:lvl1pPr>
           </a:lstStyle>
           <a:p>
@@ -173,8 +173,8 @@
         </p:nvSpPr>
         <p:spPr>
           <a:xfrm>
-            <a:off x="1529953" y="2458058"/>
-            <a:ext cx="9179719" cy="1129904"/>
+            <a:off x="1238250" y="1985290"/>
+            <a:ext cx="7429500" cy="912586"/>
           </a:xfrm>
         </p:spPr>
         <p:txBody>
@@ -182,39 +182,39 @@
           <a:lstStyle>
             <a:lvl1pPr marL="0" indent="0" algn="ctr">
               <a:buNone/>
-              <a:defRPr sz="1638"/>
+              <a:defRPr sz="1323"/>
             </a:lvl1pPr>
-            <a:lvl2pPr marL="311993" indent="0" algn="ctr">
-              <a:buNone/>
-              <a:defRPr sz="1365"/>
+            <a:lvl2pPr marL="252009" indent="0" algn="ctr">
+              <a:buNone/>
+              <a:defRPr sz="1102"/>
             </a:lvl2pPr>
-            <a:lvl3pPr marL="623987" indent="0" algn="ctr">
-              <a:buNone/>
-              <a:defRPr sz="1228"/>
+            <a:lvl3pPr marL="504017" indent="0" algn="ctr">
+              <a:buNone/>
+              <a:defRPr sz="992"/>
             </a:lvl3pPr>
-            <a:lvl4pPr marL="935980" indent="0" algn="ctr">
-              <a:buNone/>
-              <a:defRPr sz="1092"/>
+            <a:lvl4pPr marL="756026" indent="0" algn="ctr">
+              <a:buNone/>
+              <a:defRPr sz="882"/>
             </a:lvl4pPr>
-            <a:lvl5pPr marL="1247973" indent="0" algn="ctr">
-              <a:buNone/>
-              <a:defRPr sz="1092"/>
+            <a:lvl5pPr marL="1008035" indent="0" algn="ctr">
+              <a:buNone/>
+              <a:defRPr sz="882"/>
             </a:lvl5pPr>
-            <a:lvl6pPr marL="1559966" indent="0" algn="ctr">
-              <a:buNone/>
-              <a:defRPr sz="1092"/>
+            <a:lvl6pPr marL="1260043" indent="0" algn="ctr">
+              <a:buNone/>
+              <a:defRPr sz="882"/>
             </a:lvl6pPr>
-            <a:lvl7pPr marL="1871960" indent="0" algn="ctr">
-              <a:buNone/>
-              <a:defRPr sz="1092"/>
+            <a:lvl7pPr marL="1512052" indent="0" algn="ctr">
+              <a:buNone/>
+              <a:defRPr sz="882"/>
             </a:lvl7pPr>
-            <a:lvl8pPr marL="2183953" indent="0" algn="ctr">
-              <a:buNone/>
-              <a:defRPr sz="1092"/>
+            <a:lvl8pPr marL="1764060" indent="0" algn="ctr">
+              <a:buNone/>
+              <a:defRPr sz="882"/>
             </a:lvl8pPr>
-            <a:lvl9pPr marL="2495946" indent="0" algn="ctr">
-              <a:buNone/>
-              <a:defRPr sz="1092"/>
+            <a:lvl9pPr marL="2016069" indent="0" algn="ctr">
+              <a:buNone/>
+              <a:defRPr sz="882"/>
             </a:lvl9pPr>
           </a:lstStyle>
           <a:p>
@@ -243,7 +243,7 @@
           <a:p>
             <a:fld id="{CC6FB895-B65F-4EA9-9907-69D32227E72B}" type="datetimeFigureOut">
               <a:rPr lang="zh-TW" altLang="en-US" smtClean="0"/>
-              <a:t>2026/4/22</a:t>
+              <a:t>2026/5/20</a:t>
             </a:fld>
             <a:endParaRPr lang="zh-TW" altLang="en-US"/>
           </a:p>
@@ -294,7 +294,7 @@
     </p:spTree>
     <p:extLst>
       <p:ext uri="{BB962C8B-B14F-4D97-AF65-F5344CB8AC3E}">
-        <p14:creationId xmlns:p14="http://schemas.microsoft.com/office/powerpoint/2010/main" val="640298018"/>
+        <p14:creationId xmlns:p14="http://schemas.microsoft.com/office/powerpoint/2010/main" val="2807578800"/>
       </p:ext>
     </p:extLst>
   </p:cSld>
@@ -413,7 +413,7 @@
           <a:p>
             <a:fld id="{CC6FB895-B65F-4EA9-9907-69D32227E72B}" type="datetimeFigureOut">
               <a:rPr lang="zh-TW" altLang="en-US" smtClean="0"/>
-              <a:t>2026/4/22</a:t>
+              <a:t>2026/5/20</a:t>
             </a:fld>
             <a:endParaRPr lang="zh-TW" altLang="en-US"/>
           </a:p>
@@ -464,7 +464,7 @@
     </p:spTree>
     <p:extLst>
       <p:ext uri="{BB962C8B-B14F-4D97-AF65-F5344CB8AC3E}">
-        <p14:creationId xmlns:p14="http://schemas.microsoft.com/office/powerpoint/2010/main" val="2618995682"/>
+        <p14:creationId xmlns:p14="http://schemas.microsoft.com/office/powerpoint/2010/main" val="3412359488"/>
       </p:ext>
     </p:extLst>
   </p:cSld>
@@ -503,8 +503,8 @@
         </p:nvSpPr>
         <p:spPr>
           <a:xfrm>
-            <a:off x="8758982" y="249164"/>
-            <a:ext cx="2639169" cy="3966041"/>
+            <a:off x="7088981" y="201241"/>
+            <a:ext cx="2135981" cy="3203238"/>
           </a:xfrm>
         </p:spPr>
         <p:txBody>
@@ -531,8 +531,8 @@
         </p:nvSpPr>
         <p:spPr>
           <a:xfrm>
-            <a:off x="841474" y="249164"/>
-            <a:ext cx="7764512" cy="3966041"/>
+            <a:off x="681037" y="201241"/>
+            <a:ext cx="6284119" cy="3203238"/>
           </a:xfrm>
         </p:spPr>
         <p:txBody>
@@ -593,7 +593,7 @@
           <a:p>
             <a:fld id="{CC6FB895-B65F-4EA9-9907-69D32227E72B}" type="datetimeFigureOut">
               <a:rPr lang="zh-TW" altLang="en-US" smtClean="0"/>
-              <a:t>2026/4/22</a:t>
+              <a:t>2026/5/20</a:t>
             </a:fld>
             <a:endParaRPr lang="zh-TW" altLang="en-US"/>
           </a:p>
@@ -644,7 +644,7 @@
     </p:spTree>
     <p:extLst>
       <p:ext uri="{BB962C8B-B14F-4D97-AF65-F5344CB8AC3E}">
-        <p14:creationId xmlns:p14="http://schemas.microsoft.com/office/powerpoint/2010/main" val="2756246212"/>
+        <p14:creationId xmlns:p14="http://schemas.microsoft.com/office/powerpoint/2010/main" val="2254159551"/>
       </p:ext>
     </p:extLst>
   </p:cSld>
@@ -763,7 +763,7 @@
           <a:p>
             <a:fld id="{CC6FB895-B65F-4EA9-9907-69D32227E72B}" type="datetimeFigureOut">
               <a:rPr lang="zh-TW" altLang="en-US" smtClean="0"/>
-              <a:t>2026/4/22</a:t>
+              <a:t>2026/5/20</a:t>
             </a:fld>
             <a:endParaRPr lang="zh-TW" altLang="en-US"/>
           </a:p>
@@ -814,7 +814,7 @@
     </p:spTree>
     <p:extLst>
       <p:ext uri="{BB962C8B-B14F-4D97-AF65-F5344CB8AC3E}">
-        <p14:creationId xmlns:p14="http://schemas.microsoft.com/office/powerpoint/2010/main" val="886714822"/>
+        <p14:creationId xmlns:p14="http://schemas.microsoft.com/office/powerpoint/2010/main" val="962955166"/>
       </p:ext>
     </p:extLst>
   </p:cSld>
@@ -853,15 +853,15 @@
         </p:nvSpPr>
         <p:spPr>
           <a:xfrm>
-            <a:off x="835099" y="1166738"/>
-            <a:ext cx="10556677" cy="1946729"/>
+            <a:off x="675878" y="942335"/>
+            <a:ext cx="8543925" cy="1572307"/>
           </a:xfrm>
         </p:spPr>
         <p:txBody>
           <a:bodyPr anchor="b"/>
           <a:lstStyle>
             <a:lvl1pPr>
-              <a:defRPr sz="4094"/>
+              <a:defRPr sz="3307"/>
             </a:lvl1pPr>
           </a:lstStyle>
           <a:p>
@@ -885,8 +885,8 @@
         </p:nvSpPr>
         <p:spPr>
           <a:xfrm>
-            <a:off x="835099" y="3131884"/>
-            <a:ext cx="10556677" cy="1023739"/>
+            <a:off x="675878" y="2529517"/>
+            <a:ext cx="8543925" cy="826839"/>
           </a:xfrm>
         </p:spPr>
         <p:txBody>
@@ -894,7 +894,7 @@
           <a:lstStyle>
             <a:lvl1pPr marL="0" indent="0">
               <a:buNone/>
-              <a:defRPr sz="1638">
+              <a:defRPr sz="1323">
                 <a:solidFill>
                   <a:schemeClr val="tx1">
                     <a:tint val="75000"/>
@@ -902,9 +902,9 @@
                 </a:solidFill>
               </a:defRPr>
             </a:lvl1pPr>
-            <a:lvl2pPr marL="311993" indent="0">
-              <a:buNone/>
-              <a:defRPr sz="1365">
+            <a:lvl2pPr marL="252009" indent="0">
+              <a:buNone/>
+              <a:defRPr sz="1102">
                 <a:solidFill>
                   <a:schemeClr val="tx1">
                     <a:tint val="75000"/>
@@ -912,9 +912,9 @@
                 </a:solidFill>
               </a:defRPr>
             </a:lvl2pPr>
-            <a:lvl3pPr marL="623987" indent="0">
-              <a:buNone/>
-              <a:defRPr sz="1228">
+            <a:lvl3pPr marL="504017" indent="0">
+              <a:buNone/>
+              <a:defRPr sz="992">
                 <a:solidFill>
                   <a:schemeClr val="tx1">
                     <a:tint val="75000"/>
@@ -922,9 +922,9 @@
                 </a:solidFill>
               </a:defRPr>
             </a:lvl3pPr>
-            <a:lvl4pPr marL="935980" indent="0">
-              <a:buNone/>
-              <a:defRPr sz="1092">
+            <a:lvl4pPr marL="756026" indent="0">
+              <a:buNone/>
+              <a:defRPr sz="882">
                 <a:solidFill>
                   <a:schemeClr val="tx1">
                     <a:tint val="75000"/>
@@ -932,9 +932,9 @@
                 </a:solidFill>
               </a:defRPr>
             </a:lvl4pPr>
-            <a:lvl5pPr marL="1247973" indent="0">
-              <a:buNone/>
-              <a:defRPr sz="1092">
+            <a:lvl5pPr marL="1008035" indent="0">
+              <a:buNone/>
+              <a:defRPr sz="882">
                 <a:solidFill>
                   <a:schemeClr val="tx1">
                     <a:tint val="75000"/>
@@ -942,9 +942,9 @@
                 </a:solidFill>
               </a:defRPr>
             </a:lvl5pPr>
-            <a:lvl6pPr marL="1559966" indent="0">
-              <a:buNone/>
-              <a:defRPr sz="1092">
+            <a:lvl6pPr marL="1260043" indent="0">
+              <a:buNone/>
+              <a:defRPr sz="882">
                 <a:solidFill>
                   <a:schemeClr val="tx1">
                     <a:tint val="75000"/>
@@ -952,9 +952,9 @@
                 </a:solidFill>
               </a:defRPr>
             </a:lvl6pPr>
-            <a:lvl7pPr marL="1871960" indent="0">
-              <a:buNone/>
-              <a:defRPr sz="1092">
+            <a:lvl7pPr marL="1512052" indent="0">
+              <a:buNone/>
+              <a:defRPr sz="882">
                 <a:solidFill>
                   <a:schemeClr val="tx1">
                     <a:tint val="75000"/>
@@ -962,9 +962,9 @@
                 </a:solidFill>
               </a:defRPr>
             </a:lvl7pPr>
-            <a:lvl8pPr marL="2183953" indent="0">
-              <a:buNone/>
-              <a:defRPr sz="1092">
+            <a:lvl8pPr marL="1764060" indent="0">
+              <a:buNone/>
+              <a:defRPr sz="882">
                 <a:solidFill>
                   <a:schemeClr val="tx1">
                     <a:tint val="75000"/>
@@ -972,9 +972,9 @@
                 </a:solidFill>
               </a:defRPr>
             </a:lvl8pPr>
-            <a:lvl9pPr marL="2495946" indent="0">
-              <a:buNone/>
-              <a:defRPr sz="1092">
+            <a:lvl9pPr marL="2016069" indent="0">
+              <a:buNone/>
+              <a:defRPr sz="882">
                 <a:solidFill>
                   <a:schemeClr val="tx1">
                     <a:tint val="75000"/>
@@ -1009,7 +1009,7 @@
           <a:p>
             <a:fld id="{CC6FB895-B65F-4EA9-9907-69D32227E72B}" type="datetimeFigureOut">
               <a:rPr lang="zh-TW" altLang="en-US" smtClean="0"/>
-              <a:t>2026/4/22</a:t>
+              <a:t>2026/5/20</a:t>
             </a:fld>
             <a:endParaRPr lang="zh-TW" altLang="en-US"/>
           </a:p>
@@ -1060,7 +1060,7 @@
     </p:spTree>
     <p:extLst>
       <p:ext uri="{BB962C8B-B14F-4D97-AF65-F5344CB8AC3E}">
-        <p14:creationId xmlns:p14="http://schemas.microsoft.com/office/powerpoint/2010/main" val="467405802"/>
+        <p14:creationId xmlns:p14="http://schemas.microsoft.com/office/powerpoint/2010/main" val="1627930357"/>
       </p:ext>
     </p:extLst>
   </p:cSld>
@@ -1122,8 +1122,8 @@
         </p:nvSpPr>
         <p:spPr>
           <a:xfrm>
-            <a:off x="841474" y="1245820"/>
-            <a:ext cx="5201841" cy="2969385"/>
+            <a:off x="681038" y="1006207"/>
+            <a:ext cx="4210050" cy="2398272"/>
           </a:xfrm>
         </p:spPr>
         <p:txBody>
@@ -1179,8 +1179,8 @@
         </p:nvSpPr>
         <p:spPr>
           <a:xfrm>
-            <a:off x="6196310" y="1245820"/>
-            <a:ext cx="5201841" cy="2969385"/>
+            <a:off x="5014913" y="1006207"/>
+            <a:ext cx="4210050" cy="2398272"/>
           </a:xfrm>
         </p:spPr>
         <p:txBody>
@@ -1241,7 +1241,7 @@
           <a:p>
             <a:fld id="{CC6FB895-B65F-4EA9-9907-69D32227E72B}" type="datetimeFigureOut">
               <a:rPr lang="zh-TW" altLang="en-US" smtClean="0"/>
-              <a:t>2026/4/22</a:t>
+              <a:t>2026/5/20</a:t>
             </a:fld>
             <a:endParaRPr lang="zh-TW" altLang="en-US"/>
           </a:p>
@@ -1292,7 +1292,7 @@
     </p:spTree>
     <p:extLst>
       <p:ext uri="{BB962C8B-B14F-4D97-AF65-F5344CB8AC3E}">
-        <p14:creationId xmlns:p14="http://schemas.microsoft.com/office/powerpoint/2010/main" val="780735015"/>
+        <p14:creationId xmlns:p14="http://schemas.microsoft.com/office/powerpoint/2010/main" val="2263463407"/>
       </p:ext>
     </p:extLst>
   </p:cSld>
@@ -1331,8 +1331,8 @@
         </p:nvSpPr>
         <p:spPr>
           <a:xfrm>
-            <a:off x="843068" y="249164"/>
-            <a:ext cx="10556677" cy="904574"/>
+            <a:off x="682328" y="201242"/>
+            <a:ext cx="8543925" cy="730594"/>
           </a:xfrm>
         </p:spPr>
         <p:txBody>
@@ -1359,8 +1359,8 @@
         </p:nvSpPr>
         <p:spPr>
           <a:xfrm>
-            <a:off x="843069" y="1147238"/>
-            <a:ext cx="5177935" cy="562244"/>
+            <a:off x="682328" y="926586"/>
+            <a:ext cx="4190702" cy="454105"/>
           </a:xfrm>
         </p:spPr>
         <p:txBody>
@@ -1368,39 +1368,39 @@
           <a:lstStyle>
             <a:lvl1pPr marL="0" indent="0">
               <a:buNone/>
-              <a:defRPr sz="1638" b="1"/>
+              <a:defRPr sz="1323" b="1"/>
             </a:lvl1pPr>
-            <a:lvl2pPr marL="311993" indent="0">
-              <a:buNone/>
-              <a:defRPr sz="1365" b="1"/>
+            <a:lvl2pPr marL="252009" indent="0">
+              <a:buNone/>
+              <a:defRPr sz="1102" b="1"/>
             </a:lvl2pPr>
-            <a:lvl3pPr marL="623987" indent="0">
-              <a:buNone/>
-              <a:defRPr sz="1228" b="1"/>
+            <a:lvl3pPr marL="504017" indent="0">
+              <a:buNone/>
+              <a:defRPr sz="992" b="1"/>
             </a:lvl3pPr>
-            <a:lvl4pPr marL="935980" indent="0">
-              <a:buNone/>
-              <a:defRPr sz="1092" b="1"/>
+            <a:lvl4pPr marL="756026" indent="0">
+              <a:buNone/>
+              <a:defRPr sz="882" b="1"/>
             </a:lvl4pPr>
-            <a:lvl5pPr marL="1247973" indent="0">
-              <a:buNone/>
-              <a:defRPr sz="1092" b="1"/>
+            <a:lvl5pPr marL="1008035" indent="0">
+              <a:buNone/>
+              <a:defRPr sz="882" b="1"/>
             </a:lvl5pPr>
-            <a:lvl6pPr marL="1559966" indent="0">
-              <a:buNone/>
-              <a:defRPr sz="1092" b="1"/>
+            <a:lvl6pPr marL="1260043" indent="0">
+              <a:buNone/>
+              <a:defRPr sz="882" b="1"/>
             </a:lvl6pPr>
-            <a:lvl7pPr marL="1871960" indent="0">
-              <a:buNone/>
-              <a:defRPr sz="1092" b="1"/>
+            <a:lvl7pPr marL="1512052" indent="0">
+              <a:buNone/>
+              <a:defRPr sz="882" b="1"/>
             </a:lvl7pPr>
-            <a:lvl8pPr marL="2183953" indent="0">
-              <a:buNone/>
-              <a:defRPr sz="1092" b="1"/>
+            <a:lvl8pPr marL="1764060" indent="0">
+              <a:buNone/>
+              <a:defRPr sz="882" b="1"/>
             </a:lvl8pPr>
-            <a:lvl9pPr marL="2495946" indent="0">
-              <a:buNone/>
-              <a:defRPr sz="1092" b="1"/>
+            <a:lvl9pPr marL="2016069" indent="0">
+              <a:buNone/>
+              <a:defRPr sz="882" b="1"/>
             </a:lvl9pPr>
           </a:lstStyle>
           <a:p>
@@ -1424,8 +1424,8 @@
         </p:nvSpPr>
         <p:spPr>
           <a:xfrm>
-            <a:off x="843069" y="1709482"/>
-            <a:ext cx="5177935" cy="2514390"/>
+            <a:off x="682328" y="1380691"/>
+            <a:ext cx="4190702" cy="2030788"/>
           </a:xfrm>
         </p:spPr>
         <p:txBody>
@@ -1481,8 +1481,8 @@
         </p:nvSpPr>
         <p:spPr>
           <a:xfrm>
-            <a:off x="6196310" y="1147238"/>
-            <a:ext cx="5203435" cy="562244"/>
+            <a:off x="5014913" y="926586"/>
+            <a:ext cx="4211340" cy="454105"/>
           </a:xfrm>
         </p:spPr>
         <p:txBody>
@@ -1490,39 +1490,39 @@
           <a:lstStyle>
             <a:lvl1pPr marL="0" indent="0">
               <a:buNone/>
-              <a:defRPr sz="1638" b="1"/>
+              <a:defRPr sz="1323" b="1"/>
             </a:lvl1pPr>
-            <a:lvl2pPr marL="311993" indent="0">
-              <a:buNone/>
-              <a:defRPr sz="1365" b="1"/>
+            <a:lvl2pPr marL="252009" indent="0">
+              <a:buNone/>
+              <a:defRPr sz="1102" b="1"/>
             </a:lvl2pPr>
-            <a:lvl3pPr marL="623987" indent="0">
-              <a:buNone/>
-              <a:defRPr sz="1228" b="1"/>
+            <a:lvl3pPr marL="504017" indent="0">
+              <a:buNone/>
+              <a:defRPr sz="992" b="1"/>
             </a:lvl3pPr>
-            <a:lvl4pPr marL="935980" indent="0">
-              <a:buNone/>
-              <a:defRPr sz="1092" b="1"/>
+            <a:lvl4pPr marL="756026" indent="0">
+              <a:buNone/>
+              <a:defRPr sz="882" b="1"/>
             </a:lvl4pPr>
-            <a:lvl5pPr marL="1247973" indent="0">
-              <a:buNone/>
-              <a:defRPr sz="1092" b="1"/>
+            <a:lvl5pPr marL="1008035" indent="0">
+              <a:buNone/>
+              <a:defRPr sz="882" b="1"/>
             </a:lvl5pPr>
-            <a:lvl6pPr marL="1559966" indent="0">
-              <a:buNone/>
-              <a:defRPr sz="1092" b="1"/>
+            <a:lvl6pPr marL="1260043" indent="0">
+              <a:buNone/>
+              <a:defRPr sz="882" b="1"/>
             </a:lvl6pPr>
-            <a:lvl7pPr marL="1871960" indent="0">
-              <a:buNone/>
-              <a:defRPr sz="1092" b="1"/>
+            <a:lvl7pPr marL="1512052" indent="0">
+              <a:buNone/>
+              <a:defRPr sz="882" b="1"/>
             </a:lvl7pPr>
-            <a:lvl8pPr marL="2183953" indent="0">
-              <a:buNone/>
-              <a:defRPr sz="1092" b="1"/>
+            <a:lvl8pPr marL="1764060" indent="0">
+              <a:buNone/>
+              <a:defRPr sz="882" b="1"/>
             </a:lvl8pPr>
-            <a:lvl9pPr marL="2495946" indent="0">
-              <a:buNone/>
-              <a:defRPr sz="1092" b="1"/>
+            <a:lvl9pPr marL="2016069" indent="0">
+              <a:buNone/>
+              <a:defRPr sz="882" b="1"/>
             </a:lvl9pPr>
           </a:lstStyle>
           <a:p>
@@ -1546,8 +1546,8 @@
         </p:nvSpPr>
         <p:spPr>
           <a:xfrm>
-            <a:off x="6196310" y="1709482"/>
-            <a:ext cx="5203435" cy="2514390"/>
+            <a:off x="5014913" y="1380691"/>
+            <a:ext cx="4211340" cy="2030788"/>
           </a:xfrm>
         </p:spPr>
         <p:txBody>
@@ -1608,7 +1608,7 @@
           <a:p>
             <a:fld id="{CC6FB895-B65F-4EA9-9907-69D32227E72B}" type="datetimeFigureOut">
               <a:rPr lang="zh-TW" altLang="en-US" smtClean="0"/>
-              <a:t>2026/4/22</a:t>
+              <a:t>2026/5/20</a:t>
             </a:fld>
             <a:endParaRPr lang="zh-TW" altLang="en-US"/>
           </a:p>
@@ -1659,7 +1659,7 @@
     </p:spTree>
     <p:extLst>
       <p:ext uri="{BB962C8B-B14F-4D97-AF65-F5344CB8AC3E}">
-        <p14:creationId xmlns:p14="http://schemas.microsoft.com/office/powerpoint/2010/main" val="1594882215"/>
+        <p14:creationId xmlns:p14="http://schemas.microsoft.com/office/powerpoint/2010/main" val="2603977110"/>
       </p:ext>
     </p:extLst>
   </p:cSld>
@@ -1726,7 +1726,7 @@
           <a:p>
             <a:fld id="{CC6FB895-B65F-4EA9-9907-69D32227E72B}" type="datetimeFigureOut">
               <a:rPr lang="zh-TW" altLang="en-US" smtClean="0"/>
-              <a:t>2026/4/22</a:t>
+              <a:t>2026/5/20</a:t>
             </a:fld>
             <a:endParaRPr lang="zh-TW" altLang="en-US"/>
           </a:p>
@@ -1777,7 +1777,7 @@
     </p:spTree>
     <p:extLst>
       <p:ext uri="{BB962C8B-B14F-4D97-AF65-F5344CB8AC3E}">
-        <p14:creationId xmlns:p14="http://schemas.microsoft.com/office/powerpoint/2010/main" val="1514674052"/>
+        <p14:creationId xmlns:p14="http://schemas.microsoft.com/office/powerpoint/2010/main" val="3073389496"/>
       </p:ext>
     </p:extLst>
   </p:cSld>
@@ -1821,7 +1821,7 @@
           <a:p>
             <a:fld id="{CC6FB895-B65F-4EA9-9907-69D32227E72B}" type="datetimeFigureOut">
               <a:rPr lang="zh-TW" altLang="en-US" smtClean="0"/>
-              <a:t>2026/4/22</a:t>
+              <a:t>2026/5/20</a:t>
             </a:fld>
             <a:endParaRPr lang="zh-TW" altLang="en-US"/>
           </a:p>
@@ -1872,7 +1872,7 @@
     </p:spTree>
     <p:extLst>
       <p:ext uri="{BB962C8B-B14F-4D97-AF65-F5344CB8AC3E}">
-        <p14:creationId xmlns:p14="http://schemas.microsoft.com/office/powerpoint/2010/main" val="1075775104"/>
+        <p14:creationId xmlns:p14="http://schemas.microsoft.com/office/powerpoint/2010/main" val="2081778266"/>
       </p:ext>
     </p:extLst>
   </p:cSld>
@@ -1911,15 +1911,15 @@
         </p:nvSpPr>
         <p:spPr>
           <a:xfrm>
-            <a:off x="843069" y="311997"/>
-            <a:ext cx="3947597" cy="1091988"/>
+            <a:off x="682328" y="251989"/>
+            <a:ext cx="3194943" cy="881962"/>
           </a:xfrm>
         </p:spPr>
         <p:txBody>
           <a:bodyPr anchor="b"/>
           <a:lstStyle>
             <a:lvl1pPr>
-              <a:defRPr sz="2184"/>
+              <a:defRPr sz="1764"/>
             </a:lvl1pPr>
           </a:lstStyle>
           <a:p>
@@ -1943,39 +1943,39 @@
         </p:nvSpPr>
         <p:spPr>
           <a:xfrm>
-            <a:off x="5203435" y="673826"/>
-            <a:ext cx="6196310" cy="3325798"/>
+            <a:off x="4211340" y="544227"/>
+            <a:ext cx="5014913" cy="2686135"/>
           </a:xfrm>
         </p:spPr>
         <p:txBody>
           <a:bodyPr/>
           <a:lstStyle>
             <a:lvl1pPr>
-              <a:defRPr sz="2184"/>
+              <a:defRPr sz="1764"/>
             </a:lvl1pPr>
             <a:lvl2pPr>
-              <a:defRPr sz="1911"/>
+              <a:defRPr sz="1543"/>
             </a:lvl2pPr>
             <a:lvl3pPr>
-              <a:defRPr sz="1638"/>
+              <a:defRPr sz="1323"/>
             </a:lvl3pPr>
             <a:lvl4pPr>
-              <a:defRPr sz="1365"/>
+              <a:defRPr sz="1102"/>
             </a:lvl4pPr>
             <a:lvl5pPr>
-              <a:defRPr sz="1365"/>
+              <a:defRPr sz="1102"/>
             </a:lvl5pPr>
             <a:lvl6pPr>
-              <a:defRPr sz="1365"/>
+              <a:defRPr sz="1102"/>
             </a:lvl6pPr>
             <a:lvl7pPr>
-              <a:defRPr sz="1365"/>
+              <a:defRPr sz="1102"/>
             </a:lvl7pPr>
             <a:lvl8pPr>
-              <a:defRPr sz="1365"/>
+              <a:defRPr sz="1102"/>
             </a:lvl8pPr>
             <a:lvl9pPr>
-              <a:defRPr sz="1365"/>
+              <a:defRPr sz="1102"/>
             </a:lvl9pPr>
           </a:lstStyle>
           <a:p>
@@ -2028,8 +2028,8 @@
         </p:nvSpPr>
         <p:spPr>
           <a:xfrm>
-            <a:off x="843069" y="1403985"/>
-            <a:ext cx="3947597" cy="2601056"/>
+            <a:off x="682328" y="1133952"/>
+            <a:ext cx="3194943" cy="2100785"/>
           </a:xfrm>
         </p:spPr>
         <p:txBody>
@@ -2037,39 +2037,39 @@
           <a:lstStyle>
             <a:lvl1pPr marL="0" indent="0">
               <a:buNone/>
-              <a:defRPr sz="1092"/>
+              <a:defRPr sz="882"/>
             </a:lvl1pPr>
-            <a:lvl2pPr marL="311993" indent="0">
-              <a:buNone/>
-              <a:defRPr sz="955"/>
+            <a:lvl2pPr marL="252009" indent="0">
+              <a:buNone/>
+              <a:defRPr sz="772"/>
             </a:lvl2pPr>
-            <a:lvl3pPr marL="623987" indent="0">
-              <a:buNone/>
-              <a:defRPr sz="819"/>
+            <a:lvl3pPr marL="504017" indent="0">
+              <a:buNone/>
+              <a:defRPr sz="661"/>
             </a:lvl3pPr>
-            <a:lvl4pPr marL="935980" indent="0">
-              <a:buNone/>
-              <a:defRPr sz="682"/>
+            <a:lvl4pPr marL="756026" indent="0">
+              <a:buNone/>
+              <a:defRPr sz="551"/>
             </a:lvl4pPr>
-            <a:lvl5pPr marL="1247973" indent="0">
-              <a:buNone/>
-              <a:defRPr sz="682"/>
+            <a:lvl5pPr marL="1008035" indent="0">
+              <a:buNone/>
+              <a:defRPr sz="551"/>
             </a:lvl5pPr>
-            <a:lvl6pPr marL="1559966" indent="0">
-              <a:buNone/>
-              <a:defRPr sz="682"/>
+            <a:lvl6pPr marL="1260043" indent="0">
+              <a:buNone/>
+              <a:defRPr sz="551"/>
             </a:lvl6pPr>
-            <a:lvl7pPr marL="1871960" indent="0">
-              <a:buNone/>
-              <a:defRPr sz="682"/>
+            <a:lvl7pPr marL="1512052" indent="0">
+              <a:buNone/>
+              <a:defRPr sz="551"/>
             </a:lvl7pPr>
-            <a:lvl8pPr marL="2183953" indent="0">
-              <a:buNone/>
-              <a:defRPr sz="682"/>
+            <a:lvl8pPr marL="1764060" indent="0">
+              <a:buNone/>
+              <a:defRPr sz="551"/>
             </a:lvl8pPr>
-            <a:lvl9pPr marL="2495946" indent="0">
-              <a:buNone/>
-              <a:defRPr sz="682"/>
+            <a:lvl9pPr marL="2016069" indent="0">
+              <a:buNone/>
+              <a:defRPr sz="551"/>
             </a:lvl9pPr>
           </a:lstStyle>
           <a:p>
@@ -2098,7 +2098,7 @@
           <a:p>
             <a:fld id="{CC6FB895-B65F-4EA9-9907-69D32227E72B}" type="datetimeFigureOut">
               <a:rPr lang="zh-TW" altLang="en-US" smtClean="0"/>
-              <a:t>2026/4/22</a:t>
+              <a:t>2026/5/20</a:t>
             </a:fld>
             <a:endParaRPr lang="zh-TW" altLang="en-US"/>
           </a:p>
@@ -2149,7 +2149,7 @@
     </p:spTree>
     <p:extLst>
       <p:ext uri="{BB962C8B-B14F-4D97-AF65-F5344CB8AC3E}">
-        <p14:creationId xmlns:p14="http://schemas.microsoft.com/office/powerpoint/2010/main" val="4115194464"/>
+        <p14:creationId xmlns:p14="http://schemas.microsoft.com/office/powerpoint/2010/main" val="827771198"/>
       </p:ext>
     </p:extLst>
   </p:cSld>
@@ -2188,15 +2188,15 @@
         </p:nvSpPr>
         <p:spPr>
           <a:xfrm>
-            <a:off x="843069" y="311997"/>
-            <a:ext cx="3947597" cy="1091988"/>
+            <a:off x="682328" y="251989"/>
+            <a:ext cx="3194943" cy="881962"/>
           </a:xfrm>
         </p:spPr>
         <p:txBody>
           <a:bodyPr anchor="b"/>
           <a:lstStyle>
             <a:lvl1pPr>
-              <a:defRPr sz="2184"/>
+              <a:defRPr sz="1764"/>
             </a:lvl1pPr>
           </a:lstStyle>
           <a:p>
@@ -2220,8 +2220,8 @@
         </p:nvSpPr>
         <p:spPr>
           <a:xfrm>
-            <a:off x="5203435" y="673826"/>
-            <a:ext cx="6196310" cy="3325798"/>
+            <a:off x="4211340" y="544227"/>
+            <a:ext cx="5014913" cy="2686135"/>
           </a:xfrm>
         </p:spPr>
         <p:txBody>
@@ -2229,39 +2229,39 @@
           <a:lstStyle>
             <a:lvl1pPr marL="0" indent="0">
               <a:buNone/>
-              <a:defRPr sz="2184"/>
+              <a:defRPr sz="1764"/>
             </a:lvl1pPr>
-            <a:lvl2pPr marL="311993" indent="0">
-              <a:buNone/>
-              <a:defRPr sz="1911"/>
+            <a:lvl2pPr marL="252009" indent="0">
+              <a:buNone/>
+              <a:defRPr sz="1543"/>
             </a:lvl2pPr>
-            <a:lvl3pPr marL="623987" indent="0">
-              <a:buNone/>
-              <a:defRPr sz="1638"/>
+            <a:lvl3pPr marL="504017" indent="0">
+              <a:buNone/>
+              <a:defRPr sz="1323"/>
             </a:lvl3pPr>
-            <a:lvl4pPr marL="935980" indent="0">
-              <a:buNone/>
-              <a:defRPr sz="1365"/>
+            <a:lvl4pPr marL="756026" indent="0">
+              <a:buNone/>
+              <a:defRPr sz="1102"/>
             </a:lvl4pPr>
-            <a:lvl5pPr marL="1247973" indent="0">
-              <a:buNone/>
-              <a:defRPr sz="1365"/>
+            <a:lvl5pPr marL="1008035" indent="0">
+              <a:buNone/>
+              <a:defRPr sz="1102"/>
             </a:lvl5pPr>
-            <a:lvl6pPr marL="1559966" indent="0">
-              <a:buNone/>
-              <a:defRPr sz="1365"/>
+            <a:lvl6pPr marL="1260043" indent="0">
+              <a:buNone/>
+              <a:defRPr sz="1102"/>
             </a:lvl6pPr>
-            <a:lvl7pPr marL="1871960" indent="0">
-              <a:buNone/>
-              <a:defRPr sz="1365"/>
+            <a:lvl7pPr marL="1512052" indent="0">
+              <a:buNone/>
+              <a:defRPr sz="1102"/>
             </a:lvl7pPr>
-            <a:lvl8pPr marL="2183953" indent="0">
-              <a:buNone/>
-              <a:defRPr sz="1365"/>
+            <a:lvl8pPr marL="1764060" indent="0">
+              <a:buNone/>
+              <a:defRPr sz="1102"/>
             </a:lvl8pPr>
-            <a:lvl9pPr marL="2495946" indent="0">
-              <a:buNone/>
-              <a:defRPr sz="1365"/>
+            <a:lvl9pPr marL="2016069" indent="0">
+              <a:buNone/>
+              <a:defRPr sz="1102"/>
             </a:lvl9pPr>
           </a:lstStyle>
           <a:p>
@@ -2285,8 +2285,8 @@
         </p:nvSpPr>
         <p:spPr>
           <a:xfrm>
-            <a:off x="843069" y="1403985"/>
-            <a:ext cx="3947597" cy="2601056"/>
+            <a:off x="682328" y="1133952"/>
+            <a:ext cx="3194943" cy="2100785"/>
           </a:xfrm>
         </p:spPr>
         <p:txBody>
@@ -2294,39 +2294,39 @@
           <a:lstStyle>
             <a:lvl1pPr marL="0" indent="0">
               <a:buNone/>
-              <a:defRPr sz="1092"/>
+              <a:defRPr sz="882"/>
             </a:lvl1pPr>
-            <a:lvl2pPr marL="311993" indent="0">
-              <a:buNone/>
-              <a:defRPr sz="955"/>
+            <a:lvl2pPr marL="252009" indent="0">
+              <a:buNone/>
+              <a:defRPr sz="772"/>
             </a:lvl2pPr>
-            <a:lvl3pPr marL="623987" indent="0">
-              <a:buNone/>
-              <a:defRPr sz="819"/>
+            <a:lvl3pPr marL="504017" indent="0">
+              <a:buNone/>
+              <a:defRPr sz="661"/>
             </a:lvl3pPr>
-            <a:lvl4pPr marL="935980" indent="0">
-              <a:buNone/>
-              <a:defRPr sz="682"/>
+            <a:lvl4pPr marL="756026" indent="0">
+              <a:buNone/>
+              <a:defRPr sz="551"/>
             </a:lvl4pPr>
-            <a:lvl5pPr marL="1247973" indent="0">
-              <a:buNone/>
-              <a:defRPr sz="682"/>
+            <a:lvl5pPr marL="1008035" indent="0">
+              <a:buNone/>
+              <a:defRPr sz="551"/>
             </a:lvl5pPr>
-            <a:lvl6pPr marL="1559966" indent="0">
-              <a:buNone/>
-              <a:defRPr sz="682"/>
+            <a:lvl6pPr marL="1260043" indent="0">
+              <a:buNone/>
+              <a:defRPr sz="551"/>
             </a:lvl6pPr>
-            <a:lvl7pPr marL="1871960" indent="0">
-              <a:buNone/>
-              <a:defRPr sz="682"/>
+            <a:lvl7pPr marL="1512052" indent="0">
+              <a:buNone/>
+              <a:defRPr sz="551"/>
             </a:lvl7pPr>
-            <a:lvl8pPr marL="2183953" indent="0">
-              <a:buNone/>
-              <a:defRPr sz="682"/>
+            <a:lvl8pPr marL="1764060" indent="0">
+              <a:buNone/>
+              <a:defRPr sz="551"/>
             </a:lvl8pPr>
-            <a:lvl9pPr marL="2495946" indent="0">
-              <a:buNone/>
-              <a:defRPr sz="682"/>
+            <a:lvl9pPr marL="2016069" indent="0">
+              <a:buNone/>
+              <a:defRPr sz="551"/>
             </a:lvl9pPr>
           </a:lstStyle>
           <a:p>
@@ -2355,7 +2355,7 @@
           <a:p>
             <a:fld id="{CC6FB895-B65F-4EA9-9907-69D32227E72B}" type="datetimeFigureOut">
               <a:rPr lang="zh-TW" altLang="en-US" smtClean="0"/>
-              <a:t>2026/4/22</a:t>
+              <a:t>2026/5/20</a:t>
             </a:fld>
             <a:endParaRPr lang="zh-TW" altLang="en-US"/>
           </a:p>
@@ -2406,7 +2406,7 @@
     </p:spTree>
     <p:extLst>
       <p:ext uri="{BB962C8B-B14F-4D97-AF65-F5344CB8AC3E}">
-        <p14:creationId xmlns:p14="http://schemas.microsoft.com/office/powerpoint/2010/main" val="834803797"/>
+        <p14:creationId xmlns:p14="http://schemas.microsoft.com/office/powerpoint/2010/main" val="1860593700"/>
       </p:ext>
     </p:extLst>
   </p:cSld>
@@ -2450,8 +2450,8 @@
         </p:nvSpPr>
         <p:spPr>
           <a:xfrm>
-            <a:off x="841474" y="249164"/>
-            <a:ext cx="10556677" cy="904574"/>
+            <a:off x="681038" y="201242"/>
+            <a:ext cx="8543925" cy="730594"/>
           </a:xfrm>
           <a:prstGeom prst="rect">
             <a:avLst/>
@@ -2483,8 +2483,8 @@
         </p:nvSpPr>
         <p:spPr>
           <a:xfrm>
-            <a:off x="841474" y="1245820"/>
-            <a:ext cx="10556677" cy="2969385"/>
+            <a:off x="681038" y="1006207"/>
+            <a:ext cx="8543925" cy="2398272"/>
           </a:xfrm>
           <a:prstGeom prst="rect">
             <a:avLst/>
@@ -2545,8 +2545,8 @@
         </p:nvSpPr>
         <p:spPr>
           <a:xfrm>
-            <a:off x="841474" y="4337621"/>
-            <a:ext cx="2753916" cy="249164"/>
+            <a:off x="681038" y="3503350"/>
+            <a:ext cx="2228850" cy="201241"/>
           </a:xfrm>
           <a:prstGeom prst="rect">
             <a:avLst/>
@@ -2556,7 +2556,7 @@
           <a:bodyPr vert="horz" lIns="91440" tIns="45720" rIns="91440" bIns="45720" rtlCol="0" anchor="ctr"/>
           <a:lstStyle>
             <a:lvl1pPr algn="l">
-              <a:defRPr sz="819">
+              <a:defRPr sz="661">
                 <a:solidFill>
                   <a:schemeClr val="tx1">
                     <a:tint val="75000"/>
@@ -2568,7 +2568,7 @@
           <a:p>
             <a:fld id="{CC6FB895-B65F-4EA9-9907-69D32227E72B}" type="datetimeFigureOut">
               <a:rPr lang="zh-TW" altLang="en-US" smtClean="0"/>
-              <a:t>2026/4/22</a:t>
+              <a:t>2026/5/20</a:t>
             </a:fld>
             <a:endParaRPr lang="zh-TW" altLang="en-US"/>
           </a:p>
@@ -2586,8 +2586,8 @@
         </p:nvSpPr>
         <p:spPr>
           <a:xfrm>
-            <a:off x="4054376" y="4337621"/>
-            <a:ext cx="4130873" cy="249164"/>
+            <a:off x="3281363" y="3503350"/>
+            <a:ext cx="3343275" cy="201241"/>
           </a:xfrm>
           <a:prstGeom prst="rect">
             <a:avLst/>
@@ -2597,7 +2597,7 @@
           <a:bodyPr vert="horz" lIns="91440" tIns="45720" rIns="91440" bIns="45720" rtlCol="0" anchor="ctr"/>
           <a:lstStyle>
             <a:lvl1pPr algn="ctr">
-              <a:defRPr sz="819">
+              <a:defRPr sz="661">
                 <a:solidFill>
                   <a:schemeClr val="tx1">
                     <a:tint val="75000"/>
@@ -2623,8 +2623,8 @@
         </p:nvSpPr>
         <p:spPr>
           <a:xfrm>
-            <a:off x="8644235" y="4337621"/>
-            <a:ext cx="2753916" cy="249164"/>
+            <a:off x="6996113" y="3503350"/>
+            <a:ext cx="2228850" cy="201241"/>
           </a:xfrm>
           <a:prstGeom prst="rect">
             <a:avLst/>
@@ -2634,7 +2634,7 @@
           <a:bodyPr vert="horz" lIns="91440" tIns="45720" rIns="91440" bIns="45720" rtlCol="0" anchor="ctr"/>
           <a:lstStyle>
             <a:lvl1pPr algn="r">
-              <a:defRPr sz="819">
+              <a:defRPr sz="661">
                 <a:solidFill>
                   <a:schemeClr val="tx1">
                     <a:tint val="75000"/>
@@ -2655,27 +2655,27 @@
     </p:spTree>
     <p:extLst>
       <p:ext uri="{BB962C8B-B14F-4D97-AF65-F5344CB8AC3E}">
-        <p14:creationId xmlns:p14="http://schemas.microsoft.com/office/powerpoint/2010/main" val="77344274"/>
+        <p14:creationId xmlns:p14="http://schemas.microsoft.com/office/powerpoint/2010/main" val="2857794098"/>
       </p:ext>
     </p:extLst>
   </p:cSld>
   <p:clrMap bg1="lt1" tx1="dk1" bg2="lt2" tx2="dk2" accent1="accent1" accent2="accent2" accent3="accent3" accent4="accent4" accent5="accent5" accent6="accent6" hlink="hlink" folHlink="folHlink"/>
   <p:sldLayoutIdLst>
-    <p:sldLayoutId id="2147483709" r:id="rId1"/>
-    <p:sldLayoutId id="2147483710" r:id="rId2"/>
-    <p:sldLayoutId id="2147483711" r:id="rId3"/>
-    <p:sldLayoutId id="2147483712" r:id="rId4"/>
-    <p:sldLayoutId id="2147483713" r:id="rId5"/>
-    <p:sldLayoutId id="2147483714" r:id="rId6"/>
-    <p:sldLayoutId id="2147483715" r:id="rId7"/>
-    <p:sldLayoutId id="2147483716" r:id="rId8"/>
-    <p:sldLayoutId id="2147483717" r:id="rId9"/>
-    <p:sldLayoutId id="2147483718" r:id="rId10"/>
-    <p:sldLayoutId id="2147483719" r:id="rId11"/>
+    <p:sldLayoutId id="2147483769" r:id="rId1"/>
+    <p:sldLayoutId id="2147483770" r:id="rId2"/>
+    <p:sldLayoutId id="2147483771" r:id="rId3"/>
+    <p:sldLayoutId id="2147483772" r:id="rId4"/>
+    <p:sldLayoutId id="2147483773" r:id="rId5"/>
+    <p:sldLayoutId id="2147483774" r:id="rId6"/>
+    <p:sldLayoutId id="2147483775" r:id="rId7"/>
+    <p:sldLayoutId id="2147483776" r:id="rId8"/>
+    <p:sldLayoutId id="2147483777" r:id="rId9"/>
+    <p:sldLayoutId id="2147483778" r:id="rId10"/>
+    <p:sldLayoutId id="2147483779" r:id="rId11"/>
   </p:sldLayoutIdLst>
   <p:txStyles>
     <p:titleStyle>
-      <a:lvl1pPr algn="l" defTabSz="623987" rtl="0" eaLnBrk="1" latinLnBrk="0" hangingPunct="1">
+      <a:lvl1pPr algn="l" defTabSz="504017" rtl="0" eaLnBrk="1" latinLnBrk="0" hangingPunct="1">
         <a:lnSpc>
           <a:spcPct val="90000"/>
         </a:lnSpc>
@@ -2683,7 +2683,7 @@
           <a:spcPct val="0"/>
         </a:spcBef>
         <a:buNone/>
-        <a:defRPr sz="3003" kern="1200">
+        <a:defRPr sz="2425" kern="1200">
           <a:solidFill>
             <a:schemeClr val="tx1"/>
           </a:solidFill>
@@ -2694,16 +2694,16 @@
       </a:lvl1pPr>
     </p:titleStyle>
     <p:bodyStyle>
-      <a:lvl1pPr marL="155997" indent="-155997" algn="l" defTabSz="623987" rtl="0" eaLnBrk="1" latinLnBrk="0" hangingPunct="1">
+      <a:lvl1pPr marL="126004" indent="-126004" algn="l" defTabSz="504017" rtl="0" eaLnBrk="1" latinLnBrk="0" hangingPunct="1">
         <a:lnSpc>
           <a:spcPct val="90000"/>
         </a:lnSpc>
         <a:spcBef>
-          <a:spcPts val="682"/>
+          <a:spcPts val="551"/>
         </a:spcBef>
         <a:buFont typeface="Arial" panose="020B0604020202020204" pitchFamily="34" charset="0"/>
         <a:buChar char="•"/>
-        <a:defRPr sz="1911" kern="1200">
+        <a:defRPr sz="1543" kern="1200">
           <a:solidFill>
             <a:schemeClr val="tx1"/>
           </a:solidFill>
@@ -2712,16 +2712,16 @@
           <a:cs typeface="+mn-cs"/>
         </a:defRPr>
       </a:lvl1pPr>
-      <a:lvl2pPr marL="467990" indent="-155997" algn="l" defTabSz="623987" rtl="0" eaLnBrk="1" latinLnBrk="0" hangingPunct="1">
+      <a:lvl2pPr marL="378013" indent="-126004" algn="l" defTabSz="504017" rtl="0" eaLnBrk="1" latinLnBrk="0" hangingPunct="1">
         <a:lnSpc>
           <a:spcPct val="90000"/>
         </a:lnSpc>
         <a:spcBef>
-          <a:spcPts val="341"/>
+          <a:spcPts val="276"/>
         </a:spcBef>
         <a:buFont typeface="Arial" panose="020B0604020202020204" pitchFamily="34" charset="0"/>
         <a:buChar char="•"/>
-        <a:defRPr sz="1638" kern="1200">
+        <a:defRPr sz="1323" kern="1200">
           <a:solidFill>
             <a:schemeClr val="tx1"/>
           </a:solidFill>
@@ -2730,16 +2730,16 @@
           <a:cs typeface="+mn-cs"/>
         </a:defRPr>
       </a:lvl2pPr>
-      <a:lvl3pPr marL="779983" indent="-155997" algn="l" defTabSz="623987" rtl="0" eaLnBrk="1" latinLnBrk="0" hangingPunct="1">
+      <a:lvl3pPr marL="630022" indent="-126004" algn="l" defTabSz="504017" rtl="0" eaLnBrk="1" latinLnBrk="0" hangingPunct="1">
         <a:lnSpc>
           <a:spcPct val="90000"/>
         </a:lnSpc>
         <a:spcBef>
-          <a:spcPts val="341"/>
+          <a:spcPts val="276"/>
         </a:spcBef>
         <a:buFont typeface="Arial" panose="020B0604020202020204" pitchFamily="34" charset="0"/>
         <a:buChar char="•"/>
-        <a:defRPr sz="1365" kern="1200">
+        <a:defRPr sz="1102" kern="1200">
           <a:solidFill>
             <a:schemeClr val="tx1"/>
           </a:solidFill>
@@ -2748,16 +2748,16 @@
           <a:cs typeface="+mn-cs"/>
         </a:defRPr>
       </a:lvl3pPr>
-      <a:lvl4pPr marL="1091976" indent="-155997" algn="l" defTabSz="623987" rtl="0" eaLnBrk="1" latinLnBrk="0" hangingPunct="1">
+      <a:lvl4pPr marL="882030" indent="-126004" algn="l" defTabSz="504017" rtl="0" eaLnBrk="1" latinLnBrk="0" hangingPunct="1">
         <a:lnSpc>
           <a:spcPct val="90000"/>
         </a:lnSpc>
         <a:spcBef>
-          <a:spcPts val="341"/>
+          <a:spcPts val="276"/>
         </a:spcBef>
         <a:buFont typeface="Arial" panose="020B0604020202020204" pitchFamily="34" charset="0"/>
         <a:buChar char="•"/>
-        <a:defRPr sz="1228" kern="1200">
+        <a:defRPr sz="992" kern="1200">
           <a:solidFill>
             <a:schemeClr val="tx1"/>
           </a:solidFill>
@@ -2766,16 +2766,16 @@
           <a:cs typeface="+mn-cs"/>
         </a:defRPr>
       </a:lvl4pPr>
-      <a:lvl5pPr marL="1403970" indent="-155997" algn="l" defTabSz="623987" rtl="0" eaLnBrk="1" latinLnBrk="0" hangingPunct="1">
+      <a:lvl5pPr marL="1134039" indent="-126004" algn="l" defTabSz="504017" rtl="0" eaLnBrk="1" latinLnBrk="0" hangingPunct="1">
         <a:lnSpc>
           <a:spcPct val="90000"/>
         </a:lnSpc>
         <a:spcBef>
-          <a:spcPts val="341"/>
+          <a:spcPts val="276"/>
         </a:spcBef>
         <a:buFont typeface="Arial" panose="020B0604020202020204" pitchFamily="34" charset="0"/>
         <a:buChar char="•"/>
-        <a:defRPr sz="1228" kern="1200">
+        <a:defRPr sz="992" kern="1200">
           <a:solidFill>
             <a:schemeClr val="tx1"/>
           </a:solidFill>
@@ -2784,16 +2784,16 @@
           <a:cs typeface="+mn-cs"/>
         </a:defRPr>
       </a:lvl5pPr>
-      <a:lvl6pPr marL="1715963" indent="-155997" algn="l" defTabSz="623987" rtl="0" eaLnBrk="1" latinLnBrk="0" hangingPunct="1">
+      <a:lvl6pPr marL="1386048" indent="-126004" algn="l" defTabSz="504017" rtl="0" eaLnBrk="1" latinLnBrk="0" hangingPunct="1">
         <a:lnSpc>
           <a:spcPct val="90000"/>
         </a:lnSpc>
         <a:spcBef>
-          <a:spcPts val="341"/>
+          <a:spcPts val="276"/>
         </a:spcBef>
         <a:buFont typeface="Arial" panose="020B0604020202020204" pitchFamily="34" charset="0"/>
         <a:buChar char="•"/>
-        <a:defRPr sz="1228" kern="1200">
+        <a:defRPr sz="992" kern="1200">
           <a:solidFill>
             <a:schemeClr val="tx1"/>
           </a:solidFill>
@@ -2802,16 +2802,16 @@
           <a:cs typeface="+mn-cs"/>
         </a:defRPr>
       </a:lvl6pPr>
-      <a:lvl7pPr marL="2027956" indent="-155997" algn="l" defTabSz="623987" rtl="0" eaLnBrk="1" latinLnBrk="0" hangingPunct="1">
+      <a:lvl7pPr marL="1638056" indent="-126004" algn="l" defTabSz="504017" rtl="0" eaLnBrk="1" latinLnBrk="0" hangingPunct="1">
         <a:lnSpc>
           <a:spcPct val="90000"/>
         </a:lnSpc>
         <a:spcBef>
-          <a:spcPts val="341"/>
+          <a:spcPts val="276"/>
         </a:spcBef>
         <a:buFont typeface="Arial" panose="020B0604020202020204" pitchFamily="34" charset="0"/>
         <a:buChar char="•"/>
-        <a:defRPr sz="1228" kern="1200">
+        <a:defRPr sz="992" kern="1200">
           <a:solidFill>
             <a:schemeClr val="tx1"/>
           </a:solidFill>
@@ -2820,16 +2820,16 @@
           <a:cs typeface="+mn-cs"/>
         </a:defRPr>
       </a:lvl7pPr>
-      <a:lvl8pPr marL="2339950" indent="-155997" algn="l" defTabSz="623987" rtl="0" eaLnBrk="1" latinLnBrk="0" hangingPunct="1">
+      <a:lvl8pPr marL="1890065" indent="-126004" algn="l" defTabSz="504017" rtl="0" eaLnBrk="1" latinLnBrk="0" hangingPunct="1">
         <a:lnSpc>
           <a:spcPct val="90000"/>
         </a:lnSpc>
         <a:spcBef>
-          <a:spcPts val="341"/>
+          <a:spcPts val="276"/>
         </a:spcBef>
         <a:buFont typeface="Arial" panose="020B0604020202020204" pitchFamily="34" charset="0"/>
         <a:buChar char="•"/>
-        <a:defRPr sz="1228" kern="1200">
+        <a:defRPr sz="992" kern="1200">
           <a:solidFill>
             <a:schemeClr val="tx1"/>
           </a:solidFill>
@@ -2838,16 +2838,16 @@
           <a:cs typeface="+mn-cs"/>
         </a:defRPr>
       </a:lvl8pPr>
-      <a:lvl9pPr marL="2651943" indent="-155997" algn="l" defTabSz="623987" rtl="0" eaLnBrk="1" latinLnBrk="0" hangingPunct="1">
+      <a:lvl9pPr marL="2142073" indent="-126004" algn="l" defTabSz="504017" rtl="0" eaLnBrk="1" latinLnBrk="0" hangingPunct="1">
         <a:lnSpc>
           <a:spcPct val="90000"/>
         </a:lnSpc>
         <a:spcBef>
-          <a:spcPts val="341"/>
+          <a:spcPts val="276"/>
         </a:spcBef>
         <a:buFont typeface="Arial" panose="020B0604020202020204" pitchFamily="34" charset="0"/>
         <a:buChar char="•"/>
-        <a:defRPr sz="1228" kern="1200">
+        <a:defRPr sz="992" kern="1200">
           <a:solidFill>
             <a:schemeClr val="tx1"/>
           </a:solidFill>
@@ -2861,8 +2861,8 @@
       <a:defPPr>
         <a:defRPr lang="en-US"/>
       </a:defPPr>
-      <a:lvl1pPr marL="0" algn="l" defTabSz="623987" rtl="0" eaLnBrk="1" latinLnBrk="0" hangingPunct="1">
-        <a:defRPr sz="1228" kern="1200">
+      <a:lvl1pPr marL="0" algn="l" defTabSz="504017" rtl="0" eaLnBrk="1" latinLnBrk="0" hangingPunct="1">
+        <a:defRPr sz="992" kern="1200">
           <a:solidFill>
             <a:schemeClr val="tx1"/>
           </a:solidFill>
@@ -2871,8 +2871,8 @@
           <a:cs typeface="+mn-cs"/>
         </a:defRPr>
       </a:lvl1pPr>
-      <a:lvl2pPr marL="311993" algn="l" defTabSz="623987" rtl="0" eaLnBrk="1" latinLnBrk="0" hangingPunct="1">
-        <a:defRPr sz="1228" kern="1200">
+      <a:lvl2pPr marL="252009" algn="l" defTabSz="504017" rtl="0" eaLnBrk="1" latinLnBrk="0" hangingPunct="1">
+        <a:defRPr sz="992" kern="1200">
           <a:solidFill>
             <a:schemeClr val="tx1"/>
           </a:solidFill>
@@ -2881,8 +2881,8 @@
           <a:cs typeface="+mn-cs"/>
         </a:defRPr>
       </a:lvl2pPr>
-      <a:lvl3pPr marL="623987" algn="l" defTabSz="623987" rtl="0" eaLnBrk="1" latinLnBrk="0" hangingPunct="1">
-        <a:defRPr sz="1228" kern="1200">
+      <a:lvl3pPr marL="504017" algn="l" defTabSz="504017" rtl="0" eaLnBrk="1" latinLnBrk="0" hangingPunct="1">
+        <a:defRPr sz="992" kern="1200">
           <a:solidFill>
             <a:schemeClr val="tx1"/>
           </a:solidFill>
@@ -2891,8 +2891,8 @@
           <a:cs typeface="+mn-cs"/>
         </a:defRPr>
       </a:lvl3pPr>
-      <a:lvl4pPr marL="935980" algn="l" defTabSz="623987" rtl="0" eaLnBrk="1" latinLnBrk="0" hangingPunct="1">
-        <a:defRPr sz="1228" kern="1200">
+      <a:lvl4pPr marL="756026" algn="l" defTabSz="504017" rtl="0" eaLnBrk="1" latinLnBrk="0" hangingPunct="1">
+        <a:defRPr sz="992" kern="1200">
           <a:solidFill>
             <a:schemeClr val="tx1"/>
           </a:solidFill>
@@ -2901,8 +2901,8 @@
           <a:cs typeface="+mn-cs"/>
         </a:defRPr>
       </a:lvl4pPr>
-      <a:lvl5pPr marL="1247973" algn="l" defTabSz="623987" rtl="0" eaLnBrk="1" latinLnBrk="0" hangingPunct="1">
-        <a:defRPr sz="1228" kern="1200">
+      <a:lvl5pPr marL="1008035" algn="l" defTabSz="504017" rtl="0" eaLnBrk="1" latinLnBrk="0" hangingPunct="1">
+        <a:defRPr sz="992" kern="1200">
           <a:solidFill>
             <a:schemeClr val="tx1"/>
           </a:solidFill>
@@ -2911,8 +2911,8 @@
           <a:cs typeface="+mn-cs"/>
         </a:defRPr>
       </a:lvl5pPr>
-      <a:lvl6pPr marL="1559966" algn="l" defTabSz="623987" rtl="0" eaLnBrk="1" latinLnBrk="0" hangingPunct="1">
-        <a:defRPr sz="1228" kern="1200">
+      <a:lvl6pPr marL="1260043" algn="l" defTabSz="504017" rtl="0" eaLnBrk="1" latinLnBrk="0" hangingPunct="1">
+        <a:defRPr sz="992" kern="1200">
           <a:solidFill>
             <a:schemeClr val="tx1"/>
           </a:solidFill>
@@ -2921,8 +2921,8 @@
           <a:cs typeface="+mn-cs"/>
         </a:defRPr>
       </a:lvl6pPr>
-      <a:lvl7pPr marL="1871960" algn="l" defTabSz="623987" rtl="0" eaLnBrk="1" latinLnBrk="0" hangingPunct="1">
-        <a:defRPr sz="1228" kern="1200">
+      <a:lvl7pPr marL="1512052" algn="l" defTabSz="504017" rtl="0" eaLnBrk="1" latinLnBrk="0" hangingPunct="1">
+        <a:defRPr sz="992" kern="1200">
           <a:solidFill>
             <a:schemeClr val="tx1"/>
           </a:solidFill>
@@ -2931,8 +2931,8 @@
           <a:cs typeface="+mn-cs"/>
         </a:defRPr>
       </a:lvl7pPr>
-      <a:lvl8pPr marL="2183953" algn="l" defTabSz="623987" rtl="0" eaLnBrk="1" latinLnBrk="0" hangingPunct="1">
-        <a:defRPr sz="1228" kern="1200">
+      <a:lvl8pPr marL="1764060" algn="l" defTabSz="504017" rtl="0" eaLnBrk="1" latinLnBrk="0" hangingPunct="1">
+        <a:defRPr sz="992" kern="1200">
           <a:solidFill>
             <a:schemeClr val="tx1"/>
           </a:solidFill>
@@ -2941,8 +2941,8 @@
           <a:cs typeface="+mn-cs"/>
         </a:defRPr>
       </a:lvl8pPr>
-      <a:lvl9pPr marL="2495946" algn="l" defTabSz="623987" rtl="0" eaLnBrk="1" latinLnBrk="0" hangingPunct="1">
-        <a:defRPr sz="1228" kern="1200">
+      <a:lvl9pPr marL="2016069" algn="l" defTabSz="504017" rtl="0" eaLnBrk="1" latinLnBrk="0" hangingPunct="1">
+        <a:defRPr sz="992" kern="1200">
           <a:solidFill>
             <a:schemeClr val="tx1"/>
           </a:solidFill>
@@ -2975,10 +2975,10 @@
       </p:grpSpPr>
       <p:grpSp>
         <p:nvGrpSpPr>
-          <p:cNvPr id="9" name="群組 8">
+          <p:cNvPr id="2" name="群組 1">
             <a:extLst>
               <a:ext uri="{FF2B5EF4-FFF2-40B4-BE49-F238E27FC236}">
-                <a16:creationId xmlns:a16="http://schemas.microsoft.com/office/drawing/2014/main" id="{E6EBFD71-A9F6-48E8-BFDF-D613415913AF}"/>
+                <a16:creationId xmlns:a16="http://schemas.microsoft.com/office/drawing/2014/main" id="{16ABE738-883E-46AA-A822-7B8A11D9BA9D}"/>
               </a:ext>
             </a:extLst>
           </p:cNvPr>
@@ -2987,71 +2987,12 @@
         </p:nvGrpSpPr>
         <p:grpSpPr>
           <a:xfrm>
-            <a:off x="-41718" y="-47332"/>
-            <a:ext cx="12323061" cy="4774615"/>
-            <a:chOff x="-79210" y="666749"/>
-            <a:chExt cx="12323061" cy="4774615"/>
+            <a:off x="-33764" y="4269"/>
+            <a:ext cx="10007576" cy="3815724"/>
+            <a:chOff x="-33764" y="1543350"/>
+            <a:chExt cx="10007576" cy="3815724"/>
           </a:xfrm>
         </p:grpSpPr>
-        <p:sp>
-          <p:nvSpPr>
-            <p:cNvPr id="48" name="矩形 47">
-              <a:extLst>
-                <a:ext uri="{FF2B5EF4-FFF2-40B4-BE49-F238E27FC236}">
-                  <a16:creationId xmlns:a16="http://schemas.microsoft.com/office/drawing/2014/main" id="{FD558900-7134-43B7-B0FD-EC6791A99399}"/>
-                </a:ext>
-              </a:extLst>
-            </p:cNvPr>
-            <p:cNvSpPr/>
-            <p:nvPr/>
-          </p:nvSpPr>
-          <p:spPr>
-            <a:xfrm>
-              <a:off x="0" y="666749"/>
-              <a:ext cx="12211051" cy="4688037"/>
-            </a:xfrm>
-            <a:prstGeom prst="rect">
-              <a:avLst/>
-            </a:prstGeom>
-            <a:solidFill>
-              <a:schemeClr val="bg1"/>
-            </a:solidFill>
-            <a:ln>
-              <a:solidFill>
-                <a:schemeClr val="bg1"/>
-              </a:solidFill>
-            </a:ln>
-          </p:spPr>
-          <p:style>
-            <a:lnRef idx="2">
-              <a:schemeClr val="accent1">
-                <a:shade val="50000"/>
-              </a:schemeClr>
-            </a:lnRef>
-            <a:fillRef idx="1">
-              <a:schemeClr val="accent1"/>
-            </a:fillRef>
-            <a:effectRef idx="0">
-              <a:schemeClr val="accent1"/>
-            </a:effectRef>
-            <a:fontRef idx="minor">
-              <a:schemeClr val="lt1"/>
-            </a:fontRef>
-          </p:style>
-          <p:txBody>
-            <a:bodyPr rot="0" spcFirstLastPara="0" vertOverflow="overflow" horzOverflow="overflow" vert="horz" wrap="square" lIns="91797" tIns="45899" rIns="91797" bIns="45899" numCol="1" spcCol="0" rtlCol="0" fromWordArt="0" anchor="ctr" anchorCtr="0" forceAA="0" compatLnSpc="1">
-              <a:prstTxWarp prst="textNoShape">
-                <a:avLst/>
-              </a:prstTxWarp>
-              <a:noAutofit/>
-            </a:bodyPr>
-            <a:lstStyle/>
-            <a:p>
-              <a:pPr algn="ctr"/>
-              <a:endParaRPr lang="zh-TW" altLang="en-US" sz="1807" dirty="0"/>
-            </a:p>
-          </p:txBody>
-        </p:sp>
         <p:pic>
           <p:nvPicPr>
             <p:cNvPr id="3" name="圖片 2">
@@ -3089,8 +3030,8 @@
           </p:blipFill>
           <p:spPr>
             <a:xfrm>
-              <a:off x="1092425" y="1926219"/>
-              <a:ext cx="10013725" cy="1954800"/>
+              <a:off x="1387773" y="2560110"/>
+              <a:ext cx="7654628" cy="1494274"/>
             </a:xfrm>
             <a:prstGeom prst="rect">
               <a:avLst/>
@@ -3134,8 +3075,8 @@
           </p:blipFill>
           <p:spPr>
             <a:xfrm>
-              <a:off x="1092425" y="676275"/>
-              <a:ext cx="10013725" cy="1726346"/>
+              <a:off x="1387773" y="1543350"/>
+              <a:ext cx="7654628" cy="1319642"/>
             </a:xfrm>
             <a:prstGeom prst="rect">
               <a:avLst/>
@@ -3179,16 +3120,16 @@
           </p:blipFill>
           <p:spPr>
             <a:xfrm>
-              <a:off x="1092426" y="3404618"/>
-              <a:ext cx="9966100" cy="1954800"/>
+              <a:off x="1386704" y="3756635"/>
+              <a:ext cx="7618224" cy="1494274"/>
             </a:xfrm>
             <a:prstGeom prst="rect">
               <a:avLst/>
             </a:prstGeom>
           </p:spPr>
         </p:pic>
-        <mc:AlternateContent xmlns:mc="http://schemas.openxmlformats.org/markup-compatibility/2006" xmlns:a14="http://schemas.microsoft.com/office/drawing/2010/main">
-          <mc:Choice Requires="a14">
+        <mc:AlternateContent xmlns:mc="http://schemas.openxmlformats.org/markup-compatibility/2006">
+          <mc:Choice xmlns:a14="http://schemas.microsoft.com/office/drawing/2010/main" Requires="a14">
             <p:sp>
               <p:nvSpPr>
                 <p:cNvPr id="6" name="矩形 5">
@@ -3203,8 +3144,8 @@
               </p:nvSpPr>
               <p:spPr>
                 <a:xfrm>
-                  <a:off x="83969" y="2717749"/>
-                  <a:ext cx="982489" cy="371740"/>
+                  <a:off x="98303" y="3156815"/>
+                  <a:ext cx="1176412" cy="439736"/>
                 </a:xfrm>
                 <a:prstGeom prst="rect">
                   <a:avLst/>
@@ -3227,7 +3168,7 @@
                           <m:rPr>
                             <m:sty m:val="p"/>
                           </m:rPr>
-                          <a:rPr lang="en-US" altLang="zh-TW" sz="1606">
+                          <a:rPr lang="en-US" altLang="zh-TW" sz="2000">
                             <a:latin typeface="Cambria Math" panose="02040503050406030204" pitchFamily="18" charset="0"/>
                           </a:rPr>
                           <m:t>Re</m:t>
@@ -3237,7 +3178,7 @@
                             <m:begChr m:val="["/>
                             <m:endChr m:val="]"/>
                             <m:ctrlPr>
-                              <a:rPr lang="en-US" altLang="zh-TW" sz="1606" i="1">
+                              <a:rPr lang="en-US" altLang="zh-TW" sz="2000" i="1">
                                 <a:latin typeface="Cambria Math" panose="02040503050406030204" pitchFamily="18" charset="0"/>
                               </a:rPr>
                             </m:ctrlPr>
@@ -3246,14 +3187,14 @@
                             <m:sSup>
                               <m:sSupPr>
                                 <m:ctrlPr>
-                                  <a:rPr lang="en-US" altLang="zh-TW" sz="1606" i="1">
+                                  <a:rPr lang="en-US" altLang="zh-TW" sz="2000" i="1">
                                     <a:latin typeface="Cambria Math" panose="02040503050406030204" pitchFamily="18" charset="0"/>
                                   </a:rPr>
                                 </m:ctrlPr>
                               </m:sSupPr>
                               <m:e>
                                 <m:r>
-                                  <a:rPr lang="en-US" altLang="zh-TW" sz="1606" i="1">
+                                  <a:rPr lang="en-US" altLang="zh-TW" sz="2000" i="1">
                                     <a:latin typeface="Cambria Math" panose="02040503050406030204" pitchFamily="18" charset="0"/>
                                   </a:rPr>
                                   <m:t>𝑒</m:t>
@@ -3261,19 +3202,19 @@
                               </m:e>
                               <m:sup>
                                 <m:r>
-                                  <a:rPr lang="en-US" altLang="zh-TW" sz="1606" i="1">
+                                  <a:rPr lang="en-US" altLang="zh-TW" sz="2000" i="1">
                                     <a:latin typeface="Cambria Math" panose="02040503050406030204" pitchFamily="18" charset="0"/>
                                   </a:rPr>
                                   <m:t>𝑖</m:t>
                                 </m:r>
                                 <m:r>
-                                  <a:rPr lang="en-US" altLang="zh-TW" sz="1606" i="1" dirty="0">
+                                  <a:rPr lang="en-US" altLang="zh-TW" sz="2000" i="1" dirty="0">
                                     <a:latin typeface="Cambria Math" panose="02040503050406030204" pitchFamily="18" charset="0"/>
                                   </a:rPr>
                                   <m:t>ℓ</m:t>
                                 </m:r>
                                 <m:r>
-                                  <a:rPr lang="en-US" altLang="zh-TW" sz="1606" i="1">
+                                  <a:rPr lang="en-US" altLang="zh-TW" sz="2000" i="1">
                                     <a:latin typeface="Cambria Math" panose="02040503050406030204" pitchFamily="18" charset="0"/>
                                   </a:rPr>
                                   <m:t>𝜙</m:t>
@@ -3285,7 +3226,7 @@
                       </m:oMath>
                     </m:oMathPara>
                   </a14:m>
-                  <a:endParaRPr lang="zh-TW" altLang="en-US" sz="1606" dirty="0">
+                  <a:endParaRPr lang="zh-TW" altLang="en-US" sz="2000" dirty="0">
                     <a:latin typeface="Times New Roman" panose="02020603050405020304" pitchFamily="18" charset="0"/>
                     <a:cs typeface="Times New Roman" panose="02020603050405020304" pitchFamily="18" charset="0"/>
                   </a:endParaRPr>
@@ -3293,7 +3234,7 @@
               </p:txBody>
             </p:sp>
           </mc:Choice>
-          <mc:Fallback xmlns="">
+          <mc:Fallback>
             <p:sp>
               <p:nvSpPr>
                 <p:cNvPr id="6" name="矩形 5">
@@ -3310,8 +3251,8 @@
               </p:nvSpPr>
               <p:spPr>
                 <a:xfrm>
-                  <a:off x="83969" y="2717749"/>
-                  <a:ext cx="982489" cy="371740"/>
+                  <a:off x="98303" y="3156815"/>
+                  <a:ext cx="1176412" cy="439736"/>
                 </a:xfrm>
                 <a:prstGeom prst="rect">
                   <a:avLst/>
@@ -3338,8 +3279,8 @@
             </p:sp>
           </mc:Fallback>
         </mc:AlternateContent>
-        <mc:AlternateContent xmlns:mc="http://schemas.openxmlformats.org/markup-compatibility/2006" xmlns:a14="http://schemas.microsoft.com/office/drawing/2010/main">
-          <mc:Choice Requires="a14">
+        <mc:AlternateContent xmlns:mc="http://schemas.openxmlformats.org/markup-compatibility/2006">
+          <mc:Choice xmlns:a14="http://schemas.microsoft.com/office/drawing/2010/main" Requires="a14">
             <p:sp>
               <p:nvSpPr>
                 <p:cNvPr id="25" name="矩形 24">
@@ -3354,8 +3295,8 @@
               </p:nvSpPr>
               <p:spPr>
                 <a:xfrm>
-                  <a:off x="-79210" y="1237002"/>
-                  <a:ext cx="1308848" cy="376439"/>
+                  <a:off x="-33764" y="1958389"/>
+                  <a:ext cx="1583510" cy="445635"/>
                 </a:xfrm>
                 <a:prstGeom prst="rect">
                   <a:avLst/>
@@ -3378,7 +3319,7 @@
                           <m:rPr>
                             <m:sty m:val="p"/>
                           </m:rPr>
-                          <a:rPr lang="en-US" altLang="zh-TW" sz="1606">
+                          <a:rPr lang="en-US" altLang="zh-TW" sz="2000">
                             <a:latin typeface="Cambria Math" panose="02040503050406030204" pitchFamily="18" charset="0"/>
                           </a:rPr>
                           <m:t>Re</m:t>
@@ -3388,7 +3329,7 @@
                             <m:begChr m:val="["/>
                             <m:endChr m:val="]"/>
                             <m:ctrlPr>
-                              <a:rPr lang="en-US" altLang="zh-TW" sz="1606" i="1">
+                              <a:rPr lang="en-US" altLang="zh-TW" sz="2000" i="1">
                                 <a:latin typeface="Cambria Math" panose="02040503050406030204" pitchFamily="18" charset="0"/>
                               </a:rPr>
                             </m:ctrlPr>
@@ -3397,14 +3338,14 @@
                             <m:sSup>
                               <m:sSupPr>
                                 <m:ctrlPr>
-                                  <a:rPr lang="en-US" altLang="zh-TW" sz="1606" i="1">
+                                  <a:rPr lang="en-US" altLang="zh-TW" sz="2000" i="1">
                                     <a:latin typeface="Cambria Math" panose="02040503050406030204" pitchFamily="18" charset="0"/>
                                   </a:rPr>
                                 </m:ctrlPr>
                               </m:sSupPr>
                               <m:e>
                                 <m:r>
-                                  <a:rPr lang="en-US" altLang="zh-TW" sz="1606" i="1">
+                                  <a:rPr lang="en-US" altLang="zh-TW" sz="2000" i="1">
                                     <a:latin typeface="Cambria Math" panose="02040503050406030204" pitchFamily="18" charset="0"/>
                                   </a:rPr>
                                   <m:t>𝑒</m:t>
@@ -3412,7 +3353,7 @@
                               </m:e>
                               <m:sup>
                                 <m:r>
-                                  <a:rPr lang="en-US" altLang="zh-TW" sz="1606" i="1">
+                                  <a:rPr lang="en-US" altLang="zh-TW" sz="2000" i="1">
                                     <a:latin typeface="Cambria Math" panose="02040503050406030204" pitchFamily="18" charset="0"/>
                                   </a:rPr>
                                   <m:t>𝑖</m:t>
@@ -3420,14 +3361,14 @@
                                 <m:d>
                                   <m:dPr>
                                     <m:ctrlPr>
-                                      <a:rPr lang="en-US" altLang="zh-TW" sz="1606" i="1" dirty="0">
+                                      <a:rPr lang="en-US" altLang="zh-TW" sz="2000" i="1" dirty="0">
                                         <a:latin typeface="Cambria Math" panose="02040503050406030204" pitchFamily="18" charset="0"/>
                                       </a:rPr>
                                     </m:ctrlPr>
                                   </m:dPr>
                                   <m:e>
                                     <m:r>
-                                      <a:rPr lang="en-US" altLang="zh-TW" sz="1606" i="1" dirty="0">
+                                      <a:rPr lang="en-US" altLang="zh-TW" sz="2000" i="1" dirty="0">
                                         <a:latin typeface="Cambria Math" panose="02040503050406030204" pitchFamily="18" charset="0"/>
                                       </a:rPr>
                                       <m:t>ℓ−1</m:t>
@@ -3435,7 +3376,7 @@
                                   </m:e>
                                 </m:d>
                                 <m:r>
-                                  <a:rPr lang="en-US" altLang="zh-TW" sz="1606" i="1">
+                                  <a:rPr lang="en-US" altLang="zh-TW" sz="2000" i="1">
                                     <a:latin typeface="Cambria Math" panose="02040503050406030204" pitchFamily="18" charset="0"/>
                                   </a:rPr>
                                   <m:t>𝜙</m:t>
@@ -3447,7 +3388,7 @@
                       </m:oMath>
                     </m:oMathPara>
                   </a14:m>
-                  <a:endParaRPr lang="zh-TW" altLang="en-US" sz="1606" dirty="0">
+                  <a:endParaRPr lang="zh-TW" altLang="en-US" sz="2000" dirty="0">
                     <a:latin typeface="Times New Roman" panose="02020603050405020304" pitchFamily="18" charset="0"/>
                     <a:cs typeface="Times New Roman" panose="02020603050405020304" pitchFamily="18" charset="0"/>
                   </a:endParaRPr>
@@ -3455,7 +3396,7 @@
               </p:txBody>
             </p:sp>
           </mc:Choice>
-          <mc:Fallback xmlns="">
+          <mc:Fallback>
             <p:sp>
               <p:nvSpPr>
                 <p:cNvPr id="25" name="矩形 24">
@@ -3472,8 +3413,8 @@
               </p:nvSpPr>
               <p:spPr>
                 <a:xfrm>
-                  <a:off x="-79210" y="1237002"/>
-                  <a:ext cx="1308848" cy="376439"/>
+                  <a:off x="-33764" y="1958389"/>
+                  <a:ext cx="1583510" cy="445635"/>
                 </a:xfrm>
                 <a:prstGeom prst="rect">
                   <a:avLst/>
@@ -3500,8 +3441,8 @@
             </p:sp>
           </mc:Fallback>
         </mc:AlternateContent>
-        <mc:AlternateContent xmlns:mc="http://schemas.openxmlformats.org/markup-compatibility/2006" xmlns:a14="http://schemas.microsoft.com/office/drawing/2010/main">
-          <mc:Choice Requires="a14">
+        <mc:AlternateContent xmlns:mc="http://schemas.openxmlformats.org/markup-compatibility/2006">
+          <mc:Choice xmlns:a14="http://schemas.microsoft.com/office/drawing/2010/main" Requires="a14">
             <p:sp>
               <p:nvSpPr>
                 <p:cNvPr id="34" name="矩形 33">
@@ -3516,8 +3457,8 @@
               </p:nvSpPr>
               <p:spPr>
                 <a:xfrm>
-                  <a:off x="-79210" y="4193799"/>
-                  <a:ext cx="1308848" cy="376439"/>
+                  <a:off x="-33764" y="4351439"/>
+                  <a:ext cx="1583510" cy="445635"/>
                 </a:xfrm>
                 <a:prstGeom prst="rect">
                   <a:avLst/>
@@ -3540,7 +3481,7 @@
                           <m:rPr>
                             <m:sty m:val="p"/>
                           </m:rPr>
-                          <a:rPr lang="en-US" altLang="zh-TW" sz="1606">
+                          <a:rPr lang="en-US" altLang="zh-TW" sz="2000">
                             <a:latin typeface="Cambria Math" panose="02040503050406030204" pitchFamily="18" charset="0"/>
                           </a:rPr>
                           <m:t>Re</m:t>
@@ -3550,7 +3491,7 @@
                             <m:begChr m:val="["/>
                             <m:endChr m:val="]"/>
                             <m:ctrlPr>
-                              <a:rPr lang="en-US" altLang="zh-TW" sz="1606" i="1">
+                              <a:rPr lang="en-US" altLang="zh-TW" sz="2000" i="1">
                                 <a:latin typeface="Cambria Math" panose="02040503050406030204" pitchFamily="18" charset="0"/>
                               </a:rPr>
                             </m:ctrlPr>
@@ -3559,14 +3500,14 @@
                             <m:sSup>
                               <m:sSupPr>
                                 <m:ctrlPr>
-                                  <a:rPr lang="en-US" altLang="zh-TW" sz="1606" i="1">
+                                  <a:rPr lang="en-US" altLang="zh-TW" sz="2000" i="1">
                                     <a:latin typeface="Cambria Math" panose="02040503050406030204" pitchFamily="18" charset="0"/>
                                   </a:rPr>
                                 </m:ctrlPr>
                               </m:sSupPr>
                               <m:e>
                                 <m:r>
-                                  <a:rPr lang="en-US" altLang="zh-TW" sz="1606" i="1">
+                                  <a:rPr lang="en-US" altLang="zh-TW" sz="2000" i="1">
                                     <a:latin typeface="Cambria Math" panose="02040503050406030204" pitchFamily="18" charset="0"/>
                                   </a:rPr>
                                   <m:t>𝑒</m:t>
@@ -3574,7 +3515,7 @@
                               </m:e>
                               <m:sup>
                                 <m:r>
-                                  <a:rPr lang="en-US" altLang="zh-TW" sz="1606" i="1">
+                                  <a:rPr lang="en-US" altLang="zh-TW" sz="2000" i="1">
                                     <a:latin typeface="Cambria Math" panose="02040503050406030204" pitchFamily="18" charset="0"/>
                                   </a:rPr>
                                   <m:t>𝑖</m:t>
@@ -3582,14 +3523,14 @@
                                 <m:d>
                                   <m:dPr>
                                     <m:ctrlPr>
-                                      <a:rPr lang="en-US" altLang="zh-TW" sz="1606" i="1" dirty="0">
+                                      <a:rPr lang="en-US" altLang="zh-TW" sz="2000" i="1" dirty="0">
                                         <a:latin typeface="Cambria Math" panose="02040503050406030204" pitchFamily="18" charset="0"/>
                                       </a:rPr>
                                     </m:ctrlPr>
                                   </m:dPr>
                                   <m:e>
                                     <m:r>
-                                      <a:rPr lang="en-US" altLang="zh-TW" sz="1606" i="1" dirty="0">
+                                      <a:rPr lang="en-US" altLang="zh-TW" sz="2000" i="1" dirty="0">
                                         <a:latin typeface="Cambria Math" panose="02040503050406030204" pitchFamily="18" charset="0"/>
                                       </a:rPr>
                                       <m:t>ℓ+1</m:t>
@@ -3597,7 +3538,7 @@
                                   </m:e>
                                 </m:d>
                                 <m:r>
-                                  <a:rPr lang="en-US" altLang="zh-TW" sz="1606" i="1">
+                                  <a:rPr lang="en-US" altLang="zh-TW" sz="2000" i="1">
                                     <a:latin typeface="Cambria Math" panose="02040503050406030204" pitchFamily="18" charset="0"/>
                                   </a:rPr>
                                   <m:t>𝜙</m:t>
@@ -3609,7 +3550,7 @@
                       </m:oMath>
                     </m:oMathPara>
                   </a14:m>
-                  <a:endParaRPr lang="zh-TW" altLang="en-US" sz="1606" dirty="0">
+                  <a:endParaRPr lang="zh-TW" altLang="en-US" sz="2000" dirty="0">
                     <a:latin typeface="Times New Roman" panose="02020603050405020304" pitchFamily="18" charset="0"/>
                     <a:cs typeface="Times New Roman" panose="02020603050405020304" pitchFamily="18" charset="0"/>
                   </a:endParaRPr>
@@ -3617,7 +3558,7 @@
               </p:txBody>
             </p:sp>
           </mc:Choice>
-          <mc:Fallback xmlns="">
+          <mc:Fallback>
             <p:sp>
               <p:nvSpPr>
                 <p:cNvPr id="34" name="矩形 33">
@@ -3634,8 +3575,8 @@
               </p:nvSpPr>
               <p:spPr>
                 <a:xfrm>
-                  <a:off x="-79210" y="4193799"/>
-                  <a:ext cx="1308848" cy="376439"/>
+                  <a:off x="-33764" y="4351439"/>
+                  <a:ext cx="1583510" cy="445635"/>
                 </a:xfrm>
                 <a:prstGeom prst="rect">
                   <a:avLst/>
@@ -3699,16 +3640,16 @@
           </p:blipFill>
           <p:spPr>
             <a:xfrm>
-              <a:off x="10941256" y="2394894"/>
-              <a:ext cx="1301378" cy="2804506"/>
+              <a:off x="8885524" y="2895516"/>
+              <a:ext cx="1053255" cy="2269795"/>
             </a:xfrm>
             <a:prstGeom prst="rect">
               <a:avLst/>
             </a:prstGeom>
           </p:spPr>
         </p:pic>
-        <mc:AlternateContent xmlns:mc="http://schemas.openxmlformats.org/markup-compatibility/2006" xmlns:a14="http://schemas.microsoft.com/office/drawing/2010/main">
-          <mc:Choice Requires="a14">
+        <mc:AlternateContent xmlns:mc="http://schemas.openxmlformats.org/markup-compatibility/2006">
+          <mc:Choice xmlns:a14="http://schemas.microsoft.com/office/drawing/2010/main" Requires="a14">
             <p:sp>
               <p:nvSpPr>
                 <p:cNvPr id="36" name="矩形 35">
@@ -3723,8 +3664,8 @@
               </p:nvSpPr>
               <p:spPr>
                 <a:xfrm>
-                  <a:off x="1464906" y="4659652"/>
-                  <a:ext cx="816314" cy="370422"/>
+                  <a:off x="1587424" y="4671322"/>
+                  <a:ext cx="754437" cy="343171"/>
                 </a:xfrm>
                 <a:prstGeom prst="rect">
                   <a:avLst/>
@@ -3744,7 +3685,7 @@
                       </m:oMathParaPr>
                       <m:oMath xmlns:m="http://schemas.openxmlformats.org/officeDocument/2006/math">
                         <m:r>
-                          <a:rPr lang="en-US" altLang="zh-TW" sz="1807" i="1">
+                          <a:rPr lang="en-US" altLang="zh-TW" sz="1630" i="1">
                             <a:latin typeface="Cambria Math" panose="02040503050406030204" pitchFamily="18" charset="0"/>
                           </a:rPr>
                           <m:t>0.1</m:t>
@@ -3752,14 +3693,14 @@
                         <m:sSub>
                           <m:sSubPr>
                             <m:ctrlPr>
-                              <a:rPr lang="en-US" altLang="zh-TW" sz="1807" i="1">
+                              <a:rPr lang="en-US" altLang="zh-TW" sz="1630" i="1">
                                 <a:latin typeface="Cambria Math" panose="02040503050406030204" pitchFamily="18" charset="0"/>
                               </a:rPr>
                             </m:ctrlPr>
                           </m:sSubPr>
                           <m:e>
                             <m:r>
-                              <a:rPr lang="en-US" altLang="zh-TW" sz="1807" i="1">
+                              <a:rPr lang="en-US" altLang="zh-TW" sz="1630" i="1">
                                 <a:latin typeface="Cambria Math" panose="02040503050406030204" pitchFamily="18" charset="0"/>
                               </a:rPr>
                               <m:t>𝑄</m:t>
@@ -3767,7 +3708,7 @@
                           </m:e>
                           <m:sub>
                             <m:r>
-                              <a:rPr lang="en-US" altLang="zh-TW" sz="1807" i="1">
+                              <a:rPr lang="en-US" altLang="zh-TW" sz="1630" i="1">
                                 <a:latin typeface="Cambria Math" panose="02040503050406030204" pitchFamily="18" charset="0"/>
                               </a:rPr>
                               <m:t>𝐶</m:t>
@@ -3777,7 +3718,7 @@
                       </m:oMath>
                     </m:oMathPara>
                   </a14:m>
-                  <a:endParaRPr lang="zh-TW" altLang="en-US" sz="1807" dirty="0">
+                  <a:endParaRPr lang="zh-TW" altLang="en-US" sz="1630" dirty="0">
                     <a:latin typeface="Times New Roman" panose="02020603050405020304" pitchFamily="18" charset="0"/>
                     <a:cs typeface="Times New Roman" panose="02020603050405020304" pitchFamily="18" charset="0"/>
                   </a:endParaRPr>
@@ -3785,7 +3726,7 @@
               </p:txBody>
             </p:sp>
           </mc:Choice>
-          <mc:Fallback xmlns="">
+          <mc:Fallback>
             <p:sp>
               <p:nvSpPr>
                 <p:cNvPr id="36" name="矩形 35">
@@ -3802,8 +3743,8 @@
               </p:nvSpPr>
               <p:spPr>
                 <a:xfrm>
-                  <a:off x="1464906" y="4659652"/>
-                  <a:ext cx="816314" cy="370422"/>
+                  <a:off x="1587424" y="4671322"/>
+                  <a:ext cx="754437" cy="343171"/>
                 </a:xfrm>
                 <a:prstGeom prst="rect">
                   <a:avLst/>
@@ -3811,7 +3752,7 @@
                 <a:blipFill>
                   <a:blip r:embed="rId9"/>
                   <a:stretch>
-                    <a:fillRect b="-9836"/>
+                    <a:fillRect b="-8929"/>
                   </a:stretch>
                 </a:blipFill>
               </p:spPr>
@@ -3830,8 +3771,8 @@
             </p:sp>
           </mc:Fallback>
         </mc:AlternateContent>
-        <mc:AlternateContent xmlns:mc="http://schemas.openxmlformats.org/markup-compatibility/2006" xmlns:a14="http://schemas.microsoft.com/office/drawing/2010/main">
-          <mc:Choice Requires="a14">
+        <mc:AlternateContent xmlns:mc="http://schemas.openxmlformats.org/markup-compatibility/2006">
+          <mc:Choice xmlns:a14="http://schemas.microsoft.com/office/drawing/2010/main" Requires="a14">
             <p:sp>
               <p:nvSpPr>
                 <p:cNvPr id="37" name="矩形 36">
@@ -3846,8 +3787,8 @@
               </p:nvSpPr>
               <p:spPr>
                 <a:xfrm>
-                  <a:off x="1585828" y="5070589"/>
-                  <a:ext cx="790471" cy="370775"/>
+                  <a:off x="1641193" y="5015903"/>
+                  <a:ext cx="733662" cy="343171"/>
                 </a:xfrm>
                 <a:prstGeom prst="rect">
                   <a:avLst/>
@@ -3867,7 +3808,7 @@
                       </m:oMathParaPr>
                       <m:oMath xmlns:m="http://schemas.openxmlformats.org/officeDocument/2006/math">
                         <m:r>
-                          <a:rPr lang="en-US" altLang="zh-TW" sz="1807" i="1">
+                          <a:rPr lang="en-US" altLang="zh-TW" sz="1630" i="1">
                             <a:latin typeface="Cambria Math" panose="02040503050406030204" pitchFamily="18" charset="0"/>
                           </a:rPr>
                           <m:t>ℓ=0</m:t>
@@ -3875,7 +3816,7 @@
                       </m:oMath>
                     </m:oMathPara>
                   </a14:m>
-                  <a:endParaRPr lang="zh-TW" altLang="en-US" sz="1807" dirty="0">
+                  <a:endParaRPr lang="zh-TW" altLang="en-US" sz="1630" dirty="0">
                     <a:latin typeface="Times New Roman" panose="02020603050405020304" pitchFamily="18" charset="0"/>
                     <a:cs typeface="Times New Roman" panose="02020603050405020304" pitchFamily="18" charset="0"/>
                   </a:endParaRPr>
@@ -3883,7 +3824,7 @@
               </p:txBody>
             </p:sp>
           </mc:Choice>
-          <mc:Fallback xmlns="">
+          <mc:Fallback>
             <p:sp>
               <p:nvSpPr>
                 <p:cNvPr id="37" name="矩形 36">
@@ -3900,8 +3841,8 @@
               </p:nvSpPr>
               <p:spPr>
                 <a:xfrm>
-                  <a:off x="1585828" y="5070589"/>
-                  <a:ext cx="790471" cy="370775"/>
+                  <a:off x="1641193" y="5015903"/>
+                  <a:ext cx="733662" cy="343171"/>
                 </a:xfrm>
                 <a:prstGeom prst="rect">
                   <a:avLst/>
@@ -3928,8 +3869,8 @@
             </p:sp>
           </mc:Fallback>
         </mc:AlternateContent>
-        <mc:AlternateContent xmlns:mc="http://schemas.openxmlformats.org/markup-compatibility/2006" xmlns:a14="http://schemas.microsoft.com/office/drawing/2010/main">
-          <mc:Choice Requires="a14">
+        <mc:AlternateContent xmlns:mc="http://schemas.openxmlformats.org/markup-compatibility/2006">
+          <mc:Choice xmlns:a14="http://schemas.microsoft.com/office/drawing/2010/main" Requires="a14">
             <p:sp>
               <p:nvSpPr>
                 <p:cNvPr id="38" name="矩形 37">
@@ -3944,8 +3885,8 @@
               </p:nvSpPr>
               <p:spPr>
                 <a:xfrm>
-                  <a:off x="3286966" y="5070589"/>
-                  <a:ext cx="790471" cy="370775"/>
+                  <a:off x="2925421" y="5015903"/>
+                  <a:ext cx="733662" cy="343171"/>
                 </a:xfrm>
                 <a:prstGeom prst="rect">
                   <a:avLst/>
@@ -3965,7 +3906,7 @@
                       </m:oMathParaPr>
                       <m:oMath xmlns:m="http://schemas.openxmlformats.org/officeDocument/2006/math">
                         <m:r>
-                          <a:rPr lang="en-US" altLang="zh-TW" sz="1807" i="1">
+                          <a:rPr lang="en-US" altLang="zh-TW" sz="1630" i="1">
                             <a:latin typeface="Cambria Math" panose="02040503050406030204" pitchFamily="18" charset="0"/>
                           </a:rPr>
                           <m:t>ℓ=1</m:t>
@@ -3973,7 +3914,7 @@
                       </m:oMath>
                     </m:oMathPara>
                   </a14:m>
-                  <a:endParaRPr lang="zh-TW" altLang="en-US" sz="1807" dirty="0">
+                  <a:endParaRPr lang="zh-TW" altLang="en-US" sz="1630" dirty="0">
                     <a:latin typeface="Times New Roman" panose="02020603050405020304" pitchFamily="18" charset="0"/>
                     <a:cs typeface="Times New Roman" panose="02020603050405020304" pitchFamily="18" charset="0"/>
                   </a:endParaRPr>
@@ -3981,7 +3922,7 @@
               </p:txBody>
             </p:sp>
           </mc:Choice>
-          <mc:Fallback xmlns="">
+          <mc:Fallback>
             <p:sp>
               <p:nvSpPr>
                 <p:cNvPr id="38" name="矩形 37">
@@ -3998,8 +3939,8 @@
               </p:nvSpPr>
               <p:spPr>
                 <a:xfrm>
-                  <a:off x="3286966" y="5070589"/>
-                  <a:ext cx="790471" cy="370775"/>
+                  <a:off x="2925421" y="5015903"/>
+                  <a:ext cx="733662" cy="343171"/>
                 </a:xfrm>
                 <a:prstGeom prst="rect">
                   <a:avLst/>
@@ -4026,8 +3967,8 @@
             </p:sp>
           </mc:Fallback>
         </mc:AlternateContent>
-        <mc:AlternateContent xmlns:mc="http://schemas.openxmlformats.org/markup-compatibility/2006" xmlns:a14="http://schemas.microsoft.com/office/drawing/2010/main">
-          <mc:Choice Requires="a14">
+        <mc:AlternateContent xmlns:mc="http://schemas.openxmlformats.org/markup-compatibility/2006">
+          <mc:Choice xmlns:a14="http://schemas.microsoft.com/office/drawing/2010/main" Requires="a14">
             <p:sp>
               <p:nvSpPr>
                 <p:cNvPr id="39" name="矩形 38">
@@ -4042,8 +3983,8 @@
               </p:nvSpPr>
               <p:spPr>
                 <a:xfrm>
-                  <a:off x="4988104" y="5070589"/>
-                  <a:ext cx="790471" cy="370775"/>
+                  <a:off x="4209649" y="5015903"/>
+                  <a:ext cx="733662" cy="343171"/>
                 </a:xfrm>
                 <a:prstGeom prst="rect">
                   <a:avLst/>
@@ -4063,7 +4004,7 @@
                       </m:oMathParaPr>
                       <m:oMath xmlns:m="http://schemas.openxmlformats.org/officeDocument/2006/math">
                         <m:r>
-                          <a:rPr lang="en-US" altLang="zh-TW" sz="1807" i="1">
+                          <a:rPr lang="en-US" altLang="zh-TW" sz="1630" i="1">
                             <a:latin typeface="Cambria Math" panose="02040503050406030204" pitchFamily="18" charset="0"/>
                           </a:rPr>
                           <m:t>ℓ=2</m:t>
@@ -4071,7 +4012,7 @@
                       </m:oMath>
                     </m:oMathPara>
                   </a14:m>
-                  <a:endParaRPr lang="zh-TW" altLang="en-US" sz="1807" dirty="0">
+                  <a:endParaRPr lang="zh-TW" altLang="en-US" sz="1630" dirty="0">
                     <a:latin typeface="Times New Roman" panose="02020603050405020304" pitchFamily="18" charset="0"/>
                     <a:cs typeface="Times New Roman" panose="02020603050405020304" pitchFamily="18" charset="0"/>
                   </a:endParaRPr>
@@ -4079,7 +4020,7 @@
               </p:txBody>
             </p:sp>
           </mc:Choice>
-          <mc:Fallback xmlns="">
+          <mc:Fallback>
             <p:sp>
               <p:nvSpPr>
                 <p:cNvPr id="39" name="矩形 38">
@@ -4096,8 +4037,8 @@
               </p:nvSpPr>
               <p:spPr>
                 <a:xfrm>
-                  <a:off x="4988104" y="5070589"/>
-                  <a:ext cx="790471" cy="370775"/>
+                  <a:off x="4209649" y="5015903"/>
+                  <a:ext cx="733662" cy="343171"/>
                 </a:xfrm>
                 <a:prstGeom prst="rect">
                   <a:avLst/>
@@ -4124,8 +4065,8 @@
             </p:sp>
           </mc:Fallback>
         </mc:AlternateContent>
-        <mc:AlternateContent xmlns:mc="http://schemas.openxmlformats.org/markup-compatibility/2006" xmlns:a14="http://schemas.microsoft.com/office/drawing/2010/main">
-          <mc:Choice Requires="a14">
+        <mc:AlternateContent xmlns:mc="http://schemas.openxmlformats.org/markup-compatibility/2006">
+          <mc:Choice xmlns:a14="http://schemas.microsoft.com/office/drawing/2010/main" Requires="a14">
             <p:sp>
               <p:nvSpPr>
                 <p:cNvPr id="40" name="矩形 39">
@@ -4140,8 +4081,8 @@
               </p:nvSpPr>
               <p:spPr>
                 <a:xfrm>
-                  <a:off x="6689242" y="5070589"/>
-                  <a:ext cx="790471" cy="370775"/>
+                  <a:off x="5493877" y="5015903"/>
+                  <a:ext cx="733662" cy="343171"/>
                 </a:xfrm>
                 <a:prstGeom prst="rect">
                   <a:avLst/>
@@ -4161,7 +4102,7 @@
                       </m:oMathParaPr>
                       <m:oMath xmlns:m="http://schemas.openxmlformats.org/officeDocument/2006/math">
                         <m:r>
-                          <a:rPr lang="en-US" altLang="zh-TW" sz="1807" i="1">
+                          <a:rPr lang="en-US" altLang="zh-TW" sz="1630" i="1">
                             <a:latin typeface="Cambria Math" panose="02040503050406030204" pitchFamily="18" charset="0"/>
                           </a:rPr>
                           <m:t>ℓ=3</m:t>
@@ -4169,7 +4110,7 @@
                       </m:oMath>
                     </m:oMathPara>
                   </a14:m>
-                  <a:endParaRPr lang="zh-TW" altLang="en-US" sz="1807" dirty="0">
+                  <a:endParaRPr lang="zh-TW" altLang="en-US" sz="1630" dirty="0">
                     <a:latin typeface="Times New Roman" panose="02020603050405020304" pitchFamily="18" charset="0"/>
                     <a:cs typeface="Times New Roman" panose="02020603050405020304" pitchFamily="18" charset="0"/>
                   </a:endParaRPr>
@@ -4177,7 +4118,7 @@
               </p:txBody>
             </p:sp>
           </mc:Choice>
-          <mc:Fallback xmlns="">
+          <mc:Fallback>
             <p:sp>
               <p:nvSpPr>
                 <p:cNvPr id="40" name="矩形 39">
@@ -4194,8 +4135,8 @@
               </p:nvSpPr>
               <p:spPr>
                 <a:xfrm>
-                  <a:off x="6689242" y="5070589"/>
-                  <a:ext cx="790471" cy="370775"/>
+                  <a:off x="5493877" y="5015903"/>
+                  <a:ext cx="733662" cy="343171"/>
                 </a:xfrm>
                 <a:prstGeom prst="rect">
                   <a:avLst/>
@@ -4222,8 +4163,8 @@
             </p:sp>
           </mc:Fallback>
         </mc:AlternateContent>
-        <mc:AlternateContent xmlns:mc="http://schemas.openxmlformats.org/markup-compatibility/2006" xmlns:a14="http://schemas.microsoft.com/office/drawing/2010/main">
-          <mc:Choice Requires="a14">
+        <mc:AlternateContent xmlns:mc="http://schemas.openxmlformats.org/markup-compatibility/2006">
+          <mc:Choice xmlns:a14="http://schemas.microsoft.com/office/drawing/2010/main" Requires="a14">
             <p:sp>
               <p:nvSpPr>
                 <p:cNvPr id="41" name="矩形 40">
@@ -4238,8 +4179,8 @@
               </p:nvSpPr>
               <p:spPr>
                 <a:xfrm>
-                  <a:off x="8390380" y="5070589"/>
-                  <a:ext cx="790471" cy="370775"/>
+                  <a:off x="6778105" y="5015903"/>
+                  <a:ext cx="733662" cy="343171"/>
                 </a:xfrm>
                 <a:prstGeom prst="rect">
                   <a:avLst/>
@@ -4259,7 +4200,7 @@
                       </m:oMathParaPr>
                       <m:oMath xmlns:m="http://schemas.openxmlformats.org/officeDocument/2006/math">
                         <m:r>
-                          <a:rPr lang="en-US" altLang="zh-TW" sz="1807" i="1">
+                          <a:rPr lang="en-US" altLang="zh-TW" sz="1630" i="1">
                             <a:latin typeface="Cambria Math" panose="02040503050406030204" pitchFamily="18" charset="0"/>
                           </a:rPr>
                           <m:t>ℓ=4</m:t>
@@ -4267,7 +4208,7 @@
                       </m:oMath>
                     </m:oMathPara>
                   </a14:m>
-                  <a:endParaRPr lang="zh-TW" altLang="en-US" sz="1807" dirty="0">
+                  <a:endParaRPr lang="zh-TW" altLang="en-US" sz="1630" dirty="0">
                     <a:latin typeface="Times New Roman" panose="02020603050405020304" pitchFamily="18" charset="0"/>
                     <a:cs typeface="Times New Roman" panose="02020603050405020304" pitchFamily="18" charset="0"/>
                   </a:endParaRPr>
@@ -4275,7 +4216,7 @@
               </p:txBody>
             </p:sp>
           </mc:Choice>
-          <mc:Fallback xmlns="">
+          <mc:Fallback>
             <p:sp>
               <p:nvSpPr>
                 <p:cNvPr id="41" name="矩形 40">
@@ -4292,8 +4233,8 @@
               </p:nvSpPr>
               <p:spPr>
                 <a:xfrm>
-                  <a:off x="8390380" y="5070589"/>
-                  <a:ext cx="790471" cy="370775"/>
+                  <a:off x="6778105" y="5015903"/>
+                  <a:ext cx="733662" cy="343171"/>
                 </a:xfrm>
                 <a:prstGeom prst="rect">
                   <a:avLst/>
@@ -4320,8 +4261,8 @@
             </p:sp>
           </mc:Fallback>
         </mc:AlternateContent>
-        <mc:AlternateContent xmlns:mc="http://schemas.openxmlformats.org/markup-compatibility/2006" xmlns:a14="http://schemas.microsoft.com/office/drawing/2010/main">
-          <mc:Choice Requires="a14">
+        <mc:AlternateContent xmlns:mc="http://schemas.openxmlformats.org/markup-compatibility/2006">
+          <mc:Choice xmlns:a14="http://schemas.microsoft.com/office/drawing/2010/main" Requires="a14">
             <p:sp>
               <p:nvSpPr>
                 <p:cNvPr id="42" name="矩形 41">
@@ -4336,8 +4277,8 @@
               </p:nvSpPr>
               <p:spPr>
                 <a:xfrm>
-                  <a:off x="10091519" y="5070589"/>
-                  <a:ext cx="790471" cy="370775"/>
+                  <a:off x="8062333" y="5015903"/>
+                  <a:ext cx="733662" cy="343171"/>
                 </a:xfrm>
                 <a:prstGeom prst="rect">
                   <a:avLst/>
@@ -4357,7 +4298,7 @@
                       </m:oMathParaPr>
                       <m:oMath xmlns:m="http://schemas.openxmlformats.org/officeDocument/2006/math">
                         <m:r>
-                          <a:rPr lang="en-US" altLang="zh-TW" sz="1807" i="1">
+                          <a:rPr lang="en-US" altLang="zh-TW" sz="1630" i="1">
                             <a:latin typeface="Cambria Math" panose="02040503050406030204" pitchFamily="18" charset="0"/>
                           </a:rPr>
                           <m:t>ℓ=5</m:t>
@@ -4365,7 +4306,7 @@
                       </m:oMath>
                     </m:oMathPara>
                   </a14:m>
-                  <a:endParaRPr lang="zh-TW" altLang="en-US" sz="1807" dirty="0">
+                  <a:endParaRPr lang="zh-TW" altLang="en-US" sz="1630" dirty="0">
                     <a:latin typeface="Times New Roman" panose="02020603050405020304" pitchFamily="18" charset="0"/>
                     <a:cs typeface="Times New Roman" panose="02020603050405020304" pitchFamily="18" charset="0"/>
                   </a:endParaRPr>
@@ -4373,7 +4314,7 @@
               </p:txBody>
             </p:sp>
           </mc:Choice>
-          <mc:Fallback xmlns="">
+          <mc:Fallback>
             <p:sp>
               <p:nvSpPr>
                 <p:cNvPr id="42" name="矩形 41">
@@ -4390,8 +4331,8 @@
               </p:nvSpPr>
               <p:spPr>
                 <a:xfrm>
-                  <a:off x="10091519" y="5070589"/>
-                  <a:ext cx="790471" cy="370775"/>
+                  <a:off x="8062333" y="5015903"/>
+                  <a:ext cx="733662" cy="343171"/>
                 </a:xfrm>
                 <a:prstGeom prst="rect">
                   <a:avLst/>
@@ -4400,264 +4341,6 @@
                   <a:blip r:embed="rId15"/>
                   <a:stretch>
                     <a:fillRect/>
-                  </a:stretch>
-                </a:blipFill>
-              </p:spPr>
-              <p:txBody>
-                <a:bodyPr/>
-                <a:lstStyle/>
-                <a:p>
-                  <a:r>
-                    <a:rPr lang="zh-TW" altLang="en-US">
-                      <a:noFill/>
-                    </a:rPr>
-                    <a:t> </a:t>
-                  </a:r>
-                </a:p>
-              </p:txBody>
-            </p:sp>
-          </mc:Fallback>
-        </mc:AlternateContent>
-        <mc:AlternateContent xmlns:mc="http://schemas.openxmlformats.org/markup-compatibility/2006" xmlns:a14="http://schemas.microsoft.com/office/drawing/2010/main">
-          <mc:Choice Requires="a14">
-            <p:sp>
-              <p:nvSpPr>
-                <p:cNvPr id="43" name="矩形 42">
-                  <a:extLst>
-                    <a:ext uri="{FF2B5EF4-FFF2-40B4-BE49-F238E27FC236}">
-                      <a16:creationId xmlns:a16="http://schemas.microsoft.com/office/drawing/2014/main" id="{7D54873E-2B30-4795-A12A-61C91F1E4971}"/>
-                    </a:ext>
-                  </a:extLst>
-                </p:cNvPr>
-                <p:cNvSpPr/>
-                <p:nvPr/>
-              </p:nvSpPr>
-              <p:spPr>
-                <a:xfrm>
-                  <a:off x="1200339" y="4931617"/>
-                  <a:ext cx="478210" cy="370775"/>
-                </a:xfrm>
-                <a:prstGeom prst="rect">
-                  <a:avLst/>
-                </a:prstGeom>
-              </p:spPr>
-              <p:txBody>
-                <a:bodyPr wrap="none">
-                  <a:spAutoFit/>
-                </a:bodyPr>
-                <a:lstStyle/>
-                <a:p>
-                  <a:pPr/>
-                  <a14:m>
-                    <m:oMathPara xmlns:m="http://schemas.openxmlformats.org/officeDocument/2006/math">
-                      <m:oMathParaPr>
-                        <m:jc m:val="centerGroup"/>
-                      </m:oMathParaPr>
-                      <m:oMath xmlns:m="http://schemas.openxmlformats.org/officeDocument/2006/math">
-                        <m:sSub>
-                          <m:sSubPr>
-                            <m:ctrlPr>
-                              <a:rPr lang="en-US" altLang="zh-TW" sz="1807" i="1">
-                                <a:latin typeface="Cambria Math" panose="02040503050406030204" pitchFamily="18" charset="0"/>
-                              </a:rPr>
-                            </m:ctrlPr>
-                          </m:sSubPr>
-                          <m:e>
-                            <m:acc>
-                              <m:accPr>
-                                <m:chr m:val="̂"/>
-                                <m:ctrlPr>
-                                  <a:rPr lang="zh-TW" altLang="en-US" sz="1807" i="1">
-                                    <a:latin typeface="Cambria Math" panose="02040503050406030204" pitchFamily="18" charset="0"/>
-                                  </a:rPr>
-                                </m:ctrlPr>
-                              </m:accPr>
-                              <m:e>
-                                <m:r>
-                                  <a:rPr lang="en-US" altLang="zh-TW" sz="1807" i="1">
-                                    <a:latin typeface="Cambria Math" panose="02040503050406030204" pitchFamily="18" charset="0"/>
-                                  </a:rPr>
-                                  <m:t>𝑞</m:t>
-                                </m:r>
-                              </m:e>
-                            </m:acc>
-                          </m:e>
-                          <m:sub>
-                            <m:r>
-                              <a:rPr lang="en-US" altLang="zh-TW" sz="1807" i="1">
-                                <a:latin typeface="Cambria Math" panose="02040503050406030204" pitchFamily="18" charset="0"/>
-                              </a:rPr>
-                              <m:t>𝑥</m:t>
-                            </m:r>
-                          </m:sub>
-                        </m:sSub>
-                      </m:oMath>
-                    </m:oMathPara>
-                  </a14:m>
-                  <a:endParaRPr lang="zh-TW" altLang="en-US" sz="1807" dirty="0">
-                    <a:latin typeface="Times New Roman" panose="02020603050405020304" pitchFamily="18" charset="0"/>
-                    <a:cs typeface="Times New Roman" panose="02020603050405020304" pitchFamily="18" charset="0"/>
-                  </a:endParaRPr>
-                </a:p>
-              </p:txBody>
-            </p:sp>
-          </mc:Choice>
-          <mc:Fallback xmlns="">
-            <p:sp>
-              <p:nvSpPr>
-                <p:cNvPr id="43" name="矩形 42">
-                  <a:extLst>
-                    <a:ext uri="{FF2B5EF4-FFF2-40B4-BE49-F238E27FC236}">
-                      <a16:creationId xmlns:a16="http://schemas.microsoft.com/office/drawing/2014/main" id="{7D54873E-2B30-4795-A12A-61C91F1E4971}"/>
-                    </a:ext>
-                  </a:extLst>
-                </p:cNvPr>
-                <p:cNvSpPr>
-                  <a:spLocks noRot="1" noChangeAspect="1" noMove="1" noResize="1" noEditPoints="1" noAdjustHandles="1" noChangeArrowheads="1" noChangeShapeType="1" noTextEdit="1"/>
-                </p:cNvSpPr>
-                <p:nvPr/>
-              </p:nvSpPr>
-              <p:spPr>
-                <a:xfrm>
-                  <a:off x="1200339" y="4931617"/>
-                  <a:ext cx="478210" cy="370775"/>
-                </a:xfrm>
-                <a:prstGeom prst="rect">
-                  <a:avLst/>
-                </a:prstGeom>
-                <a:blipFill>
-                  <a:blip r:embed="rId16"/>
-                  <a:stretch>
-                    <a:fillRect t="-5000" r="-11392" b="-8333"/>
-                  </a:stretch>
-                </a:blipFill>
-              </p:spPr>
-              <p:txBody>
-                <a:bodyPr/>
-                <a:lstStyle/>
-                <a:p>
-                  <a:r>
-                    <a:rPr lang="zh-TW" altLang="en-US">
-                      <a:noFill/>
-                    </a:rPr>
-                    <a:t> </a:t>
-                  </a:r>
-                </a:p>
-              </p:txBody>
-            </p:sp>
-          </mc:Fallback>
-        </mc:AlternateContent>
-        <mc:AlternateContent xmlns:mc="http://schemas.openxmlformats.org/markup-compatibility/2006" xmlns:a14="http://schemas.microsoft.com/office/drawing/2010/main">
-          <mc:Choice Requires="a14">
-            <p:sp>
-              <p:nvSpPr>
-                <p:cNvPr id="44" name="矩形 43">
-                  <a:extLst>
-                    <a:ext uri="{FF2B5EF4-FFF2-40B4-BE49-F238E27FC236}">
-                      <a16:creationId xmlns:a16="http://schemas.microsoft.com/office/drawing/2014/main" id="{CE4C2CFD-899B-47FF-B4FA-3A719FE792AF}"/>
-                    </a:ext>
-                  </a:extLst>
-                </p:cNvPr>
-                <p:cNvSpPr/>
-                <p:nvPr/>
-              </p:nvSpPr>
-              <p:spPr>
-                <a:xfrm>
-                  <a:off x="887379" y="4618166"/>
-                  <a:ext cx="485870" cy="392789"/>
-                </a:xfrm>
-                <a:prstGeom prst="rect">
-                  <a:avLst/>
-                </a:prstGeom>
-              </p:spPr>
-              <p:txBody>
-                <a:bodyPr wrap="none">
-                  <a:spAutoFit/>
-                </a:bodyPr>
-                <a:lstStyle/>
-                <a:p>
-                  <a:pPr/>
-                  <a14:m>
-                    <m:oMathPara xmlns:m="http://schemas.openxmlformats.org/officeDocument/2006/math">
-                      <m:oMathParaPr>
-                        <m:jc m:val="centerGroup"/>
-                      </m:oMathParaPr>
-                      <m:oMath xmlns:m="http://schemas.openxmlformats.org/officeDocument/2006/math">
-                        <m:sSub>
-                          <m:sSubPr>
-                            <m:ctrlPr>
-                              <a:rPr lang="en-US" altLang="zh-TW" sz="1807" i="1">
-                                <a:latin typeface="Cambria Math" panose="02040503050406030204" pitchFamily="18" charset="0"/>
-                              </a:rPr>
-                            </m:ctrlPr>
-                          </m:sSubPr>
-                          <m:e>
-                            <m:acc>
-                              <m:accPr>
-                                <m:chr m:val="̂"/>
-                                <m:ctrlPr>
-                                  <a:rPr lang="zh-TW" altLang="en-US" sz="1807" i="1">
-                                    <a:latin typeface="Cambria Math" panose="02040503050406030204" pitchFamily="18" charset="0"/>
-                                  </a:rPr>
-                                </m:ctrlPr>
-                              </m:accPr>
-                              <m:e>
-                                <m:r>
-                                  <a:rPr lang="en-US" altLang="zh-TW" sz="1807" i="1">
-                                    <a:latin typeface="Cambria Math" panose="02040503050406030204" pitchFamily="18" charset="0"/>
-                                  </a:rPr>
-                                  <m:t>𝑞</m:t>
-                                </m:r>
-                              </m:e>
-                            </m:acc>
-                          </m:e>
-                          <m:sub>
-                            <m:r>
-                              <a:rPr lang="en-US" altLang="zh-TW" sz="1807" i="1">
-                                <a:latin typeface="Cambria Math" panose="02040503050406030204" pitchFamily="18" charset="0"/>
-                              </a:rPr>
-                              <m:t>𝑦</m:t>
-                            </m:r>
-                          </m:sub>
-                        </m:sSub>
-                      </m:oMath>
-                    </m:oMathPara>
-                  </a14:m>
-                  <a:endParaRPr lang="zh-TW" altLang="en-US" sz="1807" dirty="0">
-                    <a:latin typeface="Times New Roman" panose="02020603050405020304" pitchFamily="18" charset="0"/>
-                    <a:cs typeface="Times New Roman" panose="02020603050405020304" pitchFamily="18" charset="0"/>
-                  </a:endParaRPr>
-                </a:p>
-              </p:txBody>
-            </p:sp>
-          </mc:Choice>
-          <mc:Fallback xmlns="">
-            <p:sp>
-              <p:nvSpPr>
-                <p:cNvPr id="44" name="矩形 43">
-                  <a:extLst>
-                    <a:ext uri="{FF2B5EF4-FFF2-40B4-BE49-F238E27FC236}">
-                      <a16:creationId xmlns:a16="http://schemas.microsoft.com/office/drawing/2014/main" id="{CE4C2CFD-899B-47FF-B4FA-3A719FE792AF}"/>
-                    </a:ext>
-                  </a:extLst>
-                </p:cNvPr>
-                <p:cNvSpPr>
-                  <a:spLocks noRot="1" noChangeAspect="1" noMove="1" noResize="1" noEditPoints="1" noAdjustHandles="1" noChangeArrowheads="1" noChangeShapeType="1" noTextEdit="1"/>
-                </p:cNvSpPr>
-                <p:nvPr/>
-              </p:nvSpPr>
-              <p:spPr>
-                <a:xfrm>
-                  <a:off x="887379" y="4618166"/>
-                  <a:ext cx="485870" cy="392789"/>
-                </a:xfrm>
-                <a:prstGeom prst="rect">
-                  <a:avLst/>
-                </a:prstGeom>
-                <a:blipFill>
-                  <a:blip r:embed="rId17"/>
-                  <a:stretch>
-                    <a:fillRect t="-4615" r="-11392" b="-3077"/>
                   </a:stretch>
                 </a:blipFill>
               </p:spPr>
@@ -4690,8 +4373,8 @@
           </p:nvSpPr>
           <p:spPr>
             <a:xfrm rot="5400000">
-              <a:off x="11397860" y="3607788"/>
-              <a:ext cx="1352105" cy="339876"/>
+              <a:off x="9122393" y="3843110"/>
+              <a:ext cx="1359668" cy="343171"/>
             </a:xfrm>
             <a:prstGeom prst="rect">
               <a:avLst/>
@@ -4704,19 +4387,435 @@
             <a:lstStyle/>
             <a:p>
               <a:r>
-                <a:rPr lang="en-US" altLang="zh-TW" sz="1606" dirty="0">
+                <a:rPr lang="en-US" altLang="zh-TW" sz="1630" dirty="0">
                   <a:latin typeface="Times New Roman" panose="02020603050405020304" pitchFamily="18" charset="0"/>
                   <a:cs typeface="Times New Roman" panose="02020603050405020304" pitchFamily="18" charset="0"/>
                 </a:rPr>
                 <a:t>arbitrary units</a:t>
               </a:r>
-              <a:endParaRPr lang="zh-TW" altLang="en-US" sz="1606" dirty="0">
+              <a:endParaRPr lang="zh-TW" altLang="en-US" sz="1630" dirty="0">
                 <a:latin typeface="Times New Roman" panose="02020603050405020304" pitchFamily="18" charset="0"/>
                 <a:cs typeface="Times New Roman" panose="02020603050405020304" pitchFamily="18" charset="0"/>
               </a:endParaRPr>
             </a:p>
           </p:txBody>
         </p:sp>
+        <p:sp>
+          <p:nvSpPr>
+            <p:cNvPr id="21" name="箭號: 向右 20">
+              <a:extLst>
+                <a:ext uri="{FF2B5EF4-FFF2-40B4-BE49-F238E27FC236}">
+                  <a16:creationId xmlns:a16="http://schemas.microsoft.com/office/drawing/2014/main" id="{025C62A4-9A34-4BD9-8357-674205EBF76F}"/>
+                </a:ext>
+              </a:extLst>
+            </p:cNvPr>
+            <p:cNvSpPr/>
+            <p:nvPr/>
+          </p:nvSpPr>
+          <p:spPr>
+            <a:xfrm>
+              <a:off x="2010795" y="4463869"/>
+              <a:ext cx="92654" cy="27541"/>
+            </a:xfrm>
+            <a:prstGeom prst="rightArrow">
+              <a:avLst>
+                <a:gd name="adj1" fmla="val 50000"/>
+                <a:gd name="adj2" fmla="val 99023"/>
+              </a:avLst>
+            </a:prstGeom>
+            <a:solidFill>
+              <a:schemeClr val="bg1"/>
+            </a:solidFill>
+            <a:ln>
+              <a:solidFill>
+                <a:schemeClr val="bg1"/>
+              </a:solidFill>
+            </a:ln>
+          </p:spPr>
+          <p:style>
+            <a:lnRef idx="2">
+              <a:schemeClr val="dk1">
+                <a:shade val="50000"/>
+              </a:schemeClr>
+            </a:lnRef>
+            <a:fillRef idx="1">
+              <a:schemeClr val="dk1"/>
+            </a:fillRef>
+            <a:effectRef idx="0">
+              <a:schemeClr val="dk1"/>
+            </a:effectRef>
+            <a:fontRef idx="minor">
+              <a:schemeClr val="lt1"/>
+            </a:fontRef>
+          </p:style>
+          <p:txBody>
+            <a:bodyPr rtlCol="0" anchor="ctr"/>
+            <a:lstStyle/>
+            <a:p>
+              <a:pPr algn="ctr"/>
+              <a:endParaRPr lang="zh-TW" altLang="en-US" sz="1625">
+                <a:solidFill>
+                  <a:schemeClr val="bg1"/>
+                </a:solidFill>
+                <a:latin typeface="Times New Roman" panose="02020603050405020304" pitchFamily="18" charset="0"/>
+                <a:cs typeface="Times New Roman" panose="02020603050405020304" pitchFamily="18" charset="0"/>
+              </a:endParaRPr>
+            </a:p>
+          </p:txBody>
+        </p:sp>
+        <p:sp>
+          <p:nvSpPr>
+            <p:cNvPr id="22" name="箭號: 向右 21">
+              <a:extLst>
+                <a:ext uri="{FF2B5EF4-FFF2-40B4-BE49-F238E27FC236}">
+                  <a16:creationId xmlns:a16="http://schemas.microsoft.com/office/drawing/2014/main" id="{315B47D2-4A07-49A6-B0C3-0A542558BA2C}"/>
+                </a:ext>
+              </a:extLst>
+            </p:cNvPr>
+            <p:cNvSpPr/>
+            <p:nvPr/>
+          </p:nvSpPr>
+          <p:spPr>
+            <a:xfrm rot="16200000">
+              <a:off x="1970875" y="4424358"/>
+              <a:ext cx="91764" cy="27808"/>
+            </a:xfrm>
+            <a:prstGeom prst="rightArrow">
+              <a:avLst>
+                <a:gd name="adj1" fmla="val 50000"/>
+                <a:gd name="adj2" fmla="val 99023"/>
+              </a:avLst>
+            </a:prstGeom>
+            <a:solidFill>
+              <a:schemeClr val="bg1"/>
+            </a:solidFill>
+            <a:ln>
+              <a:solidFill>
+                <a:schemeClr val="bg1"/>
+              </a:solidFill>
+            </a:ln>
+          </p:spPr>
+          <p:style>
+            <a:lnRef idx="2">
+              <a:schemeClr val="dk1">
+                <a:shade val="50000"/>
+              </a:schemeClr>
+            </a:lnRef>
+            <a:fillRef idx="1">
+              <a:schemeClr val="dk1"/>
+            </a:fillRef>
+            <a:effectRef idx="0">
+              <a:schemeClr val="dk1"/>
+            </a:effectRef>
+            <a:fontRef idx="minor">
+              <a:schemeClr val="lt1"/>
+            </a:fontRef>
+          </p:style>
+          <p:txBody>
+            <a:bodyPr rtlCol="0" anchor="ctr"/>
+            <a:lstStyle/>
+            <a:p>
+              <a:pPr algn="ctr"/>
+              <a:endParaRPr lang="zh-TW" altLang="en-US" sz="1625" dirty="0">
+                <a:solidFill>
+                  <a:schemeClr val="bg1"/>
+                </a:solidFill>
+                <a:latin typeface="Times New Roman" panose="02020603050405020304" pitchFamily="18" charset="0"/>
+                <a:cs typeface="Times New Roman" panose="02020603050405020304" pitchFamily="18" charset="0"/>
+              </a:endParaRPr>
+            </a:p>
+          </p:txBody>
+        </p:sp>
+        <mc:AlternateContent xmlns:mc="http://schemas.openxmlformats.org/markup-compatibility/2006">
+          <mc:Choice xmlns:a14="http://schemas.microsoft.com/office/drawing/2010/main" Requires="a14">
+            <p:sp>
+              <p:nvSpPr>
+                <p:cNvPr id="23" name="文字方塊 22">
+                  <a:extLst>
+                    <a:ext uri="{FF2B5EF4-FFF2-40B4-BE49-F238E27FC236}">
+                      <a16:creationId xmlns:a16="http://schemas.microsoft.com/office/drawing/2014/main" id="{ABBE3E62-F47A-4075-BF98-571DCD9F3C3D}"/>
+                    </a:ext>
+                  </a:extLst>
+                </p:cNvPr>
+                <p:cNvSpPr txBox="1"/>
+                <p:nvPr/>
+              </p:nvSpPr>
+              <p:spPr>
+                <a:xfrm>
+                  <a:off x="1891549" y="4091315"/>
+                  <a:ext cx="323386" cy="362150"/>
+                </a:xfrm>
+                <a:prstGeom prst="rect">
+                  <a:avLst/>
+                </a:prstGeom>
+                <a:noFill/>
+              </p:spPr>
+              <p:txBody>
+                <a:bodyPr wrap="square" rtlCol="0">
+                  <a:spAutoFit/>
+                </a:bodyPr>
+                <a:lstStyle/>
+                <a:p>
+                  <a:pPr/>
+                  <a14:m>
+                    <m:oMathPara xmlns:m="http://schemas.openxmlformats.org/officeDocument/2006/math">
+                      <m:oMathParaPr>
+                        <m:jc m:val="centerGroup"/>
+                      </m:oMathParaPr>
+                      <m:oMath xmlns:m="http://schemas.openxmlformats.org/officeDocument/2006/math">
+                        <m:sSub>
+                          <m:sSubPr>
+                            <m:ctrlPr>
+                              <a:rPr lang="en-US" altLang="zh-TW" sz="1625" i="1">
+                                <a:solidFill>
+                                  <a:schemeClr val="bg1"/>
+                                </a:solidFill>
+                                <a:latin typeface="Cambria Math" panose="02040503050406030204" pitchFamily="18" charset="0"/>
+                              </a:rPr>
+                            </m:ctrlPr>
+                          </m:sSubPr>
+                          <m:e>
+                            <m:acc>
+                              <m:accPr>
+                                <m:chr m:val="̂"/>
+                                <m:ctrlPr>
+                                  <a:rPr lang="zh-TW" altLang="en-US" sz="1625" i="1">
+                                    <a:solidFill>
+                                      <a:schemeClr val="bg1"/>
+                                    </a:solidFill>
+                                    <a:latin typeface="Cambria Math" panose="02040503050406030204" pitchFamily="18" charset="0"/>
+                                  </a:rPr>
+                                </m:ctrlPr>
+                              </m:accPr>
+                              <m:e>
+                                <m:r>
+                                  <a:rPr lang="en-US" altLang="zh-TW" sz="1625" i="1">
+                                    <a:solidFill>
+                                      <a:schemeClr val="bg1"/>
+                                    </a:solidFill>
+                                    <a:latin typeface="Cambria Math" panose="02040503050406030204" pitchFamily="18" charset="0"/>
+                                  </a:rPr>
+                                  <m:t>𝑞</m:t>
+                                </m:r>
+                              </m:e>
+                            </m:acc>
+                          </m:e>
+                          <m:sub>
+                            <m:r>
+                              <a:rPr lang="en-US" altLang="zh-TW" sz="1625" i="1">
+                                <a:solidFill>
+                                  <a:schemeClr val="bg1"/>
+                                </a:solidFill>
+                                <a:latin typeface="Cambria Math" panose="02040503050406030204" pitchFamily="18" charset="0"/>
+                              </a:rPr>
+                              <m:t>𝑦</m:t>
+                            </m:r>
+                          </m:sub>
+                        </m:sSub>
+                      </m:oMath>
+                    </m:oMathPara>
+                  </a14:m>
+                  <a:endParaRPr lang="en-US" altLang="zh-TW" sz="1625" dirty="0">
+                    <a:solidFill>
+                      <a:schemeClr val="bg1"/>
+                    </a:solidFill>
+                    <a:latin typeface="Times New Roman" panose="02020603050405020304" pitchFamily="18" charset="0"/>
+                    <a:cs typeface="Times New Roman" panose="02020603050405020304" pitchFamily="18" charset="0"/>
+                  </a:endParaRPr>
+                </a:p>
+              </p:txBody>
+            </p:sp>
+          </mc:Choice>
+          <mc:Fallback>
+            <p:sp>
+              <p:nvSpPr>
+                <p:cNvPr id="23" name="文字方塊 22">
+                  <a:extLst>
+                    <a:ext uri="{FF2B5EF4-FFF2-40B4-BE49-F238E27FC236}">
+                      <a16:creationId xmlns:a16="http://schemas.microsoft.com/office/drawing/2014/main" id="{ABBE3E62-F47A-4075-BF98-571DCD9F3C3D}"/>
+                    </a:ext>
+                  </a:extLst>
+                </p:cNvPr>
+                <p:cNvSpPr txBox="1">
+                  <a:spLocks noRot="1" noChangeAspect="1" noMove="1" noResize="1" noEditPoints="1" noAdjustHandles="1" noChangeArrowheads="1" noChangeShapeType="1" noTextEdit="1"/>
+                </p:cNvSpPr>
+                <p:nvPr/>
+              </p:nvSpPr>
+              <p:spPr>
+                <a:xfrm>
+                  <a:off x="1891549" y="4091315"/>
+                  <a:ext cx="323386" cy="362150"/>
+                </a:xfrm>
+                <a:prstGeom prst="rect">
+                  <a:avLst/>
+                </a:prstGeom>
+                <a:blipFill>
+                  <a:blip r:embed="rId16"/>
+                  <a:stretch>
+                    <a:fillRect r="-7547" b="-1695"/>
+                  </a:stretch>
+                </a:blipFill>
+              </p:spPr>
+              <p:txBody>
+                <a:bodyPr/>
+                <a:lstStyle/>
+                <a:p>
+                  <a:r>
+                    <a:rPr lang="zh-TW" altLang="en-US">
+                      <a:noFill/>
+                    </a:rPr>
+                    <a:t> </a:t>
+                  </a:r>
+                </a:p>
+              </p:txBody>
+            </p:sp>
+          </mc:Fallback>
+        </mc:AlternateContent>
+        <mc:AlternateContent xmlns:mc="http://schemas.openxmlformats.org/markup-compatibility/2006">
+          <mc:Choice xmlns:a14="http://schemas.microsoft.com/office/drawing/2010/main" Requires="a14">
+            <p:sp>
+              <p:nvSpPr>
+                <p:cNvPr id="24" name="文字方塊 23">
+                  <a:extLst>
+                    <a:ext uri="{FF2B5EF4-FFF2-40B4-BE49-F238E27FC236}">
+                      <a16:creationId xmlns:a16="http://schemas.microsoft.com/office/drawing/2014/main" id="{D7364931-5D09-451B-90E1-D402ABA92EAE}"/>
+                    </a:ext>
+                  </a:extLst>
+                </p:cNvPr>
+                <p:cNvSpPr txBox="1"/>
+                <p:nvPr/>
+              </p:nvSpPr>
+              <p:spPr>
+                <a:xfrm>
+                  <a:off x="2053689" y="4302656"/>
+                  <a:ext cx="406919" cy="342401"/>
+                </a:xfrm>
+                <a:prstGeom prst="rect">
+                  <a:avLst/>
+                </a:prstGeom>
+                <a:noFill/>
+              </p:spPr>
+              <p:txBody>
+                <a:bodyPr wrap="square" rtlCol="0">
+                  <a:spAutoFit/>
+                </a:bodyPr>
+                <a:lstStyle/>
+                <a:p>
+                  <a:pPr/>
+                  <a14:m>
+                    <m:oMathPara xmlns:m="http://schemas.openxmlformats.org/officeDocument/2006/math">
+                      <m:oMathParaPr>
+                        <m:jc m:val="centerGroup"/>
+                      </m:oMathParaPr>
+                      <m:oMath xmlns:m="http://schemas.openxmlformats.org/officeDocument/2006/math">
+                        <m:sSub>
+                          <m:sSubPr>
+                            <m:ctrlPr>
+                              <a:rPr lang="en-US" altLang="zh-TW" sz="1625" i="1">
+                                <a:solidFill>
+                                  <a:schemeClr val="bg1"/>
+                                </a:solidFill>
+                                <a:latin typeface="Cambria Math" panose="02040503050406030204" pitchFamily="18" charset="0"/>
+                              </a:rPr>
+                            </m:ctrlPr>
+                          </m:sSubPr>
+                          <m:e>
+                            <m:acc>
+                              <m:accPr>
+                                <m:chr m:val="̂"/>
+                                <m:ctrlPr>
+                                  <a:rPr lang="zh-TW" altLang="en-US" sz="1625" i="1">
+                                    <a:solidFill>
+                                      <a:schemeClr val="bg1"/>
+                                    </a:solidFill>
+                                    <a:latin typeface="Cambria Math" panose="02040503050406030204" pitchFamily="18" charset="0"/>
+                                  </a:rPr>
+                                </m:ctrlPr>
+                              </m:accPr>
+                              <m:e>
+                                <m:r>
+                                  <a:rPr lang="en-US" altLang="zh-TW" sz="1625" i="1">
+                                    <a:solidFill>
+                                      <a:schemeClr val="bg1"/>
+                                    </a:solidFill>
+                                    <a:latin typeface="Cambria Math" panose="02040503050406030204" pitchFamily="18" charset="0"/>
+                                  </a:rPr>
+                                  <m:t>𝑞</m:t>
+                                </m:r>
+                              </m:e>
+                            </m:acc>
+                          </m:e>
+                          <m:sub>
+                            <m:r>
+                              <a:rPr lang="en-US" altLang="zh-TW" sz="1625" i="1">
+                                <a:solidFill>
+                                  <a:schemeClr val="bg1"/>
+                                </a:solidFill>
+                                <a:latin typeface="Cambria Math" panose="02040503050406030204" pitchFamily="18" charset="0"/>
+                              </a:rPr>
+                              <m:t>𝑥</m:t>
+                            </m:r>
+                          </m:sub>
+                        </m:sSub>
+                      </m:oMath>
+                    </m:oMathPara>
+                  </a14:m>
+                  <a:endParaRPr lang="en-US" altLang="zh-TW" sz="1625" dirty="0">
+                    <a:solidFill>
+                      <a:schemeClr val="bg1"/>
+                    </a:solidFill>
+                    <a:latin typeface="Times New Roman" panose="02020603050405020304" pitchFamily="18" charset="0"/>
+                    <a:cs typeface="Times New Roman" panose="02020603050405020304" pitchFamily="18" charset="0"/>
+                  </a:endParaRPr>
+                </a:p>
+              </p:txBody>
+            </p:sp>
+          </mc:Choice>
+          <mc:Fallback>
+            <p:sp>
+              <p:nvSpPr>
+                <p:cNvPr id="24" name="文字方塊 23">
+                  <a:extLst>
+                    <a:ext uri="{FF2B5EF4-FFF2-40B4-BE49-F238E27FC236}">
+                      <a16:creationId xmlns:a16="http://schemas.microsoft.com/office/drawing/2014/main" id="{D7364931-5D09-451B-90E1-D402ABA92EAE}"/>
+                    </a:ext>
+                  </a:extLst>
+                </p:cNvPr>
+                <p:cNvSpPr txBox="1">
+                  <a:spLocks noRot="1" noChangeAspect="1" noMove="1" noResize="1" noEditPoints="1" noAdjustHandles="1" noChangeArrowheads="1" noChangeShapeType="1" noTextEdit="1"/>
+                </p:cNvSpPr>
+                <p:nvPr/>
+              </p:nvSpPr>
+              <p:spPr>
+                <a:xfrm>
+                  <a:off x="2053689" y="4302656"/>
+                  <a:ext cx="406919" cy="342401"/>
+                </a:xfrm>
+                <a:prstGeom prst="rect">
+                  <a:avLst/>
+                </a:prstGeom>
+                <a:blipFill>
+                  <a:blip r:embed="rId17"/>
+                  <a:stretch>
+                    <a:fillRect r="-2985" b="-5263"/>
+                  </a:stretch>
+                </a:blipFill>
+              </p:spPr>
+              <p:txBody>
+                <a:bodyPr/>
+                <a:lstStyle/>
+                <a:p>
+                  <a:r>
+                    <a:rPr lang="zh-TW" altLang="en-US">
+                      <a:noFill/>
+                    </a:rPr>
+                    <a:t> </a:t>
+                  </a:r>
+                </a:p>
+              </p:txBody>
+            </p:sp>
+          </mc:Fallback>
+        </mc:AlternateContent>
       </p:grpSp>
     </p:spTree>
     <p:extLst>

--- a/Final/Figures/phasefig.pptx
+++ b/Final/Figures/phasefig.pptx
@@ -2,12 +2,12 @@
 <file path=ppt/presentation.xml><?xml version="1.0" encoding="utf-8"?>
 <p:presentation xmlns:a="http://schemas.openxmlformats.org/drawingml/2006/main" xmlns:r="http://schemas.openxmlformats.org/officeDocument/2006/relationships" xmlns:p="http://schemas.openxmlformats.org/presentationml/2006/main" saveSubsetFonts="1">
   <p:sldMasterIdLst>
-    <p:sldMasterId id="2147483768" r:id="rId1"/>
+    <p:sldMasterId id="2147483816" r:id="rId1"/>
   </p:sldMasterIdLst>
   <p:sldIdLst>
     <p:sldId id="256" r:id="rId2"/>
   </p:sldIdLst>
-  <p:sldSz cx="9906000" cy="3779838"/>
+  <p:sldSz cx="9906000" cy="4500563"/>
   <p:notesSz cx="6858000" cy="9144000"/>
   <p:defaultTextStyle>
     <a:defPPr>
@@ -141,15 +141,15 @@
         </p:nvSpPr>
         <p:spPr>
           <a:xfrm>
-            <a:off x="1238250" y="618599"/>
-            <a:ext cx="7429500" cy="1315944"/>
+            <a:off x="1238250" y="736551"/>
+            <a:ext cx="7429500" cy="1566863"/>
           </a:xfrm>
         </p:spPr>
         <p:txBody>
           <a:bodyPr anchor="b"/>
           <a:lstStyle>
             <a:lvl1pPr algn="ctr">
-              <a:defRPr sz="3307"/>
+              <a:defRPr sz="3938"/>
             </a:lvl1pPr>
           </a:lstStyle>
           <a:p>
@@ -173,8 +173,8 @@
         </p:nvSpPr>
         <p:spPr>
           <a:xfrm>
-            <a:off x="1238250" y="1985290"/>
-            <a:ext cx="7429500" cy="912586"/>
+            <a:off x="1238250" y="2363838"/>
+            <a:ext cx="7429500" cy="1086594"/>
           </a:xfrm>
         </p:spPr>
         <p:txBody>
@@ -182,39 +182,39 @@
           <a:lstStyle>
             <a:lvl1pPr marL="0" indent="0" algn="ctr">
               <a:buNone/>
-              <a:defRPr sz="1323"/>
+              <a:defRPr sz="1575"/>
             </a:lvl1pPr>
-            <a:lvl2pPr marL="252009" indent="0" algn="ctr">
-              <a:buNone/>
-              <a:defRPr sz="1102"/>
+            <a:lvl2pPr marL="300060" indent="0" algn="ctr">
+              <a:buNone/>
+              <a:defRPr sz="1313"/>
             </a:lvl2pPr>
-            <a:lvl3pPr marL="504017" indent="0" algn="ctr">
-              <a:buNone/>
-              <a:defRPr sz="992"/>
+            <a:lvl3pPr marL="600121" indent="0" algn="ctr">
+              <a:buNone/>
+              <a:defRPr sz="1181"/>
             </a:lvl3pPr>
-            <a:lvl4pPr marL="756026" indent="0" algn="ctr">
-              <a:buNone/>
-              <a:defRPr sz="882"/>
+            <a:lvl4pPr marL="900181" indent="0" algn="ctr">
+              <a:buNone/>
+              <a:defRPr sz="1050"/>
             </a:lvl4pPr>
-            <a:lvl5pPr marL="1008035" indent="0" algn="ctr">
-              <a:buNone/>
-              <a:defRPr sz="882"/>
+            <a:lvl5pPr marL="1200241" indent="0" algn="ctr">
+              <a:buNone/>
+              <a:defRPr sz="1050"/>
             </a:lvl5pPr>
-            <a:lvl6pPr marL="1260043" indent="0" algn="ctr">
-              <a:buNone/>
-              <a:defRPr sz="882"/>
+            <a:lvl6pPr marL="1500302" indent="0" algn="ctr">
+              <a:buNone/>
+              <a:defRPr sz="1050"/>
             </a:lvl6pPr>
-            <a:lvl7pPr marL="1512052" indent="0" algn="ctr">
-              <a:buNone/>
-              <a:defRPr sz="882"/>
+            <a:lvl7pPr marL="1800362" indent="0" algn="ctr">
+              <a:buNone/>
+              <a:defRPr sz="1050"/>
             </a:lvl7pPr>
-            <a:lvl8pPr marL="1764060" indent="0" algn="ctr">
-              <a:buNone/>
-              <a:defRPr sz="882"/>
+            <a:lvl8pPr marL="2100423" indent="0" algn="ctr">
+              <a:buNone/>
+              <a:defRPr sz="1050"/>
             </a:lvl8pPr>
-            <a:lvl9pPr marL="2016069" indent="0" algn="ctr">
-              <a:buNone/>
-              <a:defRPr sz="882"/>
+            <a:lvl9pPr marL="2400483" indent="0" algn="ctr">
+              <a:buNone/>
+              <a:defRPr sz="1050"/>
             </a:lvl9pPr>
           </a:lstStyle>
           <a:p>
@@ -243,7 +243,7 @@
           <a:p>
             <a:fld id="{CC6FB895-B65F-4EA9-9907-69D32227E72B}" type="datetimeFigureOut">
               <a:rPr lang="zh-TW" altLang="en-US" smtClean="0"/>
-              <a:t>2026/5/20</a:t>
+              <a:t>2026/6/17</a:t>
             </a:fld>
             <a:endParaRPr lang="zh-TW" altLang="en-US"/>
           </a:p>
@@ -294,7 +294,7 @@
     </p:spTree>
     <p:extLst>
       <p:ext uri="{BB962C8B-B14F-4D97-AF65-F5344CB8AC3E}">
-        <p14:creationId xmlns:p14="http://schemas.microsoft.com/office/powerpoint/2010/main" val="2807578800"/>
+        <p14:creationId xmlns:p14="http://schemas.microsoft.com/office/powerpoint/2010/main" val="1574417817"/>
       </p:ext>
     </p:extLst>
   </p:cSld>
@@ -413,7 +413,7 @@
           <a:p>
             <a:fld id="{CC6FB895-B65F-4EA9-9907-69D32227E72B}" type="datetimeFigureOut">
               <a:rPr lang="zh-TW" altLang="en-US" smtClean="0"/>
-              <a:t>2026/5/20</a:t>
+              <a:t>2026/6/17</a:t>
             </a:fld>
             <a:endParaRPr lang="zh-TW" altLang="en-US"/>
           </a:p>
@@ -464,7 +464,7 @@
     </p:spTree>
     <p:extLst>
       <p:ext uri="{BB962C8B-B14F-4D97-AF65-F5344CB8AC3E}">
-        <p14:creationId xmlns:p14="http://schemas.microsoft.com/office/powerpoint/2010/main" val="3412359488"/>
+        <p14:creationId xmlns:p14="http://schemas.microsoft.com/office/powerpoint/2010/main" val="3379507219"/>
       </p:ext>
     </p:extLst>
   </p:cSld>
@@ -503,8 +503,8 @@
         </p:nvSpPr>
         <p:spPr>
           <a:xfrm>
-            <a:off x="7088981" y="201241"/>
-            <a:ext cx="2135981" cy="3203238"/>
+            <a:off x="7088981" y="239613"/>
+            <a:ext cx="2135981" cy="3814019"/>
           </a:xfrm>
         </p:spPr>
         <p:txBody>
@@ -531,8 +531,8 @@
         </p:nvSpPr>
         <p:spPr>
           <a:xfrm>
-            <a:off x="681037" y="201241"/>
-            <a:ext cx="6284119" cy="3203238"/>
+            <a:off x="681037" y="239613"/>
+            <a:ext cx="6284119" cy="3814019"/>
           </a:xfrm>
         </p:spPr>
         <p:txBody>
@@ -593,7 +593,7 @@
           <a:p>
             <a:fld id="{CC6FB895-B65F-4EA9-9907-69D32227E72B}" type="datetimeFigureOut">
               <a:rPr lang="zh-TW" altLang="en-US" smtClean="0"/>
-              <a:t>2026/5/20</a:t>
+              <a:t>2026/6/17</a:t>
             </a:fld>
             <a:endParaRPr lang="zh-TW" altLang="en-US"/>
           </a:p>
@@ -644,7 +644,7 @@
     </p:spTree>
     <p:extLst>
       <p:ext uri="{BB962C8B-B14F-4D97-AF65-F5344CB8AC3E}">
-        <p14:creationId xmlns:p14="http://schemas.microsoft.com/office/powerpoint/2010/main" val="2254159551"/>
+        <p14:creationId xmlns:p14="http://schemas.microsoft.com/office/powerpoint/2010/main" val="1154241685"/>
       </p:ext>
     </p:extLst>
   </p:cSld>
@@ -763,7 +763,7 @@
           <a:p>
             <a:fld id="{CC6FB895-B65F-4EA9-9907-69D32227E72B}" type="datetimeFigureOut">
               <a:rPr lang="zh-TW" altLang="en-US" smtClean="0"/>
-              <a:t>2026/5/20</a:t>
+              <a:t>2026/6/17</a:t>
             </a:fld>
             <a:endParaRPr lang="zh-TW" altLang="en-US"/>
           </a:p>
@@ -814,7 +814,7 @@
     </p:spTree>
     <p:extLst>
       <p:ext uri="{BB962C8B-B14F-4D97-AF65-F5344CB8AC3E}">
-        <p14:creationId xmlns:p14="http://schemas.microsoft.com/office/powerpoint/2010/main" val="962955166"/>
+        <p14:creationId xmlns:p14="http://schemas.microsoft.com/office/powerpoint/2010/main" val="1336712650"/>
       </p:ext>
     </p:extLst>
   </p:cSld>
@@ -853,15 +853,15 @@
         </p:nvSpPr>
         <p:spPr>
           <a:xfrm>
-            <a:off x="675878" y="942335"/>
-            <a:ext cx="8543925" cy="1572307"/>
+            <a:off x="675878" y="1122016"/>
+            <a:ext cx="8543925" cy="1872109"/>
           </a:xfrm>
         </p:spPr>
         <p:txBody>
           <a:bodyPr anchor="b"/>
           <a:lstStyle>
             <a:lvl1pPr>
-              <a:defRPr sz="3307"/>
+              <a:defRPr sz="3938"/>
             </a:lvl1pPr>
           </a:lstStyle>
           <a:p>
@@ -885,8 +885,8 @@
         </p:nvSpPr>
         <p:spPr>
           <a:xfrm>
-            <a:off x="675878" y="2529517"/>
-            <a:ext cx="8543925" cy="826839"/>
+            <a:off x="675878" y="3011836"/>
+            <a:ext cx="8543925" cy="984498"/>
           </a:xfrm>
         </p:spPr>
         <p:txBody>
@@ -894,7 +894,7 @@
           <a:lstStyle>
             <a:lvl1pPr marL="0" indent="0">
               <a:buNone/>
-              <a:defRPr sz="1323">
+              <a:defRPr sz="1575">
                 <a:solidFill>
                   <a:schemeClr val="tx1">
                     <a:tint val="75000"/>
@@ -902,9 +902,9 @@
                 </a:solidFill>
               </a:defRPr>
             </a:lvl1pPr>
-            <a:lvl2pPr marL="252009" indent="0">
-              <a:buNone/>
-              <a:defRPr sz="1102">
+            <a:lvl2pPr marL="300060" indent="0">
+              <a:buNone/>
+              <a:defRPr sz="1313">
                 <a:solidFill>
                   <a:schemeClr val="tx1">
                     <a:tint val="75000"/>
@@ -912,9 +912,9 @@
                 </a:solidFill>
               </a:defRPr>
             </a:lvl2pPr>
-            <a:lvl3pPr marL="504017" indent="0">
-              <a:buNone/>
-              <a:defRPr sz="992">
+            <a:lvl3pPr marL="600121" indent="0">
+              <a:buNone/>
+              <a:defRPr sz="1181">
                 <a:solidFill>
                   <a:schemeClr val="tx1">
                     <a:tint val="75000"/>
@@ -922,9 +922,9 @@
                 </a:solidFill>
               </a:defRPr>
             </a:lvl3pPr>
-            <a:lvl4pPr marL="756026" indent="0">
-              <a:buNone/>
-              <a:defRPr sz="882">
+            <a:lvl4pPr marL="900181" indent="0">
+              <a:buNone/>
+              <a:defRPr sz="1050">
                 <a:solidFill>
                   <a:schemeClr val="tx1">
                     <a:tint val="75000"/>
@@ -932,9 +932,9 @@
                 </a:solidFill>
               </a:defRPr>
             </a:lvl4pPr>
-            <a:lvl5pPr marL="1008035" indent="0">
-              <a:buNone/>
-              <a:defRPr sz="882">
+            <a:lvl5pPr marL="1200241" indent="0">
+              <a:buNone/>
+              <a:defRPr sz="1050">
                 <a:solidFill>
                   <a:schemeClr val="tx1">
                     <a:tint val="75000"/>
@@ -942,9 +942,9 @@
                 </a:solidFill>
               </a:defRPr>
             </a:lvl5pPr>
-            <a:lvl6pPr marL="1260043" indent="0">
-              <a:buNone/>
-              <a:defRPr sz="882">
+            <a:lvl6pPr marL="1500302" indent="0">
+              <a:buNone/>
+              <a:defRPr sz="1050">
                 <a:solidFill>
                   <a:schemeClr val="tx1">
                     <a:tint val="75000"/>
@@ -952,9 +952,9 @@
                 </a:solidFill>
               </a:defRPr>
             </a:lvl6pPr>
-            <a:lvl7pPr marL="1512052" indent="0">
-              <a:buNone/>
-              <a:defRPr sz="882">
+            <a:lvl7pPr marL="1800362" indent="0">
+              <a:buNone/>
+              <a:defRPr sz="1050">
                 <a:solidFill>
                   <a:schemeClr val="tx1">
                     <a:tint val="75000"/>
@@ -962,9 +962,9 @@
                 </a:solidFill>
               </a:defRPr>
             </a:lvl7pPr>
-            <a:lvl8pPr marL="1764060" indent="0">
-              <a:buNone/>
-              <a:defRPr sz="882">
+            <a:lvl8pPr marL="2100423" indent="0">
+              <a:buNone/>
+              <a:defRPr sz="1050">
                 <a:solidFill>
                   <a:schemeClr val="tx1">
                     <a:tint val="75000"/>
@@ -972,9 +972,9 @@
                 </a:solidFill>
               </a:defRPr>
             </a:lvl8pPr>
-            <a:lvl9pPr marL="2016069" indent="0">
-              <a:buNone/>
-              <a:defRPr sz="882">
+            <a:lvl9pPr marL="2400483" indent="0">
+              <a:buNone/>
+              <a:defRPr sz="1050">
                 <a:solidFill>
                   <a:schemeClr val="tx1">
                     <a:tint val="75000"/>
@@ -1009,7 +1009,7 @@
           <a:p>
             <a:fld id="{CC6FB895-B65F-4EA9-9907-69D32227E72B}" type="datetimeFigureOut">
               <a:rPr lang="zh-TW" altLang="en-US" smtClean="0"/>
-              <a:t>2026/5/20</a:t>
+              <a:t>2026/6/17</a:t>
             </a:fld>
             <a:endParaRPr lang="zh-TW" altLang="en-US"/>
           </a:p>
@@ -1060,7 +1060,7 @@
     </p:spTree>
     <p:extLst>
       <p:ext uri="{BB962C8B-B14F-4D97-AF65-F5344CB8AC3E}">
-        <p14:creationId xmlns:p14="http://schemas.microsoft.com/office/powerpoint/2010/main" val="1627930357"/>
+        <p14:creationId xmlns:p14="http://schemas.microsoft.com/office/powerpoint/2010/main" val="916985567"/>
       </p:ext>
     </p:extLst>
   </p:cSld>
@@ -1122,8 +1122,8 @@
         </p:nvSpPr>
         <p:spPr>
           <a:xfrm>
-            <a:off x="681038" y="1006207"/>
-            <a:ext cx="4210050" cy="2398272"/>
+            <a:off x="681038" y="1198066"/>
+            <a:ext cx="4210050" cy="2855566"/>
           </a:xfrm>
         </p:spPr>
         <p:txBody>
@@ -1179,8 +1179,8 @@
         </p:nvSpPr>
         <p:spPr>
           <a:xfrm>
-            <a:off x="5014913" y="1006207"/>
-            <a:ext cx="4210050" cy="2398272"/>
+            <a:off x="5014913" y="1198066"/>
+            <a:ext cx="4210050" cy="2855566"/>
           </a:xfrm>
         </p:spPr>
         <p:txBody>
@@ -1241,7 +1241,7 @@
           <a:p>
             <a:fld id="{CC6FB895-B65F-4EA9-9907-69D32227E72B}" type="datetimeFigureOut">
               <a:rPr lang="zh-TW" altLang="en-US" smtClean="0"/>
-              <a:t>2026/5/20</a:t>
+              <a:t>2026/6/17</a:t>
             </a:fld>
             <a:endParaRPr lang="zh-TW" altLang="en-US"/>
           </a:p>
@@ -1292,7 +1292,7 @@
     </p:spTree>
     <p:extLst>
       <p:ext uri="{BB962C8B-B14F-4D97-AF65-F5344CB8AC3E}">
-        <p14:creationId xmlns:p14="http://schemas.microsoft.com/office/powerpoint/2010/main" val="2263463407"/>
+        <p14:creationId xmlns:p14="http://schemas.microsoft.com/office/powerpoint/2010/main" val="2837181231"/>
       </p:ext>
     </p:extLst>
   </p:cSld>
@@ -1331,8 +1331,8 @@
         </p:nvSpPr>
         <p:spPr>
           <a:xfrm>
-            <a:off x="682328" y="201242"/>
-            <a:ext cx="8543925" cy="730594"/>
+            <a:off x="682328" y="239614"/>
+            <a:ext cx="8543925" cy="869901"/>
           </a:xfrm>
         </p:spPr>
         <p:txBody>
@@ -1359,8 +1359,8 @@
         </p:nvSpPr>
         <p:spPr>
           <a:xfrm>
-            <a:off x="682328" y="926586"/>
-            <a:ext cx="4190702" cy="454105"/>
+            <a:off x="682328" y="1103263"/>
+            <a:ext cx="4190702" cy="540692"/>
           </a:xfrm>
         </p:spPr>
         <p:txBody>
@@ -1368,39 +1368,39 @@
           <a:lstStyle>
             <a:lvl1pPr marL="0" indent="0">
               <a:buNone/>
-              <a:defRPr sz="1323" b="1"/>
+              <a:defRPr sz="1575" b="1"/>
             </a:lvl1pPr>
-            <a:lvl2pPr marL="252009" indent="0">
-              <a:buNone/>
-              <a:defRPr sz="1102" b="1"/>
+            <a:lvl2pPr marL="300060" indent="0">
+              <a:buNone/>
+              <a:defRPr sz="1313" b="1"/>
             </a:lvl2pPr>
-            <a:lvl3pPr marL="504017" indent="0">
-              <a:buNone/>
-              <a:defRPr sz="992" b="1"/>
+            <a:lvl3pPr marL="600121" indent="0">
+              <a:buNone/>
+              <a:defRPr sz="1181" b="1"/>
             </a:lvl3pPr>
-            <a:lvl4pPr marL="756026" indent="0">
-              <a:buNone/>
-              <a:defRPr sz="882" b="1"/>
+            <a:lvl4pPr marL="900181" indent="0">
+              <a:buNone/>
+              <a:defRPr sz="1050" b="1"/>
             </a:lvl4pPr>
-            <a:lvl5pPr marL="1008035" indent="0">
-              <a:buNone/>
-              <a:defRPr sz="882" b="1"/>
+            <a:lvl5pPr marL="1200241" indent="0">
+              <a:buNone/>
+              <a:defRPr sz="1050" b="1"/>
             </a:lvl5pPr>
-            <a:lvl6pPr marL="1260043" indent="0">
-              <a:buNone/>
-              <a:defRPr sz="882" b="1"/>
+            <a:lvl6pPr marL="1500302" indent="0">
+              <a:buNone/>
+              <a:defRPr sz="1050" b="1"/>
             </a:lvl6pPr>
-            <a:lvl7pPr marL="1512052" indent="0">
-              <a:buNone/>
-              <a:defRPr sz="882" b="1"/>
+            <a:lvl7pPr marL="1800362" indent="0">
+              <a:buNone/>
+              <a:defRPr sz="1050" b="1"/>
             </a:lvl7pPr>
-            <a:lvl8pPr marL="1764060" indent="0">
-              <a:buNone/>
-              <a:defRPr sz="882" b="1"/>
+            <a:lvl8pPr marL="2100423" indent="0">
+              <a:buNone/>
+              <a:defRPr sz="1050" b="1"/>
             </a:lvl8pPr>
-            <a:lvl9pPr marL="2016069" indent="0">
-              <a:buNone/>
-              <a:defRPr sz="882" b="1"/>
+            <a:lvl9pPr marL="2400483" indent="0">
+              <a:buNone/>
+              <a:defRPr sz="1050" b="1"/>
             </a:lvl9pPr>
           </a:lstStyle>
           <a:p>
@@ -1424,8 +1424,8 @@
         </p:nvSpPr>
         <p:spPr>
           <a:xfrm>
-            <a:off x="682328" y="1380691"/>
-            <a:ext cx="4190702" cy="2030788"/>
+            <a:off x="682328" y="1643956"/>
+            <a:ext cx="4190702" cy="2418011"/>
           </a:xfrm>
         </p:spPr>
         <p:txBody>
@@ -1481,8 +1481,8 @@
         </p:nvSpPr>
         <p:spPr>
           <a:xfrm>
-            <a:off x="5014913" y="926586"/>
-            <a:ext cx="4211340" cy="454105"/>
+            <a:off x="5014913" y="1103263"/>
+            <a:ext cx="4211340" cy="540692"/>
           </a:xfrm>
         </p:spPr>
         <p:txBody>
@@ -1490,39 +1490,39 @@
           <a:lstStyle>
             <a:lvl1pPr marL="0" indent="0">
               <a:buNone/>
-              <a:defRPr sz="1323" b="1"/>
+              <a:defRPr sz="1575" b="1"/>
             </a:lvl1pPr>
-            <a:lvl2pPr marL="252009" indent="0">
-              <a:buNone/>
-              <a:defRPr sz="1102" b="1"/>
+            <a:lvl2pPr marL="300060" indent="0">
+              <a:buNone/>
+              <a:defRPr sz="1313" b="1"/>
             </a:lvl2pPr>
-            <a:lvl3pPr marL="504017" indent="0">
-              <a:buNone/>
-              <a:defRPr sz="992" b="1"/>
+            <a:lvl3pPr marL="600121" indent="0">
+              <a:buNone/>
+              <a:defRPr sz="1181" b="1"/>
             </a:lvl3pPr>
-            <a:lvl4pPr marL="756026" indent="0">
-              <a:buNone/>
-              <a:defRPr sz="882" b="1"/>
+            <a:lvl4pPr marL="900181" indent="0">
+              <a:buNone/>
+              <a:defRPr sz="1050" b="1"/>
             </a:lvl4pPr>
-            <a:lvl5pPr marL="1008035" indent="0">
-              <a:buNone/>
-              <a:defRPr sz="882" b="1"/>
+            <a:lvl5pPr marL="1200241" indent="0">
+              <a:buNone/>
+              <a:defRPr sz="1050" b="1"/>
             </a:lvl5pPr>
-            <a:lvl6pPr marL="1260043" indent="0">
-              <a:buNone/>
-              <a:defRPr sz="882" b="1"/>
+            <a:lvl6pPr marL="1500302" indent="0">
+              <a:buNone/>
+              <a:defRPr sz="1050" b="1"/>
             </a:lvl6pPr>
-            <a:lvl7pPr marL="1512052" indent="0">
-              <a:buNone/>
-              <a:defRPr sz="882" b="1"/>
+            <a:lvl7pPr marL="1800362" indent="0">
+              <a:buNone/>
+              <a:defRPr sz="1050" b="1"/>
             </a:lvl7pPr>
-            <a:lvl8pPr marL="1764060" indent="0">
-              <a:buNone/>
-              <a:defRPr sz="882" b="1"/>
+            <a:lvl8pPr marL="2100423" indent="0">
+              <a:buNone/>
+              <a:defRPr sz="1050" b="1"/>
             </a:lvl8pPr>
-            <a:lvl9pPr marL="2016069" indent="0">
-              <a:buNone/>
-              <a:defRPr sz="882" b="1"/>
+            <a:lvl9pPr marL="2400483" indent="0">
+              <a:buNone/>
+              <a:defRPr sz="1050" b="1"/>
             </a:lvl9pPr>
           </a:lstStyle>
           <a:p>
@@ -1546,8 +1546,8 @@
         </p:nvSpPr>
         <p:spPr>
           <a:xfrm>
-            <a:off x="5014913" y="1380691"/>
-            <a:ext cx="4211340" cy="2030788"/>
+            <a:off x="5014913" y="1643956"/>
+            <a:ext cx="4211340" cy="2418011"/>
           </a:xfrm>
         </p:spPr>
         <p:txBody>
@@ -1608,7 +1608,7 @@
           <a:p>
             <a:fld id="{CC6FB895-B65F-4EA9-9907-69D32227E72B}" type="datetimeFigureOut">
               <a:rPr lang="zh-TW" altLang="en-US" smtClean="0"/>
-              <a:t>2026/5/20</a:t>
+              <a:t>2026/6/17</a:t>
             </a:fld>
             <a:endParaRPr lang="zh-TW" altLang="en-US"/>
           </a:p>
@@ -1659,7 +1659,7 @@
     </p:spTree>
     <p:extLst>
       <p:ext uri="{BB962C8B-B14F-4D97-AF65-F5344CB8AC3E}">
-        <p14:creationId xmlns:p14="http://schemas.microsoft.com/office/powerpoint/2010/main" val="2603977110"/>
+        <p14:creationId xmlns:p14="http://schemas.microsoft.com/office/powerpoint/2010/main" val="362628614"/>
       </p:ext>
     </p:extLst>
   </p:cSld>
@@ -1726,7 +1726,7 @@
           <a:p>
             <a:fld id="{CC6FB895-B65F-4EA9-9907-69D32227E72B}" type="datetimeFigureOut">
               <a:rPr lang="zh-TW" altLang="en-US" smtClean="0"/>
-              <a:t>2026/5/20</a:t>
+              <a:t>2026/6/17</a:t>
             </a:fld>
             <a:endParaRPr lang="zh-TW" altLang="en-US"/>
           </a:p>
@@ -1777,7 +1777,7 @@
     </p:spTree>
     <p:extLst>
       <p:ext uri="{BB962C8B-B14F-4D97-AF65-F5344CB8AC3E}">
-        <p14:creationId xmlns:p14="http://schemas.microsoft.com/office/powerpoint/2010/main" val="3073389496"/>
+        <p14:creationId xmlns:p14="http://schemas.microsoft.com/office/powerpoint/2010/main" val="3603865229"/>
       </p:ext>
     </p:extLst>
   </p:cSld>
@@ -1821,7 +1821,7 @@
           <a:p>
             <a:fld id="{CC6FB895-B65F-4EA9-9907-69D32227E72B}" type="datetimeFigureOut">
               <a:rPr lang="zh-TW" altLang="en-US" smtClean="0"/>
-              <a:t>2026/5/20</a:t>
+              <a:t>2026/6/17</a:t>
             </a:fld>
             <a:endParaRPr lang="zh-TW" altLang="en-US"/>
           </a:p>
@@ -1872,7 +1872,7 @@
     </p:spTree>
     <p:extLst>
       <p:ext uri="{BB962C8B-B14F-4D97-AF65-F5344CB8AC3E}">
-        <p14:creationId xmlns:p14="http://schemas.microsoft.com/office/powerpoint/2010/main" val="2081778266"/>
+        <p14:creationId xmlns:p14="http://schemas.microsoft.com/office/powerpoint/2010/main" val="3233648491"/>
       </p:ext>
     </p:extLst>
   </p:cSld>
@@ -1911,15 +1911,15 @@
         </p:nvSpPr>
         <p:spPr>
           <a:xfrm>
-            <a:off x="682328" y="251989"/>
-            <a:ext cx="3194943" cy="881962"/>
+            <a:off x="682328" y="300038"/>
+            <a:ext cx="3194943" cy="1050131"/>
           </a:xfrm>
         </p:spPr>
         <p:txBody>
           <a:bodyPr anchor="b"/>
           <a:lstStyle>
             <a:lvl1pPr>
-              <a:defRPr sz="1764"/>
+              <a:defRPr sz="2100"/>
             </a:lvl1pPr>
           </a:lstStyle>
           <a:p>
@@ -1943,39 +1943,39 @@
         </p:nvSpPr>
         <p:spPr>
           <a:xfrm>
-            <a:off x="4211340" y="544227"/>
-            <a:ext cx="5014913" cy="2686135"/>
+            <a:off x="4211340" y="647998"/>
+            <a:ext cx="5014913" cy="3198317"/>
           </a:xfrm>
         </p:spPr>
         <p:txBody>
           <a:bodyPr/>
           <a:lstStyle>
             <a:lvl1pPr>
-              <a:defRPr sz="1764"/>
+              <a:defRPr sz="2100"/>
             </a:lvl1pPr>
             <a:lvl2pPr>
-              <a:defRPr sz="1543"/>
+              <a:defRPr sz="1838"/>
             </a:lvl2pPr>
             <a:lvl3pPr>
-              <a:defRPr sz="1323"/>
+              <a:defRPr sz="1575"/>
             </a:lvl3pPr>
             <a:lvl4pPr>
-              <a:defRPr sz="1102"/>
+              <a:defRPr sz="1313"/>
             </a:lvl4pPr>
             <a:lvl5pPr>
-              <a:defRPr sz="1102"/>
+              <a:defRPr sz="1313"/>
             </a:lvl5pPr>
             <a:lvl6pPr>
-              <a:defRPr sz="1102"/>
+              <a:defRPr sz="1313"/>
             </a:lvl6pPr>
             <a:lvl7pPr>
-              <a:defRPr sz="1102"/>
+              <a:defRPr sz="1313"/>
             </a:lvl7pPr>
             <a:lvl8pPr>
-              <a:defRPr sz="1102"/>
+              <a:defRPr sz="1313"/>
             </a:lvl8pPr>
             <a:lvl9pPr>
-              <a:defRPr sz="1102"/>
+              <a:defRPr sz="1313"/>
             </a:lvl9pPr>
           </a:lstStyle>
           <a:p>
@@ -2028,8 +2028,8 @@
         </p:nvSpPr>
         <p:spPr>
           <a:xfrm>
-            <a:off x="682328" y="1133952"/>
-            <a:ext cx="3194943" cy="2100785"/>
+            <a:off x="682328" y="1350169"/>
+            <a:ext cx="3194943" cy="2501355"/>
           </a:xfrm>
         </p:spPr>
         <p:txBody>
@@ -2037,39 +2037,39 @@
           <a:lstStyle>
             <a:lvl1pPr marL="0" indent="0">
               <a:buNone/>
-              <a:defRPr sz="882"/>
+              <a:defRPr sz="1050"/>
             </a:lvl1pPr>
-            <a:lvl2pPr marL="252009" indent="0">
-              <a:buNone/>
-              <a:defRPr sz="772"/>
+            <a:lvl2pPr marL="300060" indent="0">
+              <a:buNone/>
+              <a:defRPr sz="919"/>
             </a:lvl2pPr>
-            <a:lvl3pPr marL="504017" indent="0">
-              <a:buNone/>
-              <a:defRPr sz="661"/>
+            <a:lvl3pPr marL="600121" indent="0">
+              <a:buNone/>
+              <a:defRPr sz="788"/>
             </a:lvl3pPr>
-            <a:lvl4pPr marL="756026" indent="0">
-              <a:buNone/>
-              <a:defRPr sz="551"/>
+            <a:lvl4pPr marL="900181" indent="0">
+              <a:buNone/>
+              <a:defRPr sz="656"/>
             </a:lvl4pPr>
-            <a:lvl5pPr marL="1008035" indent="0">
-              <a:buNone/>
-              <a:defRPr sz="551"/>
+            <a:lvl5pPr marL="1200241" indent="0">
+              <a:buNone/>
+              <a:defRPr sz="656"/>
             </a:lvl5pPr>
-            <a:lvl6pPr marL="1260043" indent="0">
-              <a:buNone/>
-              <a:defRPr sz="551"/>
+            <a:lvl6pPr marL="1500302" indent="0">
+              <a:buNone/>
+              <a:defRPr sz="656"/>
             </a:lvl6pPr>
-            <a:lvl7pPr marL="1512052" indent="0">
-              <a:buNone/>
-              <a:defRPr sz="551"/>
+            <a:lvl7pPr marL="1800362" indent="0">
+              <a:buNone/>
+              <a:defRPr sz="656"/>
             </a:lvl7pPr>
-            <a:lvl8pPr marL="1764060" indent="0">
-              <a:buNone/>
-              <a:defRPr sz="551"/>
+            <a:lvl8pPr marL="2100423" indent="0">
+              <a:buNone/>
+              <a:defRPr sz="656"/>
             </a:lvl8pPr>
-            <a:lvl9pPr marL="2016069" indent="0">
-              <a:buNone/>
-              <a:defRPr sz="551"/>
+            <a:lvl9pPr marL="2400483" indent="0">
+              <a:buNone/>
+              <a:defRPr sz="656"/>
             </a:lvl9pPr>
           </a:lstStyle>
           <a:p>
@@ -2098,7 +2098,7 @@
           <a:p>
             <a:fld id="{CC6FB895-B65F-4EA9-9907-69D32227E72B}" type="datetimeFigureOut">
               <a:rPr lang="zh-TW" altLang="en-US" smtClean="0"/>
-              <a:t>2026/5/20</a:t>
+              <a:t>2026/6/17</a:t>
             </a:fld>
             <a:endParaRPr lang="zh-TW" altLang="en-US"/>
           </a:p>
@@ -2149,7 +2149,7 @@
     </p:spTree>
     <p:extLst>
       <p:ext uri="{BB962C8B-B14F-4D97-AF65-F5344CB8AC3E}">
-        <p14:creationId xmlns:p14="http://schemas.microsoft.com/office/powerpoint/2010/main" val="827771198"/>
+        <p14:creationId xmlns:p14="http://schemas.microsoft.com/office/powerpoint/2010/main" val="4137000553"/>
       </p:ext>
     </p:extLst>
   </p:cSld>
@@ -2188,15 +2188,15 @@
         </p:nvSpPr>
         <p:spPr>
           <a:xfrm>
-            <a:off x="682328" y="251989"/>
-            <a:ext cx="3194943" cy="881962"/>
+            <a:off x="682328" y="300038"/>
+            <a:ext cx="3194943" cy="1050131"/>
           </a:xfrm>
         </p:spPr>
         <p:txBody>
           <a:bodyPr anchor="b"/>
           <a:lstStyle>
             <a:lvl1pPr>
-              <a:defRPr sz="1764"/>
+              <a:defRPr sz="2100"/>
             </a:lvl1pPr>
           </a:lstStyle>
           <a:p>
@@ -2220,8 +2220,8 @@
         </p:nvSpPr>
         <p:spPr>
           <a:xfrm>
-            <a:off x="4211340" y="544227"/>
-            <a:ext cx="5014913" cy="2686135"/>
+            <a:off x="4211340" y="647998"/>
+            <a:ext cx="5014913" cy="3198317"/>
           </a:xfrm>
         </p:spPr>
         <p:txBody>
@@ -2229,39 +2229,39 @@
           <a:lstStyle>
             <a:lvl1pPr marL="0" indent="0">
               <a:buNone/>
-              <a:defRPr sz="1764"/>
+              <a:defRPr sz="2100"/>
             </a:lvl1pPr>
-            <a:lvl2pPr marL="252009" indent="0">
-              <a:buNone/>
-              <a:defRPr sz="1543"/>
+            <a:lvl2pPr marL="300060" indent="0">
+              <a:buNone/>
+              <a:defRPr sz="1838"/>
             </a:lvl2pPr>
-            <a:lvl3pPr marL="504017" indent="0">
-              <a:buNone/>
-              <a:defRPr sz="1323"/>
+            <a:lvl3pPr marL="600121" indent="0">
+              <a:buNone/>
+              <a:defRPr sz="1575"/>
             </a:lvl3pPr>
-            <a:lvl4pPr marL="756026" indent="0">
-              <a:buNone/>
-              <a:defRPr sz="1102"/>
+            <a:lvl4pPr marL="900181" indent="0">
+              <a:buNone/>
+              <a:defRPr sz="1313"/>
             </a:lvl4pPr>
-            <a:lvl5pPr marL="1008035" indent="0">
-              <a:buNone/>
-              <a:defRPr sz="1102"/>
+            <a:lvl5pPr marL="1200241" indent="0">
+              <a:buNone/>
+              <a:defRPr sz="1313"/>
             </a:lvl5pPr>
-            <a:lvl6pPr marL="1260043" indent="0">
-              <a:buNone/>
-              <a:defRPr sz="1102"/>
+            <a:lvl6pPr marL="1500302" indent="0">
+              <a:buNone/>
+              <a:defRPr sz="1313"/>
             </a:lvl6pPr>
-            <a:lvl7pPr marL="1512052" indent="0">
-              <a:buNone/>
-              <a:defRPr sz="1102"/>
+            <a:lvl7pPr marL="1800362" indent="0">
+              <a:buNone/>
+              <a:defRPr sz="1313"/>
             </a:lvl7pPr>
-            <a:lvl8pPr marL="1764060" indent="0">
-              <a:buNone/>
-              <a:defRPr sz="1102"/>
+            <a:lvl8pPr marL="2100423" indent="0">
+              <a:buNone/>
+              <a:defRPr sz="1313"/>
             </a:lvl8pPr>
-            <a:lvl9pPr marL="2016069" indent="0">
-              <a:buNone/>
-              <a:defRPr sz="1102"/>
+            <a:lvl9pPr marL="2400483" indent="0">
+              <a:buNone/>
+              <a:defRPr sz="1313"/>
             </a:lvl9pPr>
           </a:lstStyle>
           <a:p>
@@ -2285,8 +2285,8 @@
         </p:nvSpPr>
         <p:spPr>
           <a:xfrm>
-            <a:off x="682328" y="1133952"/>
-            <a:ext cx="3194943" cy="2100785"/>
+            <a:off x="682328" y="1350169"/>
+            <a:ext cx="3194943" cy="2501355"/>
           </a:xfrm>
         </p:spPr>
         <p:txBody>
@@ -2294,39 +2294,39 @@
           <a:lstStyle>
             <a:lvl1pPr marL="0" indent="0">
               <a:buNone/>
-              <a:defRPr sz="882"/>
+              <a:defRPr sz="1050"/>
             </a:lvl1pPr>
-            <a:lvl2pPr marL="252009" indent="0">
-              <a:buNone/>
-              <a:defRPr sz="772"/>
+            <a:lvl2pPr marL="300060" indent="0">
+              <a:buNone/>
+              <a:defRPr sz="919"/>
             </a:lvl2pPr>
-            <a:lvl3pPr marL="504017" indent="0">
-              <a:buNone/>
-              <a:defRPr sz="661"/>
+            <a:lvl3pPr marL="600121" indent="0">
+              <a:buNone/>
+              <a:defRPr sz="788"/>
             </a:lvl3pPr>
-            <a:lvl4pPr marL="756026" indent="0">
-              <a:buNone/>
-              <a:defRPr sz="551"/>
+            <a:lvl4pPr marL="900181" indent="0">
+              <a:buNone/>
+              <a:defRPr sz="656"/>
             </a:lvl4pPr>
-            <a:lvl5pPr marL="1008035" indent="0">
-              <a:buNone/>
-              <a:defRPr sz="551"/>
+            <a:lvl5pPr marL="1200241" indent="0">
+              <a:buNone/>
+              <a:defRPr sz="656"/>
             </a:lvl5pPr>
-            <a:lvl6pPr marL="1260043" indent="0">
-              <a:buNone/>
-              <a:defRPr sz="551"/>
+            <a:lvl6pPr marL="1500302" indent="0">
+              <a:buNone/>
+              <a:defRPr sz="656"/>
             </a:lvl6pPr>
-            <a:lvl7pPr marL="1512052" indent="0">
-              <a:buNone/>
-              <a:defRPr sz="551"/>
+            <a:lvl7pPr marL="1800362" indent="0">
+              <a:buNone/>
+              <a:defRPr sz="656"/>
             </a:lvl7pPr>
-            <a:lvl8pPr marL="1764060" indent="0">
-              <a:buNone/>
-              <a:defRPr sz="551"/>
+            <a:lvl8pPr marL="2100423" indent="0">
+              <a:buNone/>
+              <a:defRPr sz="656"/>
             </a:lvl8pPr>
-            <a:lvl9pPr marL="2016069" indent="0">
-              <a:buNone/>
-              <a:defRPr sz="551"/>
+            <a:lvl9pPr marL="2400483" indent="0">
+              <a:buNone/>
+              <a:defRPr sz="656"/>
             </a:lvl9pPr>
           </a:lstStyle>
           <a:p>
@@ -2355,7 +2355,7 @@
           <a:p>
             <a:fld id="{CC6FB895-B65F-4EA9-9907-69D32227E72B}" type="datetimeFigureOut">
               <a:rPr lang="zh-TW" altLang="en-US" smtClean="0"/>
-              <a:t>2026/5/20</a:t>
+              <a:t>2026/6/17</a:t>
             </a:fld>
             <a:endParaRPr lang="zh-TW" altLang="en-US"/>
           </a:p>
@@ -2406,7 +2406,7 @@
     </p:spTree>
     <p:extLst>
       <p:ext uri="{BB962C8B-B14F-4D97-AF65-F5344CB8AC3E}">
-        <p14:creationId xmlns:p14="http://schemas.microsoft.com/office/powerpoint/2010/main" val="1860593700"/>
+        <p14:creationId xmlns:p14="http://schemas.microsoft.com/office/powerpoint/2010/main" val="4135597775"/>
       </p:ext>
     </p:extLst>
   </p:cSld>
@@ -2450,8 +2450,8 @@
         </p:nvSpPr>
         <p:spPr>
           <a:xfrm>
-            <a:off x="681038" y="201242"/>
-            <a:ext cx="8543925" cy="730594"/>
+            <a:off x="681038" y="239614"/>
+            <a:ext cx="8543925" cy="869901"/>
           </a:xfrm>
           <a:prstGeom prst="rect">
             <a:avLst/>
@@ -2483,8 +2483,8 @@
         </p:nvSpPr>
         <p:spPr>
           <a:xfrm>
-            <a:off x="681038" y="1006207"/>
-            <a:ext cx="8543925" cy="2398272"/>
+            <a:off x="681038" y="1198066"/>
+            <a:ext cx="8543925" cy="2855566"/>
           </a:xfrm>
           <a:prstGeom prst="rect">
             <a:avLst/>
@@ -2545,8 +2545,8 @@
         </p:nvSpPr>
         <p:spPr>
           <a:xfrm>
-            <a:off x="681038" y="3503350"/>
-            <a:ext cx="2228850" cy="201241"/>
+            <a:off x="681038" y="4171356"/>
+            <a:ext cx="2228850" cy="239613"/>
           </a:xfrm>
           <a:prstGeom prst="rect">
             <a:avLst/>
@@ -2556,7 +2556,7 @@
           <a:bodyPr vert="horz" lIns="91440" tIns="45720" rIns="91440" bIns="45720" rtlCol="0" anchor="ctr"/>
           <a:lstStyle>
             <a:lvl1pPr algn="l">
-              <a:defRPr sz="661">
+              <a:defRPr sz="788">
                 <a:solidFill>
                   <a:schemeClr val="tx1">
                     <a:tint val="75000"/>
@@ -2568,7 +2568,7 @@
           <a:p>
             <a:fld id="{CC6FB895-B65F-4EA9-9907-69D32227E72B}" type="datetimeFigureOut">
               <a:rPr lang="zh-TW" altLang="en-US" smtClean="0"/>
-              <a:t>2026/5/20</a:t>
+              <a:t>2026/6/17</a:t>
             </a:fld>
             <a:endParaRPr lang="zh-TW" altLang="en-US"/>
           </a:p>
@@ -2586,8 +2586,8 @@
         </p:nvSpPr>
         <p:spPr>
           <a:xfrm>
-            <a:off x="3281363" y="3503350"/>
-            <a:ext cx="3343275" cy="201241"/>
+            <a:off x="3281363" y="4171356"/>
+            <a:ext cx="3343275" cy="239613"/>
           </a:xfrm>
           <a:prstGeom prst="rect">
             <a:avLst/>
@@ -2597,7 +2597,7 @@
           <a:bodyPr vert="horz" lIns="91440" tIns="45720" rIns="91440" bIns="45720" rtlCol="0" anchor="ctr"/>
           <a:lstStyle>
             <a:lvl1pPr algn="ctr">
-              <a:defRPr sz="661">
+              <a:defRPr sz="788">
                 <a:solidFill>
                   <a:schemeClr val="tx1">
                     <a:tint val="75000"/>
@@ -2623,8 +2623,8 @@
         </p:nvSpPr>
         <p:spPr>
           <a:xfrm>
-            <a:off x="6996113" y="3503350"/>
-            <a:ext cx="2228850" cy="201241"/>
+            <a:off x="6996113" y="4171356"/>
+            <a:ext cx="2228850" cy="239613"/>
           </a:xfrm>
           <a:prstGeom prst="rect">
             <a:avLst/>
@@ -2634,7 +2634,7 @@
           <a:bodyPr vert="horz" lIns="91440" tIns="45720" rIns="91440" bIns="45720" rtlCol="0" anchor="ctr"/>
           <a:lstStyle>
             <a:lvl1pPr algn="r">
-              <a:defRPr sz="661">
+              <a:defRPr sz="788">
                 <a:solidFill>
                   <a:schemeClr val="tx1">
                     <a:tint val="75000"/>
@@ -2655,27 +2655,27 @@
     </p:spTree>
     <p:extLst>
       <p:ext uri="{BB962C8B-B14F-4D97-AF65-F5344CB8AC3E}">
-        <p14:creationId xmlns:p14="http://schemas.microsoft.com/office/powerpoint/2010/main" val="2857794098"/>
+        <p14:creationId xmlns:p14="http://schemas.microsoft.com/office/powerpoint/2010/main" val="503844769"/>
       </p:ext>
     </p:extLst>
   </p:cSld>
   <p:clrMap bg1="lt1" tx1="dk1" bg2="lt2" tx2="dk2" accent1="accent1" accent2="accent2" accent3="accent3" accent4="accent4" accent5="accent5" accent6="accent6" hlink="hlink" folHlink="folHlink"/>
   <p:sldLayoutIdLst>
-    <p:sldLayoutId id="2147483769" r:id="rId1"/>
-    <p:sldLayoutId id="2147483770" r:id="rId2"/>
-    <p:sldLayoutId id="2147483771" r:id="rId3"/>
-    <p:sldLayoutId id="2147483772" r:id="rId4"/>
-    <p:sldLayoutId id="2147483773" r:id="rId5"/>
-    <p:sldLayoutId id="2147483774" r:id="rId6"/>
-    <p:sldLayoutId id="2147483775" r:id="rId7"/>
-    <p:sldLayoutId id="2147483776" r:id="rId8"/>
-    <p:sldLayoutId id="2147483777" r:id="rId9"/>
-    <p:sldLayoutId id="2147483778" r:id="rId10"/>
-    <p:sldLayoutId id="2147483779" r:id="rId11"/>
+    <p:sldLayoutId id="2147483817" r:id="rId1"/>
+    <p:sldLayoutId id="2147483818" r:id="rId2"/>
+    <p:sldLayoutId id="2147483819" r:id="rId3"/>
+    <p:sldLayoutId id="2147483820" r:id="rId4"/>
+    <p:sldLayoutId id="2147483821" r:id="rId5"/>
+    <p:sldLayoutId id="2147483822" r:id="rId6"/>
+    <p:sldLayoutId id="2147483823" r:id="rId7"/>
+    <p:sldLayoutId id="2147483824" r:id="rId8"/>
+    <p:sldLayoutId id="2147483825" r:id="rId9"/>
+    <p:sldLayoutId id="2147483826" r:id="rId10"/>
+    <p:sldLayoutId id="2147483827" r:id="rId11"/>
   </p:sldLayoutIdLst>
   <p:txStyles>
     <p:titleStyle>
-      <a:lvl1pPr algn="l" defTabSz="504017" rtl="0" eaLnBrk="1" latinLnBrk="0" hangingPunct="1">
+      <a:lvl1pPr algn="l" defTabSz="600121" rtl="0" eaLnBrk="1" latinLnBrk="0" hangingPunct="1">
         <a:lnSpc>
           <a:spcPct val="90000"/>
         </a:lnSpc>
@@ -2683,7 +2683,7 @@
           <a:spcPct val="0"/>
         </a:spcBef>
         <a:buNone/>
-        <a:defRPr sz="2425" kern="1200">
+        <a:defRPr sz="2888" kern="1200">
           <a:solidFill>
             <a:schemeClr val="tx1"/>
           </a:solidFill>
@@ -2694,16 +2694,16 @@
       </a:lvl1pPr>
     </p:titleStyle>
     <p:bodyStyle>
-      <a:lvl1pPr marL="126004" indent="-126004" algn="l" defTabSz="504017" rtl="0" eaLnBrk="1" latinLnBrk="0" hangingPunct="1">
+      <a:lvl1pPr marL="150030" indent="-150030" algn="l" defTabSz="600121" rtl="0" eaLnBrk="1" latinLnBrk="0" hangingPunct="1">
         <a:lnSpc>
           <a:spcPct val="90000"/>
         </a:lnSpc>
         <a:spcBef>
-          <a:spcPts val="551"/>
+          <a:spcPts val="656"/>
         </a:spcBef>
         <a:buFont typeface="Arial" panose="020B0604020202020204" pitchFamily="34" charset="0"/>
         <a:buChar char="•"/>
-        <a:defRPr sz="1543" kern="1200">
+        <a:defRPr sz="1838" kern="1200">
           <a:solidFill>
             <a:schemeClr val="tx1"/>
           </a:solidFill>
@@ -2712,16 +2712,16 @@
           <a:cs typeface="+mn-cs"/>
         </a:defRPr>
       </a:lvl1pPr>
-      <a:lvl2pPr marL="378013" indent="-126004" algn="l" defTabSz="504017" rtl="0" eaLnBrk="1" latinLnBrk="0" hangingPunct="1">
+      <a:lvl2pPr marL="450091" indent="-150030" algn="l" defTabSz="600121" rtl="0" eaLnBrk="1" latinLnBrk="0" hangingPunct="1">
         <a:lnSpc>
           <a:spcPct val="90000"/>
         </a:lnSpc>
         <a:spcBef>
-          <a:spcPts val="276"/>
+          <a:spcPts val="328"/>
         </a:spcBef>
         <a:buFont typeface="Arial" panose="020B0604020202020204" pitchFamily="34" charset="0"/>
         <a:buChar char="•"/>
-        <a:defRPr sz="1323" kern="1200">
+        <a:defRPr sz="1575" kern="1200">
           <a:solidFill>
             <a:schemeClr val="tx1"/>
           </a:solidFill>
@@ -2730,16 +2730,16 @@
           <a:cs typeface="+mn-cs"/>
         </a:defRPr>
       </a:lvl2pPr>
-      <a:lvl3pPr marL="630022" indent="-126004" algn="l" defTabSz="504017" rtl="0" eaLnBrk="1" latinLnBrk="0" hangingPunct="1">
+      <a:lvl3pPr marL="750151" indent="-150030" algn="l" defTabSz="600121" rtl="0" eaLnBrk="1" latinLnBrk="0" hangingPunct="1">
         <a:lnSpc>
           <a:spcPct val="90000"/>
         </a:lnSpc>
         <a:spcBef>
-          <a:spcPts val="276"/>
+          <a:spcPts val="328"/>
         </a:spcBef>
         <a:buFont typeface="Arial" panose="020B0604020202020204" pitchFamily="34" charset="0"/>
         <a:buChar char="•"/>
-        <a:defRPr sz="1102" kern="1200">
+        <a:defRPr sz="1313" kern="1200">
           <a:solidFill>
             <a:schemeClr val="tx1"/>
           </a:solidFill>
@@ -2748,16 +2748,16 @@
           <a:cs typeface="+mn-cs"/>
         </a:defRPr>
       </a:lvl3pPr>
-      <a:lvl4pPr marL="882030" indent="-126004" algn="l" defTabSz="504017" rtl="0" eaLnBrk="1" latinLnBrk="0" hangingPunct="1">
+      <a:lvl4pPr marL="1050211" indent="-150030" algn="l" defTabSz="600121" rtl="0" eaLnBrk="1" latinLnBrk="0" hangingPunct="1">
         <a:lnSpc>
           <a:spcPct val="90000"/>
         </a:lnSpc>
         <a:spcBef>
-          <a:spcPts val="276"/>
+          <a:spcPts val="328"/>
         </a:spcBef>
         <a:buFont typeface="Arial" panose="020B0604020202020204" pitchFamily="34" charset="0"/>
         <a:buChar char="•"/>
-        <a:defRPr sz="992" kern="1200">
+        <a:defRPr sz="1181" kern="1200">
           <a:solidFill>
             <a:schemeClr val="tx1"/>
           </a:solidFill>
@@ -2766,16 +2766,16 @@
           <a:cs typeface="+mn-cs"/>
         </a:defRPr>
       </a:lvl4pPr>
-      <a:lvl5pPr marL="1134039" indent="-126004" algn="l" defTabSz="504017" rtl="0" eaLnBrk="1" latinLnBrk="0" hangingPunct="1">
+      <a:lvl5pPr marL="1350272" indent="-150030" algn="l" defTabSz="600121" rtl="0" eaLnBrk="1" latinLnBrk="0" hangingPunct="1">
         <a:lnSpc>
           <a:spcPct val="90000"/>
         </a:lnSpc>
         <a:spcBef>
-          <a:spcPts val="276"/>
+          <a:spcPts val="328"/>
         </a:spcBef>
         <a:buFont typeface="Arial" panose="020B0604020202020204" pitchFamily="34" charset="0"/>
         <a:buChar char="•"/>
-        <a:defRPr sz="992" kern="1200">
+        <a:defRPr sz="1181" kern="1200">
           <a:solidFill>
             <a:schemeClr val="tx1"/>
           </a:solidFill>
@@ -2784,16 +2784,16 @@
           <a:cs typeface="+mn-cs"/>
         </a:defRPr>
       </a:lvl5pPr>
-      <a:lvl6pPr marL="1386048" indent="-126004" algn="l" defTabSz="504017" rtl="0" eaLnBrk="1" latinLnBrk="0" hangingPunct="1">
+      <a:lvl6pPr marL="1650332" indent="-150030" algn="l" defTabSz="600121" rtl="0" eaLnBrk="1" latinLnBrk="0" hangingPunct="1">
         <a:lnSpc>
           <a:spcPct val="90000"/>
         </a:lnSpc>
         <a:spcBef>
-          <a:spcPts val="276"/>
+          <a:spcPts val="328"/>
         </a:spcBef>
         <a:buFont typeface="Arial" panose="020B0604020202020204" pitchFamily="34" charset="0"/>
         <a:buChar char="•"/>
-        <a:defRPr sz="992" kern="1200">
+        <a:defRPr sz="1181" kern="1200">
           <a:solidFill>
             <a:schemeClr val="tx1"/>
           </a:solidFill>
@@ -2802,16 +2802,16 @@
           <a:cs typeface="+mn-cs"/>
         </a:defRPr>
       </a:lvl6pPr>
-      <a:lvl7pPr marL="1638056" indent="-126004" algn="l" defTabSz="504017" rtl="0" eaLnBrk="1" latinLnBrk="0" hangingPunct="1">
+      <a:lvl7pPr marL="1950392" indent="-150030" algn="l" defTabSz="600121" rtl="0" eaLnBrk="1" latinLnBrk="0" hangingPunct="1">
         <a:lnSpc>
           <a:spcPct val="90000"/>
         </a:lnSpc>
         <a:spcBef>
-          <a:spcPts val="276"/>
+          <a:spcPts val="328"/>
         </a:spcBef>
         <a:buFont typeface="Arial" panose="020B0604020202020204" pitchFamily="34" charset="0"/>
         <a:buChar char="•"/>
-        <a:defRPr sz="992" kern="1200">
+        <a:defRPr sz="1181" kern="1200">
           <a:solidFill>
             <a:schemeClr val="tx1"/>
           </a:solidFill>
@@ -2820,16 +2820,16 @@
           <a:cs typeface="+mn-cs"/>
         </a:defRPr>
       </a:lvl7pPr>
-      <a:lvl8pPr marL="1890065" indent="-126004" algn="l" defTabSz="504017" rtl="0" eaLnBrk="1" latinLnBrk="0" hangingPunct="1">
+      <a:lvl8pPr marL="2250453" indent="-150030" algn="l" defTabSz="600121" rtl="0" eaLnBrk="1" latinLnBrk="0" hangingPunct="1">
         <a:lnSpc>
           <a:spcPct val="90000"/>
         </a:lnSpc>
         <a:spcBef>
-          <a:spcPts val="276"/>
+          <a:spcPts val="328"/>
         </a:spcBef>
         <a:buFont typeface="Arial" panose="020B0604020202020204" pitchFamily="34" charset="0"/>
         <a:buChar char="•"/>
-        <a:defRPr sz="992" kern="1200">
+        <a:defRPr sz="1181" kern="1200">
           <a:solidFill>
             <a:schemeClr val="tx1"/>
           </a:solidFill>
@@ -2838,16 +2838,16 @@
           <a:cs typeface="+mn-cs"/>
         </a:defRPr>
       </a:lvl8pPr>
-      <a:lvl9pPr marL="2142073" indent="-126004" algn="l" defTabSz="504017" rtl="0" eaLnBrk="1" latinLnBrk="0" hangingPunct="1">
+      <a:lvl9pPr marL="2550513" indent="-150030" algn="l" defTabSz="600121" rtl="0" eaLnBrk="1" latinLnBrk="0" hangingPunct="1">
         <a:lnSpc>
           <a:spcPct val="90000"/>
         </a:lnSpc>
         <a:spcBef>
-          <a:spcPts val="276"/>
+          <a:spcPts val="328"/>
         </a:spcBef>
         <a:buFont typeface="Arial" panose="020B0604020202020204" pitchFamily="34" charset="0"/>
         <a:buChar char="•"/>
-        <a:defRPr sz="992" kern="1200">
+        <a:defRPr sz="1181" kern="1200">
           <a:solidFill>
             <a:schemeClr val="tx1"/>
           </a:solidFill>
@@ -2861,8 +2861,8 @@
       <a:defPPr>
         <a:defRPr lang="en-US"/>
       </a:defPPr>
-      <a:lvl1pPr marL="0" algn="l" defTabSz="504017" rtl="0" eaLnBrk="1" latinLnBrk="0" hangingPunct="1">
-        <a:defRPr sz="992" kern="1200">
+      <a:lvl1pPr marL="0" algn="l" defTabSz="600121" rtl="0" eaLnBrk="1" latinLnBrk="0" hangingPunct="1">
+        <a:defRPr sz="1181" kern="1200">
           <a:solidFill>
             <a:schemeClr val="tx1"/>
           </a:solidFill>
@@ -2871,8 +2871,8 @@
           <a:cs typeface="+mn-cs"/>
         </a:defRPr>
       </a:lvl1pPr>
-      <a:lvl2pPr marL="252009" algn="l" defTabSz="504017" rtl="0" eaLnBrk="1" latinLnBrk="0" hangingPunct="1">
-        <a:defRPr sz="992" kern="1200">
+      <a:lvl2pPr marL="300060" algn="l" defTabSz="600121" rtl="0" eaLnBrk="1" latinLnBrk="0" hangingPunct="1">
+        <a:defRPr sz="1181" kern="1200">
           <a:solidFill>
             <a:schemeClr val="tx1"/>
           </a:solidFill>
@@ -2881,8 +2881,8 @@
           <a:cs typeface="+mn-cs"/>
         </a:defRPr>
       </a:lvl2pPr>
-      <a:lvl3pPr marL="504017" algn="l" defTabSz="504017" rtl="0" eaLnBrk="1" latinLnBrk="0" hangingPunct="1">
-        <a:defRPr sz="992" kern="1200">
+      <a:lvl3pPr marL="600121" algn="l" defTabSz="600121" rtl="0" eaLnBrk="1" latinLnBrk="0" hangingPunct="1">
+        <a:defRPr sz="1181" kern="1200">
           <a:solidFill>
             <a:schemeClr val="tx1"/>
           </a:solidFill>
@@ -2891,8 +2891,8 @@
           <a:cs typeface="+mn-cs"/>
         </a:defRPr>
       </a:lvl3pPr>
-      <a:lvl4pPr marL="756026" algn="l" defTabSz="504017" rtl="0" eaLnBrk="1" latinLnBrk="0" hangingPunct="1">
-        <a:defRPr sz="992" kern="1200">
+      <a:lvl4pPr marL="900181" algn="l" defTabSz="600121" rtl="0" eaLnBrk="1" latinLnBrk="0" hangingPunct="1">
+        <a:defRPr sz="1181" kern="1200">
           <a:solidFill>
             <a:schemeClr val="tx1"/>
           </a:solidFill>
@@ -2901,8 +2901,8 @@
           <a:cs typeface="+mn-cs"/>
         </a:defRPr>
       </a:lvl4pPr>
-      <a:lvl5pPr marL="1008035" algn="l" defTabSz="504017" rtl="0" eaLnBrk="1" latinLnBrk="0" hangingPunct="1">
-        <a:defRPr sz="992" kern="1200">
+      <a:lvl5pPr marL="1200241" algn="l" defTabSz="600121" rtl="0" eaLnBrk="1" latinLnBrk="0" hangingPunct="1">
+        <a:defRPr sz="1181" kern="1200">
           <a:solidFill>
             <a:schemeClr val="tx1"/>
           </a:solidFill>
@@ -2911,8 +2911,8 @@
           <a:cs typeface="+mn-cs"/>
         </a:defRPr>
       </a:lvl5pPr>
-      <a:lvl6pPr marL="1260043" algn="l" defTabSz="504017" rtl="0" eaLnBrk="1" latinLnBrk="0" hangingPunct="1">
-        <a:defRPr sz="992" kern="1200">
+      <a:lvl6pPr marL="1500302" algn="l" defTabSz="600121" rtl="0" eaLnBrk="1" latinLnBrk="0" hangingPunct="1">
+        <a:defRPr sz="1181" kern="1200">
           <a:solidFill>
             <a:schemeClr val="tx1"/>
           </a:solidFill>
@@ -2921,8 +2921,8 @@
           <a:cs typeface="+mn-cs"/>
         </a:defRPr>
       </a:lvl6pPr>
-      <a:lvl7pPr marL="1512052" algn="l" defTabSz="504017" rtl="0" eaLnBrk="1" latinLnBrk="0" hangingPunct="1">
-        <a:defRPr sz="992" kern="1200">
+      <a:lvl7pPr marL="1800362" algn="l" defTabSz="600121" rtl="0" eaLnBrk="1" latinLnBrk="0" hangingPunct="1">
+        <a:defRPr sz="1181" kern="1200">
           <a:solidFill>
             <a:schemeClr val="tx1"/>
           </a:solidFill>
@@ -2931,8 +2931,8 @@
           <a:cs typeface="+mn-cs"/>
         </a:defRPr>
       </a:lvl7pPr>
-      <a:lvl8pPr marL="1764060" algn="l" defTabSz="504017" rtl="0" eaLnBrk="1" latinLnBrk="0" hangingPunct="1">
-        <a:defRPr sz="992" kern="1200">
+      <a:lvl8pPr marL="2100423" algn="l" defTabSz="600121" rtl="0" eaLnBrk="1" latinLnBrk="0" hangingPunct="1">
+        <a:defRPr sz="1181" kern="1200">
           <a:solidFill>
             <a:schemeClr val="tx1"/>
           </a:solidFill>
@@ -2941,8 +2941,8 @@
           <a:cs typeface="+mn-cs"/>
         </a:defRPr>
       </a:lvl8pPr>
-      <a:lvl9pPr marL="2016069" algn="l" defTabSz="504017" rtl="0" eaLnBrk="1" latinLnBrk="0" hangingPunct="1">
-        <a:defRPr sz="992" kern="1200">
+      <a:lvl9pPr marL="2400483" algn="l" defTabSz="600121" rtl="0" eaLnBrk="1" latinLnBrk="0" hangingPunct="1">
+        <a:defRPr sz="1181" kern="1200">
           <a:solidFill>
             <a:schemeClr val="tx1"/>
           </a:solidFill>
@@ -2975,10 +2975,10 @@
       </p:grpSpPr>
       <p:grpSp>
         <p:nvGrpSpPr>
-          <p:cNvPr id="2" name="群組 1">
+          <p:cNvPr id="4" name="群組 3">
             <a:extLst>
               <a:ext uri="{FF2B5EF4-FFF2-40B4-BE49-F238E27FC236}">
-                <a16:creationId xmlns:a16="http://schemas.microsoft.com/office/drawing/2014/main" id="{16ABE738-883E-46AA-A822-7B8A11D9BA9D}"/>
+                <a16:creationId xmlns:a16="http://schemas.microsoft.com/office/drawing/2014/main" id="{42123814-EE1F-4A96-8A2C-E41C7E0ACFB2}"/>
               </a:ext>
             </a:extLst>
           </p:cNvPr>
@@ -2987,12 +2987,219 @@
         </p:nvGrpSpPr>
         <p:grpSpPr>
           <a:xfrm>
-            <a:off x="-33764" y="4269"/>
-            <a:ext cx="10007576" cy="3815724"/>
-            <a:chOff x="-33764" y="1543350"/>
-            <a:chExt cx="10007576" cy="3815724"/>
+            <a:off x="-52776" y="-19943"/>
+            <a:ext cx="10011552" cy="4540449"/>
+            <a:chOff x="-42052" y="992496"/>
+            <a:chExt cx="10011552" cy="4540449"/>
           </a:xfrm>
         </p:grpSpPr>
+        <p:sp>
+          <p:nvSpPr>
+            <p:cNvPr id="28" name="矩形: 圓角 27">
+              <a:extLst>
+                <a:ext uri="{FF2B5EF4-FFF2-40B4-BE49-F238E27FC236}">
+                  <a16:creationId xmlns:a16="http://schemas.microsoft.com/office/drawing/2014/main" id="{CCB24D74-4A8B-4444-8425-4BDC15A33F54}"/>
+                </a:ext>
+              </a:extLst>
+            </p:cNvPr>
+            <p:cNvSpPr/>
+            <p:nvPr/>
+          </p:nvSpPr>
+          <p:spPr>
+            <a:xfrm>
+              <a:off x="55199" y="4033322"/>
+              <a:ext cx="8958446" cy="1190023"/>
+            </a:xfrm>
+            <a:prstGeom prst="roundRect">
+              <a:avLst>
+                <a:gd name="adj" fmla="val 6163"/>
+              </a:avLst>
+            </a:prstGeom>
+            <a:solidFill>
+              <a:schemeClr val="bg1">
+                <a:lumMod val="95000"/>
+              </a:schemeClr>
+            </a:solidFill>
+            <a:ln w="19050">
+              <a:solidFill>
+                <a:schemeClr val="tx1">
+                  <a:lumMod val="50000"/>
+                  <a:lumOff val="50000"/>
+                </a:schemeClr>
+              </a:solidFill>
+            </a:ln>
+          </p:spPr>
+          <p:style>
+            <a:lnRef idx="2">
+              <a:schemeClr val="accent1">
+                <a:shade val="50000"/>
+              </a:schemeClr>
+            </a:lnRef>
+            <a:fillRef idx="1">
+              <a:schemeClr val="accent1"/>
+            </a:fillRef>
+            <a:effectRef idx="0">
+              <a:schemeClr val="accent1"/>
+            </a:effectRef>
+            <a:fontRef idx="minor">
+              <a:schemeClr val="lt1"/>
+            </a:fontRef>
+          </p:style>
+          <p:txBody>
+            <a:bodyPr rot="0" spcFirstLastPara="0" vertOverflow="overflow" horzOverflow="overflow" vert="horz" wrap="square" lIns="91440" tIns="45720" rIns="91440" bIns="45720" numCol="1" spcCol="0" rtlCol="0" fromWordArt="0" anchor="ctr" anchorCtr="0" forceAA="0" compatLnSpc="1">
+              <a:prstTxWarp prst="textNoShape">
+                <a:avLst/>
+              </a:prstTxWarp>
+              <a:noAutofit/>
+            </a:bodyPr>
+            <a:lstStyle/>
+            <a:p>
+              <a:pPr algn="ctr"/>
+              <a:endParaRPr lang="zh-TW" altLang="en-US" sz="1900" dirty="0">
+                <a:latin typeface="Times New Roman" panose="02020603050405020304" pitchFamily="18" charset="0"/>
+                <a:cs typeface="Times New Roman" panose="02020603050405020304" pitchFamily="18" charset="0"/>
+              </a:endParaRPr>
+            </a:p>
+          </p:txBody>
+        </p:sp>
+        <p:sp>
+          <p:nvSpPr>
+            <p:cNvPr id="29" name="矩形: 圓角 28">
+              <a:extLst>
+                <a:ext uri="{FF2B5EF4-FFF2-40B4-BE49-F238E27FC236}">
+                  <a16:creationId xmlns:a16="http://schemas.microsoft.com/office/drawing/2014/main" id="{108824B8-9BBE-4291-B8C7-D1466F0F0792}"/>
+                </a:ext>
+              </a:extLst>
+            </p:cNvPr>
+            <p:cNvSpPr/>
+            <p:nvPr/>
+          </p:nvSpPr>
+          <p:spPr>
+            <a:xfrm>
+              <a:off x="55199" y="2786560"/>
+              <a:ext cx="8958446" cy="1190023"/>
+            </a:xfrm>
+            <a:prstGeom prst="roundRect">
+              <a:avLst>
+                <a:gd name="adj" fmla="val 6163"/>
+              </a:avLst>
+            </a:prstGeom>
+            <a:solidFill>
+              <a:schemeClr val="bg1">
+                <a:lumMod val="95000"/>
+              </a:schemeClr>
+            </a:solidFill>
+            <a:ln w="19050">
+              <a:solidFill>
+                <a:schemeClr val="tx1">
+                  <a:lumMod val="50000"/>
+                  <a:lumOff val="50000"/>
+                </a:schemeClr>
+              </a:solidFill>
+            </a:ln>
+          </p:spPr>
+          <p:style>
+            <a:lnRef idx="2">
+              <a:schemeClr val="accent1">
+                <a:shade val="50000"/>
+              </a:schemeClr>
+            </a:lnRef>
+            <a:fillRef idx="1">
+              <a:schemeClr val="accent1"/>
+            </a:fillRef>
+            <a:effectRef idx="0">
+              <a:schemeClr val="accent1"/>
+            </a:effectRef>
+            <a:fontRef idx="minor">
+              <a:schemeClr val="lt1"/>
+            </a:fontRef>
+          </p:style>
+          <p:txBody>
+            <a:bodyPr rot="0" spcFirstLastPara="0" vertOverflow="overflow" horzOverflow="overflow" vert="horz" wrap="square" lIns="91440" tIns="45720" rIns="91440" bIns="45720" numCol="1" spcCol="0" rtlCol="0" fromWordArt="0" anchor="ctr" anchorCtr="0" forceAA="0" compatLnSpc="1">
+              <a:prstTxWarp prst="textNoShape">
+                <a:avLst/>
+              </a:prstTxWarp>
+              <a:noAutofit/>
+            </a:bodyPr>
+            <a:lstStyle/>
+            <a:p>
+              <a:pPr algn="ctr"/>
+              <a:endParaRPr lang="zh-TW" altLang="en-US" sz="1900" dirty="0">
+                <a:latin typeface="Times New Roman" panose="02020603050405020304" pitchFamily="18" charset="0"/>
+                <a:cs typeface="Times New Roman" panose="02020603050405020304" pitchFamily="18" charset="0"/>
+              </a:endParaRPr>
+            </a:p>
+          </p:txBody>
+        </p:sp>
+        <p:sp>
+          <p:nvSpPr>
+            <p:cNvPr id="27" name="矩形: 圓角 26">
+              <a:extLst>
+                <a:ext uri="{FF2B5EF4-FFF2-40B4-BE49-F238E27FC236}">
+                  <a16:creationId xmlns:a16="http://schemas.microsoft.com/office/drawing/2014/main" id="{52D051E1-1392-48ED-BB65-D5213D95206B}"/>
+                </a:ext>
+              </a:extLst>
+            </p:cNvPr>
+            <p:cNvSpPr/>
+            <p:nvPr/>
+          </p:nvSpPr>
+          <p:spPr>
+            <a:xfrm>
+              <a:off x="55199" y="1539798"/>
+              <a:ext cx="8958446" cy="1190023"/>
+            </a:xfrm>
+            <a:prstGeom prst="roundRect">
+              <a:avLst>
+                <a:gd name="adj" fmla="val 6163"/>
+              </a:avLst>
+            </a:prstGeom>
+            <a:solidFill>
+              <a:schemeClr val="bg1">
+                <a:lumMod val="95000"/>
+              </a:schemeClr>
+            </a:solidFill>
+            <a:ln w="19050">
+              <a:solidFill>
+                <a:schemeClr val="tx1">
+                  <a:lumMod val="50000"/>
+                  <a:lumOff val="50000"/>
+                </a:schemeClr>
+              </a:solidFill>
+            </a:ln>
+          </p:spPr>
+          <p:style>
+            <a:lnRef idx="2">
+              <a:schemeClr val="accent1">
+                <a:shade val="50000"/>
+              </a:schemeClr>
+            </a:lnRef>
+            <a:fillRef idx="1">
+              <a:schemeClr val="accent1"/>
+            </a:fillRef>
+            <a:effectRef idx="0">
+              <a:schemeClr val="accent1"/>
+            </a:effectRef>
+            <a:fontRef idx="minor">
+              <a:schemeClr val="lt1"/>
+            </a:fontRef>
+          </p:style>
+          <p:txBody>
+            <a:bodyPr rot="0" spcFirstLastPara="0" vertOverflow="overflow" horzOverflow="overflow" vert="horz" wrap="square" lIns="91440" tIns="45720" rIns="91440" bIns="45720" numCol="1" spcCol="0" rtlCol="0" fromWordArt="0" anchor="ctr" anchorCtr="0" forceAA="0" compatLnSpc="1">
+              <a:prstTxWarp prst="textNoShape">
+                <a:avLst/>
+              </a:prstTxWarp>
+              <a:noAutofit/>
+            </a:bodyPr>
+            <a:lstStyle/>
+            <a:p>
+              <a:pPr algn="ctr"/>
+              <a:endParaRPr lang="zh-TW" altLang="en-US" sz="1900" dirty="0">
+                <a:latin typeface="Times New Roman" panose="02020603050405020304" pitchFamily="18" charset="0"/>
+                <a:cs typeface="Times New Roman" panose="02020603050405020304" pitchFamily="18" charset="0"/>
+              </a:endParaRPr>
+            </a:p>
+          </p:txBody>
+        </p:sp>
         <p:pic>
           <p:nvPicPr>
             <p:cNvPr id="3" name="圖片 2">
@@ -3030,8 +3237,8 @@
           </p:blipFill>
           <p:spPr>
             <a:xfrm>
-              <a:off x="1387773" y="2560110"/>
-              <a:ext cx="7654628" cy="1494274"/>
+              <a:off x="990345" y="2611019"/>
+              <a:ext cx="8037895" cy="1569093"/>
             </a:xfrm>
             <a:prstGeom prst="rect">
               <a:avLst/>
@@ -3075,8 +3282,8 @@
           </p:blipFill>
           <p:spPr>
             <a:xfrm>
-              <a:off x="1387773" y="1543350"/>
-              <a:ext cx="7654628" cy="1319642"/>
+              <a:off x="990345" y="1543350"/>
+              <a:ext cx="8037895" cy="1385717"/>
             </a:xfrm>
             <a:prstGeom prst="rect">
               <a:avLst/>
@@ -3120,16 +3327,16 @@
           </p:blipFill>
           <p:spPr>
             <a:xfrm>
-              <a:off x="1386704" y="3756635"/>
-              <a:ext cx="7618224" cy="1494274"/>
+              <a:off x="989223" y="3867455"/>
+              <a:ext cx="7999668" cy="1569093"/>
             </a:xfrm>
             <a:prstGeom prst="rect">
               <a:avLst/>
             </a:prstGeom>
           </p:spPr>
         </p:pic>
-        <mc:AlternateContent xmlns:mc="http://schemas.openxmlformats.org/markup-compatibility/2006">
-          <mc:Choice xmlns:a14="http://schemas.microsoft.com/office/drawing/2010/main" Requires="a14">
+        <mc:AlternateContent xmlns:mc="http://schemas.openxmlformats.org/markup-compatibility/2006" xmlns:a14="http://schemas.microsoft.com/office/drawing/2010/main">
+          <mc:Choice Requires="a14">
             <p:sp>
               <p:nvSpPr>
                 <p:cNvPr id="6" name="矩形 5">
@@ -3144,8 +3351,8 @@
               </p:nvSpPr>
               <p:spPr>
                 <a:xfrm>
-                  <a:off x="98303" y="3156815"/>
-                  <a:ext cx="1176412" cy="439736"/>
+                  <a:off x="167204" y="3171499"/>
+                  <a:ext cx="883254" cy="400110"/>
                 </a:xfrm>
                 <a:prstGeom prst="rect">
                   <a:avLst/>
@@ -3165,64 +3372,17 @@
                       </m:oMathParaPr>
                       <m:oMath xmlns:m="http://schemas.openxmlformats.org/officeDocument/2006/math">
                         <m:r>
-                          <m:rPr>
-                            <m:sty m:val="p"/>
-                          </m:rPr>
-                          <a:rPr lang="en-US" altLang="zh-TW" sz="2000">
+                          <a:rPr lang="en-US" altLang="zh-TW" sz="2000" i="1">
                             <a:latin typeface="Cambria Math" panose="02040503050406030204" pitchFamily="18" charset="0"/>
                           </a:rPr>
-                          <m:t>Re</m:t>
+                          <m:t>𝜎</m:t>
                         </m:r>
-                        <m:d>
-                          <m:dPr>
-                            <m:begChr m:val="["/>
-                            <m:endChr m:val="]"/>
-                            <m:ctrlPr>
-                              <a:rPr lang="en-US" altLang="zh-TW" sz="2000" i="1">
-                                <a:latin typeface="Cambria Math" panose="02040503050406030204" pitchFamily="18" charset="0"/>
-                              </a:rPr>
-                            </m:ctrlPr>
-                          </m:dPr>
-                          <m:e>
-                            <m:sSup>
-                              <m:sSupPr>
-                                <m:ctrlPr>
-                                  <a:rPr lang="en-US" altLang="zh-TW" sz="2000" i="1">
-                                    <a:latin typeface="Cambria Math" panose="02040503050406030204" pitchFamily="18" charset="0"/>
-                                  </a:rPr>
-                                </m:ctrlPr>
-                              </m:sSupPr>
-                              <m:e>
-                                <m:r>
-                                  <a:rPr lang="en-US" altLang="zh-TW" sz="2000" i="1">
-                                    <a:latin typeface="Cambria Math" panose="02040503050406030204" pitchFamily="18" charset="0"/>
-                                  </a:rPr>
-                                  <m:t>𝑒</m:t>
-                                </m:r>
-                              </m:e>
-                              <m:sup>
-                                <m:r>
-                                  <a:rPr lang="en-US" altLang="zh-TW" sz="2000" i="1">
-                                    <a:latin typeface="Cambria Math" panose="02040503050406030204" pitchFamily="18" charset="0"/>
-                                  </a:rPr>
-                                  <m:t>𝑖</m:t>
-                                </m:r>
-                                <m:r>
-                                  <a:rPr lang="en-US" altLang="zh-TW" sz="2000" i="1" dirty="0">
-                                    <a:latin typeface="Cambria Math" panose="02040503050406030204" pitchFamily="18" charset="0"/>
-                                  </a:rPr>
-                                  <m:t>ℓ</m:t>
-                                </m:r>
-                                <m:r>
-                                  <a:rPr lang="en-US" altLang="zh-TW" sz="2000" i="1">
-                                    <a:latin typeface="Cambria Math" panose="02040503050406030204" pitchFamily="18" charset="0"/>
-                                  </a:rPr>
-                                  <m:t>𝜙</m:t>
-                                </m:r>
-                              </m:sup>
-                            </m:sSup>
-                          </m:e>
-                        </m:d>
+                        <m:r>
+                          <a:rPr lang="en-US" altLang="zh-TW" sz="2000" i="1">
+                            <a:latin typeface="Cambria Math" panose="02040503050406030204" pitchFamily="18" charset="0"/>
+                          </a:rPr>
+                          <m:t>=0</m:t>
+                        </m:r>
                       </m:oMath>
                     </m:oMathPara>
                   </a14:m>
@@ -3234,7 +3394,7 @@
               </p:txBody>
             </p:sp>
           </mc:Choice>
-          <mc:Fallback>
+          <mc:Fallback xmlns="">
             <p:sp>
               <p:nvSpPr>
                 <p:cNvPr id="6" name="矩形 5">
@@ -3251,8 +3411,8 @@
               </p:nvSpPr>
               <p:spPr>
                 <a:xfrm>
-                  <a:off x="98303" y="3156815"/>
-                  <a:ext cx="1176412" cy="439736"/>
+                  <a:off x="167204" y="3171499"/>
+                  <a:ext cx="883254" cy="400110"/>
                 </a:xfrm>
                 <a:prstGeom prst="rect">
                   <a:avLst/>
@@ -3279,8 +3439,8 @@
             </p:sp>
           </mc:Fallback>
         </mc:AlternateContent>
-        <mc:AlternateContent xmlns:mc="http://schemas.openxmlformats.org/markup-compatibility/2006">
-          <mc:Choice xmlns:a14="http://schemas.microsoft.com/office/drawing/2010/main" Requires="a14">
+        <mc:AlternateContent xmlns:mc="http://schemas.openxmlformats.org/markup-compatibility/2006" xmlns:a14="http://schemas.microsoft.com/office/drawing/2010/main">
+          <mc:Choice Requires="a14">
             <p:sp>
               <p:nvSpPr>
                 <p:cNvPr id="25" name="矩形 24">
@@ -3295,8 +3455,8 @@
               </p:nvSpPr>
               <p:spPr>
                 <a:xfrm>
-                  <a:off x="-33764" y="1958389"/>
-                  <a:ext cx="1583510" cy="445635"/>
+                  <a:off x="66208" y="1924737"/>
+                  <a:ext cx="1075615" cy="400110"/>
                 </a:xfrm>
                 <a:prstGeom prst="rect">
                   <a:avLst/>
@@ -3316,75 +3476,17 @@
                       </m:oMathParaPr>
                       <m:oMath xmlns:m="http://schemas.openxmlformats.org/officeDocument/2006/math">
                         <m:r>
-                          <m:rPr>
-                            <m:sty m:val="p"/>
-                          </m:rPr>
-                          <a:rPr lang="en-US" altLang="zh-TW" sz="2000">
+                          <a:rPr lang="en-US" altLang="zh-TW" sz="2000" i="1">
                             <a:latin typeface="Cambria Math" panose="02040503050406030204" pitchFamily="18" charset="0"/>
                           </a:rPr>
-                          <m:t>Re</m:t>
+                          <m:t>𝜎</m:t>
                         </m:r>
-                        <m:d>
-                          <m:dPr>
-                            <m:begChr m:val="["/>
-                            <m:endChr m:val="]"/>
-                            <m:ctrlPr>
-                              <a:rPr lang="en-US" altLang="zh-TW" sz="2000" i="1">
-                                <a:latin typeface="Cambria Math" panose="02040503050406030204" pitchFamily="18" charset="0"/>
-                              </a:rPr>
-                            </m:ctrlPr>
-                          </m:dPr>
-                          <m:e>
-                            <m:sSup>
-                              <m:sSupPr>
-                                <m:ctrlPr>
-                                  <a:rPr lang="en-US" altLang="zh-TW" sz="2000" i="1">
-                                    <a:latin typeface="Cambria Math" panose="02040503050406030204" pitchFamily="18" charset="0"/>
-                                  </a:rPr>
-                                </m:ctrlPr>
-                              </m:sSupPr>
-                              <m:e>
-                                <m:r>
-                                  <a:rPr lang="en-US" altLang="zh-TW" sz="2000" i="1">
-                                    <a:latin typeface="Cambria Math" panose="02040503050406030204" pitchFamily="18" charset="0"/>
-                                  </a:rPr>
-                                  <m:t>𝑒</m:t>
-                                </m:r>
-                              </m:e>
-                              <m:sup>
-                                <m:r>
-                                  <a:rPr lang="en-US" altLang="zh-TW" sz="2000" i="1">
-                                    <a:latin typeface="Cambria Math" panose="02040503050406030204" pitchFamily="18" charset="0"/>
-                                  </a:rPr>
-                                  <m:t>𝑖</m:t>
-                                </m:r>
-                                <m:d>
-                                  <m:dPr>
-                                    <m:ctrlPr>
-                                      <a:rPr lang="en-US" altLang="zh-TW" sz="2000" i="1" dirty="0">
-                                        <a:latin typeface="Cambria Math" panose="02040503050406030204" pitchFamily="18" charset="0"/>
-                                      </a:rPr>
-                                    </m:ctrlPr>
-                                  </m:dPr>
-                                  <m:e>
-                                    <m:r>
-                                      <a:rPr lang="en-US" altLang="zh-TW" sz="2000" i="1" dirty="0">
-                                        <a:latin typeface="Cambria Math" panose="02040503050406030204" pitchFamily="18" charset="0"/>
-                                      </a:rPr>
-                                      <m:t>ℓ−1</m:t>
-                                    </m:r>
-                                  </m:e>
-                                </m:d>
-                                <m:r>
-                                  <a:rPr lang="en-US" altLang="zh-TW" sz="2000" i="1">
-                                    <a:latin typeface="Cambria Math" panose="02040503050406030204" pitchFamily="18" charset="0"/>
-                                  </a:rPr>
-                                  <m:t>𝜙</m:t>
-                                </m:r>
-                              </m:sup>
-                            </m:sSup>
-                          </m:e>
-                        </m:d>
+                        <m:r>
+                          <a:rPr lang="en-US" altLang="zh-TW" sz="2000" i="1">
+                            <a:latin typeface="Cambria Math" panose="02040503050406030204" pitchFamily="18" charset="0"/>
+                          </a:rPr>
+                          <m:t>=−1</m:t>
+                        </m:r>
                       </m:oMath>
                     </m:oMathPara>
                   </a14:m>
@@ -3396,7 +3498,7 @@
               </p:txBody>
             </p:sp>
           </mc:Choice>
-          <mc:Fallback>
+          <mc:Fallback xmlns="">
             <p:sp>
               <p:nvSpPr>
                 <p:cNvPr id="25" name="矩形 24">
@@ -3413,8 +3515,8 @@
               </p:nvSpPr>
               <p:spPr>
                 <a:xfrm>
-                  <a:off x="-33764" y="1958389"/>
-                  <a:ext cx="1583510" cy="445635"/>
+                  <a:off x="66208" y="1924737"/>
+                  <a:ext cx="1075615" cy="400110"/>
                 </a:xfrm>
                 <a:prstGeom prst="rect">
                   <a:avLst/>
@@ -3441,8 +3543,8 @@
             </p:sp>
           </mc:Fallback>
         </mc:AlternateContent>
-        <mc:AlternateContent xmlns:mc="http://schemas.openxmlformats.org/markup-compatibility/2006">
-          <mc:Choice xmlns:a14="http://schemas.microsoft.com/office/drawing/2010/main" Requires="a14">
+        <mc:AlternateContent xmlns:mc="http://schemas.openxmlformats.org/markup-compatibility/2006" xmlns:a14="http://schemas.microsoft.com/office/drawing/2010/main">
+          <mc:Choice Requires="a14">
             <p:sp>
               <p:nvSpPr>
                 <p:cNvPr id="34" name="矩形 33">
@@ -3457,8 +3559,8 @@
               </p:nvSpPr>
               <p:spPr>
                 <a:xfrm>
-                  <a:off x="-33764" y="4351439"/>
-                  <a:ext cx="1583510" cy="445635"/>
+                  <a:off x="167204" y="4418261"/>
+                  <a:ext cx="883254" cy="400110"/>
                 </a:xfrm>
                 <a:prstGeom prst="rect">
                   <a:avLst/>
@@ -3478,75 +3580,17 @@
                       </m:oMathParaPr>
                       <m:oMath xmlns:m="http://schemas.openxmlformats.org/officeDocument/2006/math">
                         <m:r>
-                          <m:rPr>
-                            <m:sty m:val="p"/>
-                          </m:rPr>
-                          <a:rPr lang="en-US" altLang="zh-TW" sz="2000">
+                          <a:rPr lang="en-US" altLang="zh-TW" sz="2000" i="1">
                             <a:latin typeface="Cambria Math" panose="02040503050406030204" pitchFamily="18" charset="0"/>
                           </a:rPr>
-                          <m:t>Re</m:t>
+                          <m:t>𝜎</m:t>
                         </m:r>
-                        <m:d>
-                          <m:dPr>
-                            <m:begChr m:val="["/>
-                            <m:endChr m:val="]"/>
-                            <m:ctrlPr>
-                              <a:rPr lang="en-US" altLang="zh-TW" sz="2000" i="1">
-                                <a:latin typeface="Cambria Math" panose="02040503050406030204" pitchFamily="18" charset="0"/>
-                              </a:rPr>
-                            </m:ctrlPr>
-                          </m:dPr>
-                          <m:e>
-                            <m:sSup>
-                              <m:sSupPr>
-                                <m:ctrlPr>
-                                  <a:rPr lang="en-US" altLang="zh-TW" sz="2000" i="1">
-                                    <a:latin typeface="Cambria Math" panose="02040503050406030204" pitchFamily="18" charset="0"/>
-                                  </a:rPr>
-                                </m:ctrlPr>
-                              </m:sSupPr>
-                              <m:e>
-                                <m:r>
-                                  <a:rPr lang="en-US" altLang="zh-TW" sz="2000" i="1">
-                                    <a:latin typeface="Cambria Math" panose="02040503050406030204" pitchFamily="18" charset="0"/>
-                                  </a:rPr>
-                                  <m:t>𝑒</m:t>
-                                </m:r>
-                              </m:e>
-                              <m:sup>
-                                <m:r>
-                                  <a:rPr lang="en-US" altLang="zh-TW" sz="2000" i="1">
-                                    <a:latin typeface="Cambria Math" panose="02040503050406030204" pitchFamily="18" charset="0"/>
-                                  </a:rPr>
-                                  <m:t>𝑖</m:t>
-                                </m:r>
-                                <m:d>
-                                  <m:dPr>
-                                    <m:ctrlPr>
-                                      <a:rPr lang="en-US" altLang="zh-TW" sz="2000" i="1" dirty="0">
-                                        <a:latin typeface="Cambria Math" panose="02040503050406030204" pitchFamily="18" charset="0"/>
-                                      </a:rPr>
-                                    </m:ctrlPr>
-                                  </m:dPr>
-                                  <m:e>
-                                    <m:r>
-                                      <a:rPr lang="en-US" altLang="zh-TW" sz="2000" i="1" dirty="0">
-                                        <a:latin typeface="Cambria Math" panose="02040503050406030204" pitchFamily="18" charset="0"/>
-                                      </a:rPr>
-                                      <m:t>ℓ+1</m:t>
-                                    </m:r>
-                                  </m:e>
-                                </m:d>
-                                <m:r>
-                                  <a:rPr lang="en-US" altLang="zh-TW" sz="2000" i="1">
-                                    <a:latin typeface="Cambria Math" panose="02040503050406030204" pitchFamily="18" charset="0"/>
-                                  </a:rPr>
-                                  <m:t>𝜙</m:t>
-                                </m:r>
-                              </m:sup>
-                            </m:sSup>
-                          </m:e>
-                        </m:d>
+                        <m:r>
+                          <a:rPr lang="en-US" altLang="zh-TW" sz="2000" i="1">
+                            <a:latin typeface="Cambria Math" panose="02040503050406030204" pitchFamily="18" charset="0"/>
+                          </a:rPr>
+                          <m:t>=1</m:t>
+                        </m:r>
                       </m:oMath>
                     </m:oMathPara>
                   </a14:m>
@@ -3558,7 +3602,7 @@
               </p:txBody>
             </p:sp>
           </mc:Choice>
-          <mc:Fallback>
+          <mc:Fallback xmlns="">
             <p:sp>
               <p:nvSpPr>
                 <p:cNvPr id="34" name="矩形 33">
@@ -3575,8 +3619,8 @@
               </p:nvSpPr>
               <p:spPr>
                 <a:xfrm>
-                  <a:off x="-33764" y="4351439"/>
-                  <a:ext cx="1583510" cy="445635"/>
+                  <a:off x="167204" y="4418261"/>
+                  <a:ext cx="883254" cy="400110"/>
                 </a:xfrm>
                 <a:prstGeom prst="rect">
                   <a:avLst/>
@@ -3640,16 +3684,16 @@
           </p:blipFill>
           <p:spPr>
             <a:xfrm>
-              <a:off x="8885524" y="2895516"/>
-              <a:ext cx="1053255" cy="2269795"/>
+              <a:off x="8863509" y="2963219"/>
+              <a:ext cx="1105991" cy="2383444"/>
             </a:xfrm>
             <a:prstGeom prst="rect">
               <a:avLst/>
             </a:prstGeom>
           </p:spPr>
         </p:pic>
-        <mc:AlternateContent xmlns:mc="http://schemas.openxmlformats.org/markup-compatibility/2006">
-          <mc:Choice xmlns:a14="http://schemas.microsoft.com/office/drawing/2010/main" Requires="a14">
+        <mc:AlternateContent xmlns:mc="http://schemas.openxmlformats.org/markup-compatibility/2006" xmlns:a14="http://schemas.microsoft.com/office/drawing/2010/main">
+          <mc:Choice Requires="a14">
             <p:sp>
               <p:nvSpPr>
                 <p:cNvPr id="36" name="矩形 35">
@@ -3664,7 +3708,7 @@
               </p:nvSpPr>
               <p:spPr>
                 <a:xfrm>
-                  <a:off x="1587424" y="4671322"/>
+                  <a:off x="1199993" y="4827940"/>
                   <a:ext cx="754437" cy="343171"/>
                 </a:xfrm>
                 <a:prstGeom prst="rect">
@@ -3726,7 +3770,7 @@
               </p:txBody>
             </p:sp>
           </mc:Choice>
-          <mc:Fallback>
+          <mc:Fallback xmlns="">
             <p:sp>
               <p:nvSpPr>
                 <p:cNvPr id="36" name="矩形 35">
@@ -3743,7 +3787,7 @@
               </p:nvSpPr>
               <p:spPr>
                 <a:xfrm>
-                  <a:off x="1587424" y="4671322"/>
+                  <a:off x="1199993" y="4827940"/>
                   <a:ext cx="754437" cy="343171"/>
                 </a:xfrm>
                 <a:prstGeom prst="rect">
@@ -3771,8 +3815,8 @@
             </p:sp>
           </mc:Fallback>
         </mc:AlternateContent>
-        <mc:AlternateContent xmlns:mc="http://schemas.openxmlformats.org/markup-compatibility/2006">
-          <mc:Choice xmlns:a14="http://schemas.microsoft.com/office/drawing/2010/main" Requires="a14">
+        <mc:AlternateContent xmlns:mc="http://schemas.openxmlformats.org/markup-compatibility/2006" xmlns:a14="http://schemas.microsoft.com/office/drawing/2010/main">
+          <mc:Choice Requires="a14">
             <p:sp>
               <p:nvSpPr>
                 <p:cNvPr id="37" name="矩形 36">
@@ -3787,7 +3831,7 @@
               </p:nvSpPr>
               <p:spPr>
                 <a:xfrm>
-                  <a:off x="1641193" y="5015903"/>
+                  <a:off x="1256454" y="5189774"/>
                   <a:ext cx="733662" cy="343171"/>
                 </a:xfrm>
                 <a:prstGeom prst="rect">
@@ -3824,7 +3868,7 @@
               </p:txBody>
             </p:sp>
           </mc:Choice>
-          <mc:Fallback>
+          <mc:Fallback xmlns="">
             <p:sp>
               <p:nvSpPr>
                 <p:cNvPr id="37" name="矩形 36">
@@ -3841,7 +3885,7 @@
               </p:nvSpPr>
               <p:spPr>
                 <a:xfrm>
-                  <a:off x="1641193" y="5015903"/>
+                  <a:off x="1256454" y="5189774"/>
                   <a:ext cx="733662" cy="343171"/>
                 </a:xfrm>
                 <a:prstGeom prst="rect">
@@ -3869,8 +3913,8 @@
             </p:sp>
           </mc:Fallback>
         </mc:AlternateContent>
-        <mc:AlternateContent xmlns:mc="http://schemas.openxmlformats.org/markup-compatibility/2006">
-          <mc:Choice xmlns:a14="http://schemas.microsoft.com/office/drawing/2010/main" Requires="a14">
+        <mc:AlternateContent xmlns:mc="http://schemas.openxmlformats.org/markup-compatibility/2006" xmlns:a14="http://schemas.microsoft.com/office/drawing/2010/main">
+          <mc:Choice Requires="a14">
             <p:sp>
               <p:nvSpPr>
                 <p:cNvPr id="38" name="矩形 37">
@@ -3885,7 +3929,7 @@
               </p:nvSpPr>
               <p:spPr>
                 <a:xfrm>
-                  <a:off x="2925421" y="5015903"/>
+                  <a:off x="2604983" y="5189774"/>
                   <a:ext cx="733662" cy="343171"/>
                 </a:xfrm>
                 <a:prstGeom prst="rect">
@@ -3922,7 +3966,7 @@
               </p:txBody>
             </p:sp>
           </mc:Choice>
-          <mc:Fallback>
+          <mc:Fallback xmlns="">
             <p:sp>
               <p:nvSpPr>
                 <p:cNvPr id="38" name="矩形 37">
@@ -3939,7 +3983,7 @@
               </p:nvSpPr>
               <p:spPr>
                 <a:xfrm>
-                  <a:off x="2925421" y="5015903"/>
+                  <a:off x="2604983" y="5189774"/>
                   <a:ext cx="733662" cy="343171"/>
                 </a:xfrm>
                 <a:prstGeom prst="rect">
@@ -3967,8 +4011,8 @@
             </p:sp>
           </mc:Fallback>
         </mc:AlternateContent>
-        <mc:AlternateContent xmlns:mc="http://schemas.openxmlformats.org/markup-compatibility/2006">
-          <mc:Choice xmlns:a14="http://schemas.microsoft.com/office/drawing/2010/main" Requires="a14">
+        <mc:AlternateContent xmlns:mc="http://schemas.openxmlformats.org/markup-compatibility/2006" xmlns:a14="http://schemas.microsoft.com/office/drawing/2010/main">
+          <mc:Choice Requires="a14">
             <p:sp>
               <p:nvSpPr>
                 <p:cNvPr id="39" name="矩形 38">
@@ -3983,7 +4027,7 @@
               </p:nvSpPr>
               <p:spPr>
                 <a:xfrm>
-                  <a:off x="4209649" y="5015903"/>
+                  <a:off x="3953513" y="5189774"/>
                   <a:ext cx="733662" cy="343171"/>
                 </a:xfrm>
                 <a:prstGeom prst="rect">
@@ -4020,7 +4064,7 @@
               </p:txBody>
             </p:sp>
           </mc:Choice>
-          <mc:Fallback>
+          <mc:Fallback xmlns="">
             <p:sp>
               <p:nvSpPr>
                 <p:cNvPr id="39" name="矩形 38">
@@ -4037,7 +4081,7 @@
               </p:nvSpPr>
               <p:spPr>
                 <a:xfrm>
-                  <a:off x="4209649" y="5015903"/>
+                  <a:off x="3953513" y="5189774"/>
                   <a:ext cx="733662" cy="343171"/>
                 </a:xfrm>
                 <a:prstGeom prst="rect">
@@ -4065,8 +4109,8 @@
             </p:sp>
           </mc:Fallback>
         </mc:AlternateContent>
-        <mc:AlternateContent xmlns:mc="http://schemas.openxmlformats.org/markup-compatibility/2006">
-          <mc:Choice xmlns:a14="http://schemas.microsoft.com/office/drawing/2010/main" Requires="a14">
+        <mc:AlternateContent xmlns:mc="http://schemas.openxmlformats.org/markup-compatibility/2006" xmlns:a14="http://schemas.microsoft.com/office/drawing/2010/main">
+          <mc:Choice Requires="a14">
             <p:sp>
               <p:nvSpPr>
                 <p:cNvPr id="40" name="矩形 39">
@@ -4081,7 +4125,7 @@
               </p:nvSpPr>
               <p:spPr>
                 <a:xfrm>
-                  <a:off x="5493877" y="5015903"/>
+                  <a:off x="5302042" y="5189774"/>
                   <a:ext cx="733662" cy="343171"/>
                 </a:xfrm>
                 <a:prstGeom prst="rect">
@@ -4118,7 +4162,7 @@
               </p:txBody>
             </p:sp>
           </mc:Choice>
-          <mc:Fallback>
+          <mc:Fallback xmlns="">
             <p:sp>
               <p:nvSpPr>
                 <p:cNvPr id="40" name="矩形 39">
@@ -4135,7 +4179,7 @@
               </p:nvSpPr>
               <p:spPr>
                 <a:xfrm>
-                  <a:off x="5493877" y="5015903"/>
+                  <a:off x="5302042" y="5189774"/>
                   <a:ext cx="733662" cy="343171"/>
                 </a:xfrm>
                 <a:prstGeom prst="rect">
@@ -4163,8 +4207,8 @@
             </p:sp>
           </mc:Fallback>
         </mc:AlternateContent>
-        <mc:AlternateContent xmlns:mc="http://schemas.openxmlformats.org/markup-compatibility/2006">
-          <mc:Choice xmlns:a14="http://schemas.microsoft.com/office/drawing/2010/main" Requires="a14">
+        <mc:AlternateContent xmlns:mc="http://schemas.openxmlformats.org/markup-compatibility/2006" xmlns:a14="http://schemas.microsoft.com/office/drawing/2010/main">
+          <mc:Choice Requires="a14">
             <p:sp>
               <p:nvSpPr>
                 <p:cNvPr id="41" name="矩形 40">
@@ -4179,7 +4223,7 @@
               </p:nvSpPr>
               <p:spPr>
                 <a:xfrm>
-                  <a:off x="6778105" y="5015903"/>
+                  <a:off x="6650571" y="5189774"/>
                   <a:ext cx="733662" cy="343171"/>
                 </a:xfrm>
                 <a:prstGeom prst="rect">
@@ -4216,7 +4260,7 @@
               </p:txBody>
             </p:sp>
           </mc:Choice>
-          <mc:Fallback>
+          <mc:Fallback xmlns="">
             <p:sp>
               <p:nvSpPr>
                 <p:cNvPr id="41" name="矩形 40">
@@ -4233,7 +4277,7 @@
               </p:nvSpPr>
               <p:spPr>
                 <a:xfrm>
-                  <a:off x="6778105" y="5015903"/>
+                  <a:off x="6650571" y="5189774"/>
                   <a:ext cx="733662" cy="343171"/>
                 </a:xfrm>
                 <a:prstGeom prst="rect">
@@ -4261,8 +4305,8 @@
             </p:sp>
           </mc:Fallback>
         </mc:AlternateContent>
-        <mc:AlternateContent xmlns:mc="http://schemas.openxmlformats.org/markup-compatibility/2006">
-          <mc:Choice xmlns:a14="http://schemas.microsoft.com/office/drawing/2010/main" Requires="a14">
+        <mc:AlternateContent xmlns:mc="http://schemas.openxmlformats.org/markup-compatibility/2006" xmlns:a14="http://schemas.microsoft.com/office/drawing/2010/main">
+          <mc:Choice Requires="a14">
             <p:sp>
               <p:nvSpPr>
                 <p:cNvPr id="42" name="矩形 41">
@@ -4277,7 +4321,7 @@
               </p:nvSpPr>
               <p:spPr>
                 <a:xfrm>
-                  <a:off x="8062333" y="5015903"/>
+                  <a:off x="7999100" y="5189774"/>
                   <a:ext cx="733662" cy="343171"/>
                 </a:xfrm>
                 <a:prstGeom prst="rect">
@@ -4314,7 +4358,7 @@
               </p:txBody>
             </p:sp>
           </mc:Choice>
-          <mc:Fallback>
+          <mc:Fallback xmlns="">
             <p:sp>
               <p:nvSpPr>
                 <p:cNvPr id="42" name="矩形 41">
@@ -4331,7 +4375,7 @@
               </p:nvSpPr>
               <p:spPr>
                 <a:xfrm>
-                  <a:off x="8062333" y="5015903"/>
+                  <a:off x="7999100" y="5189774"/>
                   <a:ext cx="733662" cy="343171"/>
                 </a:xfrm>
                 <a:prstGeom prst="rect">
@@ -4373,7 +4417,7 @@
           </p:nvSpPr>
           <p:spPr>
             <a:xfrm rot="5400000">
-              <a:off x="9122393" y="3843110"/>
+              <a:off x="9044346" y="3966850"/>
               <a:ext cx="1359668" cy="343171"/>
             </a:xfrm>
             <a:prstGeom prst="rect">
@@ -4414,8 +4458,8 @@
           </p:nvSpPr>
           <p:spPr>
             <a:xfrm>
-              <a:off x="2010795" y="4463869"/>
-              <a:ext cx="92654" cy="27541"/>
+              <a:off x="1644562" y="4610100"/>
+              <a:ext cx="97293" cy="28920"/>
             </a:xfrm>
             <a:prstGeom prst="rightArrow">
               <a:avLst>
@@ -4477,8 +4521,8 @@
           </p:nvSpPr>
           <p:spPr>
             <a:xfrm rot="16200000">
-              <a:off x="1970875" y="4424358"/>
-              <a:ext cx="91764" cy="27808"/>
+              <a:off x="1602643" y="4568611"/>
+              <a:ext cx="96359" cy="29200"/>
             </a:xfrm>
             <a:prstGeom prst="rightArrow">
               <a:avLst>
@@ -4526,8 +4570,8 @@
             </a:p>
           </p:txBody>
         </p:sp>
-        <mc:AlternateContent xmlns:mc="http://schemas.openxmlformats.org/markup-compatibility/2006">
-          <mc:Choice xmlns:a14="http://schemas.microsoft.com/office/drawing/2010/main" Requires="a14">
+        <mc:AlternateContent xmlns:mc="http://schemas.openxmlformats.org/markup-compatibility/2006" xmlns:a14="http://schemas.microsoft.com/office/drawing/2010/main">
+          <mc:Choice Requires="a14">
             <p:sp>
               <p:nvSpPr>
                 <p:cNvPr id="23" name="文字方塊 22">
@@ -4542,8 +4586,8 @@
               </p:nvSpPr>
               <p:spPr>
                 <a:xfrm>
-                  <a:off x="1891549" y="4091315"/>
-                  <a:ext cx="323386" cy="362150"/>
+                  <a:off x="1519345" y="4218892"/>
+                  <a:ext cx="339578" cy="362150"/>
                 </a:xfrm>
                 <a:prstGeom prst="rect">
                   <a:avLst/>
@@ -4626,7 +4670,7 @@
               </p:txBody>
             </p:sp>
           </mc:Choice>
-          <mc:Fallback>
+          <mc:Fallback xmlns="">
             <p:sp>
               <p:nvSpPr>
                 <p:cNvPr id="23" name="文字方塊 22">
@@ -4643,8 +4687,8 @@
               </p:nvSpPr>
               <p:spPr>
                 <a:xfrm>
-                  <a:off x="1891549" y="4091315"/>
-                  <a:ext cx="323386" cy="362150"/>
+                  <a:off x="1519345" y="4218892"/>
+                  <a:ext cx="339578" cy="362150"/>
                 </a:xfrm>
                 <a:prstGeom prst="rect">
                   <a:avLst/>
@@ -4652,7 +4696,7 @@
                 <a:blipFill>
                   <a:blip r:embed="rId16"/>
                   <a:stretch>
-                    <a:fillRect r="-7547" b="-1695"/>
+                    <a:fillRect r="-3571" b="-1695"/>
                   </a:stretch>
                 </a:blipFill>
               </p:spPr>
@@ -4671,8 +4715,8 @@
             </p:sp>
           </mc:Fallback>
         </mc:AlternateContent>
-        <mc:AlternateContent xmlns:mc="http://schemas.openxmlformats.org/markup-compatibility/2006">
-          <mc:Choice xmlns:a14="http://schemas.microsoft.com/office/drawing/2010/main" Requires="a14">
+        <mc:AlternateContent xmlns:mc="http://schemas.openxmlformats.org/markup-compatibility/2006" xmlns:a14="http://schemas.microsoft.com/office/drawing/2010/main">
+          <mc:Choice Requires="a14">
             <p:sp>
               <p:nvSpPr>
                 <p:cNvPr id="24" name="文字方塊 23">
@@ -4687,8 +4731,8 @@
               </p:nvSpPr>
               <p:spPr>
                 <a:xfrm>
-                  <a:off x="2053689" y="4302656"/>
-                  <a:ext cx="406919" cy="342401"/>
+                  <a:off x="1689604" y="4440815"/>
+                  <a:ext cx="427293" cy="342401"/>
                 </a:xfrm>
                 <a:prstGeom prst="rect">
                   <a:avLst/>
@@ -4771,7 +4815,7 @@
               </p:txBody>
             </p:sp>
           </mc:Choice>
-          <mc:Fallback>
+          <mc:Fallback xmlns="">
             <p:sp>
               <p:nvSpPr>
                 <p:cNvPr id="24" name="文字方塊 23">
@@ -4788,8 +4832,8 @@
               </p:nvSpPr>
               <p:spPr>
                 <a:xfrm>
-                  <a:off x="2053689" y="4302656"/>
-                  <a:ext cx="406919" cy="342401"/>
+                  <a:off x="1689604" y="4440815"/>
+                  <a:ext cx="427293" cy="342401"/>
                 </a:xfrm>
                 <a:prstGeom prst="rect">
                   <a:avLst/>
@@ -4797,7 +4841,213 @@
                 <a:blipFill>
                   <a:blip r:embed="rId17"/>
                   <a:stretch>
-                    <a:fillRect r="-2985" b="-5263"/>
+                    <a:fillRect r="-5634" b="-7143"/>
+                  </a:stretch>
+                </a:blipFill>
+              </p:spPr>
+              <p:txBody>
+                <a:bodyPr/>
+                <a:lstStyle/>
+                <a:p>
+                  <a:r>
+                    <a:rPr lang="zh-TW" altLang="en-US">
+                      <a:noFill/>
+                    </a:rPr>
+                    <a:t> </a:t>
+                  </a:r>
+                </a:p>
+              </p:txBody>
+            </p:sp>
+          </mc:Fallback>
+        </mc:AlternateContent>
+        <mc:AlternateContent xmlns:mc="http://schemas.openxmlformats.org/markup-compatibility/2006" xmlns:a14="http://schemas.microsoft.com/office/drawing/2010/main">
+          <mc:Choice Requires="a14">
+            <p:sp>
+              <p:nvSpPr>
+                <p:cNvPr id="26" name="矩形 25">
+                  <a:extLst>
+                    <a:ext uri="{FF2B5EF4-FFF2-40B4-BE49-F238E27FC236}">
+                      <a16:creationId xmlns:a16="http://schemas.microsoft.com/office/drawing/2014/main" id="{B8DBEE87-FB7D-434D-B5B9-21338773D7B6}"/>
+                    </a:ext>
+                  </a:extLst>
+                </p:cNvPr>
+                <p:cNvSpPr/>
+                <p:nvPr/>
+              </p:nvSpPr>
+              <p:spPr>
+                <a:xfrm>
+                  <a:off x="-42052" y="992496"/>
+                  <a:ext cx="1831463" cy="550728"/>
+                </a:xfrm>
+                <a:prstGeom prst="rect">
+                  <a:avLst/>
+                </a:prstGeom>
+              </p:spPr>
+              <p:txBody>
+                <a:bodyPr wrap="none">
+                  <a:spAutoFit/>
+                </a:bodyPr>
+                <a:lstStyle/>
+                <a:p>
+                  <a:pPr/>
+                  <a14:m>
+                    <m:oMathPara xmlns:m="http://schemas.openxmlformats.org/officeDocument/2006/math">
+                      <m:oMathParaPr>
+                        <m:jc m:val="centerGroup"/>
+                      </m:oMathParaPr>
+                      <m:oMath xmlns:m="http://schemas.openxmlformats.org/officeDocument/2006/math">
+                        <m:r>
+                          <m:rPr>
+                            <m:sty m:val="p"/>
+                          </m:rPr>
+                          <a:rPr lang="en-US" altLang="zh-TW" sz="2000" smtClean="0">
+                            <a:latin typeface="Cambria Math" panose="02040503050406030204" pitchFamily="18" charset="0"/>
+                          </a:rPr>
+                          <m:t>Re</m:t>
+                        </m:r>
+                        <m:d>
+                          <m:dPr>
+                            <m:begChr m:val="["/>
+                            <m:endChr m:val="]"/>
+                            <m:ctrlPr>
+                              <a:rPr lang="en-US" altLang="zh-TW" sz="2000" i="1">
+                                <a:latin typeface="Cambria Math" panose="02040503050406030204" pitchFamily="18" charset="0"/>
+                              </a:rPr>
+                            </m:ctrlPr>
+                          </m:dPr>
+                          <m:e>
+                            <m:sSup>
+                              <m:sSupPr>
+                                <m:ctrlPr>
+                                  <a:rPr lang="en-US" altLang="zh-TW" sz="2000" i="1">
+                                    <a:latin typeface="Cambria Math" panose="02040503050406030204" pitchFamily="18" charset="0"/>
+                                  </a:rPr>
+                                </m:ctrlPr>
+                              </m:sSupPr>
+                              <m:e>
+                                <m:r>
+                                  <a:rPr lang="en-US" altLang="zh-TW" sz="2000" i="1">
+                                    <a:latin typeface="Cambria Math" panose="02040503050406030204" pitchFamily="18" charset="0"/>
+                                  </a:rPr>
+                                  <m:t>𝑒</m:t>
+                                </m:r>
+                              </m:e>
+                              <m:sup>
+                                <m:r>
+                                  <a:rPr lang="en-US" altLang="zh-TW" sz="2000" i="1">
+                                    <a:latin typeface="Cambria Math" panose="02040503050406030204" pitchFamily="18" charset="0"/>
+                                  </a:rPr>
+                                  <m:t>𝑖</m:t>
+                                </m:r>
+                                <m:d>
+                                  <m:dPr>
+                                    <m:ctrlPr>
+                                      <a:rPr lang="en-US" altLang="zh-TW" sz="2000" i="1" dirty="0">
+                                        <a:latin typeface="Cambria Math" panose="02040503050406030204" pitchFamily="18" charset="0"/>
+                                      </a:rPr>
+                                    </m:ctrlPr>
+                                  </m:dPr>
+                                  <m:e>
+                                    <m:r>
+                                      <a:rPr lang="en-US" altLang="zh-TW" sz="2000" i="1" dirty="0">
+                                        <a:latin typeface="Cambria Math" panose="02040503050406030204" pitchFamily="18" charset="0"/>
+                                      </a:rPr>
+                                      <m:t>ℓ+</m:t>
+                                    </m:r>
+                                    <m:r>
+                                      <a:rPr lang="en-US" altLang="zh-TW" sz="2000" i="1" dirty="0">
+                                        <a:latin typeface="Cambria Math" panose="02040503050406030204" pitchFamily="18" charset="0"/>
+                                      </a:rPr>
+                                      <m:t>𝜎</m:t>
+                                    </m:r>
+                                  </m:e>
+                                </m:d>
+                                <m:sSub>
+                                  <m:sSubPr>
+                                    <m:ctrlPr>
+                                      <a:rPr lang="en-US" altLang="zh-TW" sz="2000" b="0" i="1" smtClean="0">
+                                        <a:latin typeface="Cambria Math" panose="02040503050406030204" pitchFamily="18" charset="0"/>
+                                      </a:rPr>
+                                    </m:ctrlPr>
+                                  </m:sSubPr>
+                                  <m:e>
+                                    <m:r>
+                                      <a:rPr lang="en-US" altLang="zh-TW" sz="2000" i="1">
+                                        <a:latin typeface="Cambria Math" panose="02040503050406030204" pitchFamily="18" charset="0"/>
+                                      </a:rPr>
+                                      <m:t>𝜙</m:t>
+                                    </m:r>
+                                  </m:e>
+                                  <m:sub>
+                                    <m:sSub>
+                                      <m:sSubPr>
+                                        <m:ctrlPr>
+                                          <a:rPr lang="en-US" altLang="zh-TW" sz="2000" b="0" i="1" smtClean="0">
+                                            <a:latin typeface="Cambria Math" panose="02040503050406030204" pitchFamily="18" charset="0"/>
+                                          </a:rPr>
+                                        </m:ctrlPr>
+                                      </m:sSubPr>
+                                      <m:e>
+                                        <m:r>
+                                          <a:rPr lang="en-US" altLang="zh-TW" sz="2000" b="1" i="1" smtClean="0">
+                                            <a:latin typeface="Cambria Math" panose="02040503050406030204" pitchFamily="18" charset="0"/>
+                                          </a:rPr>
+                                          <m:t>𝒒</m:t>
+                                        </m:r>
+                                      </m:e>
+                                      <m:sub>
+                                        <m:r>
+                                          <a:rPr lang="en-US" altLang="zh-TW" sz="2000" b="0" i="1" smtClean="0">
+                                            <a:latin typeface="Cambria Math" panose="02040503050406030204" pitchFamily="18" charset="0"/>
+                                          </a:rPr>
+                                          <m:t>∥</m:t>
+                                        </m:r>
+                                      </m:sub>
+                                    </m:sSub>
+                                  </m:sub>
+                                </m:sSub>
+                              </m:sup>
+                            </m:sSup>
+                          </m:e>
+                        </m:d>
+                      </m:oMath>
+                    </m:oMathPara>
+                  </a14:m>
+                  <a:endParaRPr lang="zh-TW" altLang="en-US" sz="2000" dirty="0">
+                    <a:latin typeface="Times New Roman" panose="02020603050405020304" pitchFamily="18" charset="0"/>
+                    <a:cs typeface="Times New Roman" panose="02020603050405020304" pitchFamily="18" charset="0"/>
+                  </a:endParaRPr>
+                </a:p>
+              </p:txBody>
+            </p:sp>
+          </mc:Choice>
+          <mc:Fallback xmlns="">
+            <p:sp>
+              <p:nvSpPr>
+                <p:cNvPr id="26" name="矩形 25">
+                  <a:extLst>
+                    <a:ext uri="{FF2B5EF4-FFF2-40B4-BE49-F238E27FC236}">
+                      <a16:creationId xmlns:a16="http://schemas.microsoft.com/office/drawing/2014/main" id="{B8DBEE87-FB7D-434D-B5B9-21338773D7B6}"/>
+                    </a:ext>
+                  </a:extLst>
+                </p:cNvPr>
+                <p:cNvSpPr>
+                  <a:spLocks noRot="1" noChangeAspect="1" noMove="1" noResize="1" noEditPoints="1" noAdjustHandles="1" noChangeArrowheads="1" noChangeShapeType="1" noTextEdit="1"/>
+                </p:cNvSpPr>
+                <p:nvPr/>
+              </p:nvSpPr>
+              <p:spPr>
+                <a:xfrm>
+                  <a:off x="-42052" y="992496"/>
+                  <a:ext cx="1831463" cy="550728"/>
+                </a:xfrm>
+                <a:prstGeom prst="rect">
+                  <a:avLst/>
+                </a:prstGeom>
+                <a:blipFill>
+                  <a:blip r:embed="rId18"/>
+                  <a:stretch>
+                    <a:fillRect/>
                   </a:stretch>
                 </a:blipFill>
               </p:spPr>

--- a/Final/Figures/phasefig.pptx
+++ b/Final/Figures/phasefig.pptx
@@ -243,7 +243,7 @@
           <a:p>
             <a:fld id="{CC6FB895-B65F-4EA9-9907-69D32227E72B}" type="datetimeFigureOut">
               <a:rPr lang="zh-TW" altLang="en-US" smtClean="0"/>
-              <a:t>2026/6/17</a:t>
+              <a:t>2026/7/26</a:t>
             </a:fld>
             <a:endParaRPr lang="zh-TW" altLang="en-US"/>
           </a:p>
@@ -413,7 +413,7 @@
           <a:p>
             <a:fld id="{CC6FB895-B65F-4EA9-9907-69D32227E72B}" type="datetimeFigureOut">
               <a:rPr lang="zh-TW" altLang="en-US" smtClean="0"/>
-              <a:t>2026/6/17</a:t>
+              <a:t>2026/7/26</a:t>
             </a:fld>
             <a:endParaRPr lang="zh-TW" altLang="en-US"/>
           </a:p>
@@ -593,7 +593,7 @@
           <a:p>
             <a:fld id="{CC6FB895-B65F-4EA9-9907-69D32227E72B}" type="datetimeFigureOut">
               <a:rPr lang="zh-TW" altLang="en-US" smtClean="0"/>
-              <a:t>2026/6/17</a:t>
+              <a:t>2026/7/26</a:t>
             </a:fld>
             <a:endParaRPr lang="zh-TW" altLang="en-US"/>
           </a:p>
@@ -763,7 +763,7 @@
           <a:p>
             <a:fld id="{CC6FB895-B65F-4EA9-9907-69D32227E72B}" type="datetimeFigureOut">
               <a:rPr lang="zh-TW" altLang="en-US" smtClean="0"/>
-              <a:t>2026/6/17</a:t>
+              <a:t>2026/7/26</a:t>
             </a:fld>
             <a:endParaRPr lang="zh-TW" altLang="en-US"/>
           </a:p>
@@ -1009,7 +1009,7 @@
           <a:p>
             <a:fld id="{CC6FB895-B65F-4EA9-9907-69D32227E72B}" type="datetimeFigureOut">
               <a:rPr lang="zh-TW" altLang="en-US" smtClean="0"/>
-              <a:t>2026/6/17</a:t>
+              <a:t>2026/7/26</a:t>
             </a:fld>
             <a:endParaRPr lang="zh-TW" altLang="en-US"/>
           </a:p>
@@ -1241,7 +1241,7 @@
           <a:p>
             <a:fld id="{CC6FB895-B65F-4EA9-9907-69D32227E72B}" type="datetimeFigureOut">
               <a:rPr lang="zh-TW" altLang="en-US" smtClean="0"/>
-              <a:t>2026/6/17</a:t>
+              <a:t>2026/7/26</a:t>
             </a:fld>
             <a:endParaRPr lang="zh-TW" altLang="en-US"/>
           </a:p>
@@ -1608,7 +1608,7 @@
           <a:p>
             <a:fld id="{CC6FB895-B65F-4EA9-9907-69D32227E72B}" type="datetimeFigureOut">
               <a:rPr lang="zh-TW" altLang="en-US" smtClean="0"/>
-              <a:t>2026/6/17</a:t>
+              <a:t>2026/7/26</a:t>
             </a:fld>
             <a:endParaRPr lang="zh-TW" altLang="en-US"/>
           </a:p>
@@ -1726,7 +1726,7 @@
           <a:p>
             <a:fld id="{CC6FB895-B65F-4EA9-9907-69D32227E72B}" type="datetimeFigureOut">
               <a:rPr lang="zh-TW" altLang="en-US" smtClean="0"/>
-              <a:t>2026/6/17</a:t>
+              <a:t>2026/7/26</a:t>
             </a:fld>
             <a:endParaRPr lang="zh-TW" altLang="en-US"/>
           </a:p>
@@ -1821,7 +1821,7 @@
           <a:p>
             <a:fld id="{CC6FB895-B65F-4EA9-9907-69D32227E72B}" type="datetimeFigureOut">
               <a:rPr lang="zh-TW" altLang="en-US" smtClean="0"/>
-              <a:t>2026/6/17</a:t>
+              <a:t>2026/7/26</a:t>
             </a:fld>
             <a:endParaRPr lang="zh-TW" altLang="en-US"/>
           </a:p>
@@ -2098,7 +2098,7 @@
           <a:p>
             <a:fld id="{CC6FB895-B65F-4EA9-9907-69D32227E72B}" type="datetimeFigureOut">
               <a:rPr lang="zh-TW" altLang="en-US" smtClean="0"/>
-              <a:t>2026/6/17</a:t>
+              <a:t>2026/7/26</a:t>
             </a:fld>
             <a:endParaRPr lang="zh-TW" altLang="en-US"/>
           </a:p>
@@ -2355,7 +2355,7 @@
           <a:p>
             <a:fld id="{CC6FB895-B65F-4EA9-9907-69D32227E72B}" type="datetimeFigureOut">
               <a:rPr lang="zh-TW" altLang="en-US" smtClean="0"/>
-              <a:t>2026/6/17</a:t>
+              <a:t>2026/7/26</a:t>
             </a:fld>
             <a:endParaRPr lang="zh-TW" altLang="en-US"/>
           </a:p>
@@ -2568,7 +2568,7 @@
           <a:p>
             <a:fld id="{CC6FB895-B65F-4EA9-9907-69D32227E72B}" type="datetimeFigureOut">
               <a:rPr lang="zh-TW" altLang="en-US" smtClean="0"/>
-              <a:t>2026/6/17</a:t>
+              <a:t>2026/7/26</a:t>
             </a:fld>
             <a:endParaRPr lang="zh-TW" altLang="en-US"/>
           </a:p>
@@ -5067,6 +5067,36 @@
           </mc:Fallback>
         </mc:AlternateContent>
       </p:grpSp>
+      <p:pic>
+        <p:nvPicPr>
+          <p:cNvPr id="2" name="圖片 1">
+            <a:extLst>
+              <a:ext uri="{FF2B5EF4-FFF2-40B4-BE49-F238E27FC236}">
+                <a16:creationId xmlns:a16="http://schemas.microsoft.com/office/drawing/2014/main" id="{6A08C816-8B8B-4BFB-82A7-26886A1B0A87}"/>
+              </a:ext>
+            </a:extLst>
+          </p:cNvPr>
+          <p:cNvPicPr>
+            <a:picLocks noChangeAspect="1"/>
+          </p:cNvPicPr>
+          <p:nvPr/>
+        </p:nvPicPr>
+        <p:blipFill>
+          <a:blip r:embed="rId19"/>
+          <a:stretch>
+            <a:fillRect/>
+          </a:stretch>
+        </p:blipFill>
+        <p:spPr>
+          <a:xfrm>
+            <a:off x="8792409" y="2025633"/>
+            <a:ext cx="523948" cy="2067213"/>
+          </a:xfrm>
+          <a:prstGeom prst="rect">
+            <a:avLst/>
+          </a:prstGeom>
+        </p:spPr>
+      </p:pic>
     </p:spTree>
     <p:extLst>
       <p:ext uri="{BB962C8B-B14F-4D97-AF65-F5344CB8AC3E}">
